--- a/content/05-teaching-resources/slides/core/15-health-and-safety-legislation.pptx
+++ b/content/05-teaching-resources/slides/core/15-health-and-safety-legislation.pptx
@@ -8,12 +8,16 @@
     <p:sldId id="256" r:id="rId7"/>
     <p:sldId id="257" r:id="rId8"/>
     <p:sldId id="258" r:id="rId9"/>
-    <p:sldId id="259" r:id="rId11"/>
+    <p:sldId id="259" r:id="rId10"/>
     <p:sldId id="260" r:id="rId12"/>
     <p:sldId id="261" r:id="rId13"/>
     <p:sldId id="262" r:id="rId14"/>
     <p:sldId id="263" r:id="rId15"/>
     <p:sldId id="264" r:id="rId16"/>
+    <p:sldId id="265" r:id="rId17"/>
+    <p:sldId id="266" r:id="rId18"/>
+    <p:sldId id="267" r:id="rId19"/>
+    <p:sldId id="268" r:id="rId20"/>
   </p:sldIdLst>
   <p:sldSz cx="12191695" cy="6858000" type="screen4x3"/>
   <p:notesSz cx="6858000" cy="9144000"/>
@@ -580,7 +584,22 @@
           <a:lstStyle/>
           <a:p>
             <a:r>
-              <a:t>Requirements differ locally, nationally and globally; multinational firms must meet them all.</a:t>
+              <a:t>Answers:</a:t>
+            </a:r>
+          </a:p>
+          <a:p>
+            <a:r>
+              <a:t>1. LOLER.</a:t>
+            </a:r>
+          </a:p>
+          <a:p>
+            <a:r>
+              <a:t>2. Hazardous substances.</a:t>
+            </a:r>
+          </a:p>
+          <a:p>
+            <a:r>
+              <a:t>3. Reporting serious injuries, diseases and dangerous occurrences.</a:t>
             </a:r>
           </a:p>
         </p:txBody>
@@ -650,7 +669,22 @@
           <a:lstStyle/>
           <a:p>
             <a:r>
-              <a:t>Give students a few minutes to answer on mini whiteboards or paper, then reveal the answers on the next slide.</a:t>
+              <a:t>Answers:</a:t>
+            </a:r>
+          </a:p>
+          <a:p>
+            <a:r>
+              <a:t>1. E.g. work safely, co-operate, don't misuse safety equipment.</a:t>
+            </a:r>
+          </a:p>
+          <a:p>
+            <a:r>
+              <a:t>2. The HSE.</a:t>
+            </a:r>
+          </a:p>
+          <a:p>
+            <a:r>
+              <a:t>3. Yes.</a:t>
             </a:r>
           </a:p>
         </p:txBody>
@@ -720,7 +754,7 @@
           <a:lstStyle/>
           <a:p>
             <a:r>
-              <a:t>Talk through any answers the class found difficult.</a:t>
+              <a:t>Requirements differ locally, nationally and globally; multinational firms must meet them all.</a:t>
             </a:r>
           </a:p>
         </p:txBody>
@@ -746,6 +780,146 @@
 </file>
 
 <file path=ppt/notesSlides/notesSlide5.xml><?xml version="1.0" encoding="utf-8"?>
+<p:notes xmlns:a="http://schemas.openxmlformats.org/drawingml/2006/main" xmlns:p="http://schemas.openxmlformats.org/presentationml/2006/main" xmlns:r="http://schemas.openxmlformats.org/officeDocument/2006/relationships">
+  <p:cSld>
+    <p:spTree>
+      <p:nvGrpSpPr>
+        <p:cNvPr id="1" name=""/>
+        <p:cNvGrpSpPr/>
+        <p:nvPr/>
+      </p:nvGrpSpPr>
+      <p:grpSpPr>
+        <a:xfrm>
+          <a:off x="0" y="0"/>
+          <a:ext cx="0" cy="0"/>
+          <a:chOff x="0" y="0"/>
+          <a:chExt cx="0" cy="0"/>
+        </a:xfrm>
+      </p:grpSpPr>
+      <p:sp>
+        <p:nvSpPr>
+          <p:cNvPr id="2" name="Slide Image Placeholder 1"/>
+          <p:cNvSpPr>
+            <a:spLocks noGrp="1"/>
+          </p:cNvSpPr>
+          <p:nvPr>
+            <p:ph type="sldImg" idx="2"/>
+          </p:nvPr>
+        </p:nvSpPr>
+        <p:spPr/>
+      </p:sp>
+      <p:sp>
+        <p:nvSpPr>
+          <p:cNvPr id="3" name="Notes Placeholder 2"/>
+          <p:cNvSpPr>
+            <a:spLocks noGrp="1"/>
+          </p:cNvSpPr>
+          <p:nvPr>
+            <p:ph type="body" idx="3" sz="quarter"/>
+          </p:nvPr>
+        </p:nvSpPr>
+        <p:spPr/>
+        <p:txBody>
+          <a:bodyPr/>
+          <a:lstStyle/>
+          <a:p>
+            <a:r>
+              <a:t>Give students a few minutes to answer on mini whiteboards or paper, then reveal the answers on the next slide.</a:t>
+            </a:r>
+          </a:p>
+        </p:txBody>
+      </p:sp>
+      <p:sp>
+        <p:nvSpPr>
+          <p:cNvPr id="4" name="Slide Number Placeholder 3"/>
+          <p:cNvSpPr>
+            <a:spLocks noGrp="1"/>
+          </p:cNvSpPr>
+          <p:nvPr>
+            <p:ph type="sldNum" idx="5" sz="quarter"/>
+          </p:nvPr>
+        </p:nvSpPr>
+        <p:spPr/>
+      </p:sp>
+    </p:spTree>
+  </p:cSld>
+  <p:clrMapOvr>
+    <a:masterClrMapping/>
+  </p:clrMapOvr>
+</p:notes>
+</file>
+
+<file path=ppt/notesSlides/notesSlide6.xml><?xml version="1.0" encoding="utf-8"?>
+<p:notes xmlns:a="http://schemas.openxmlformats.org/drawingml/2006/main" xmlns:p="http://schemas.openxmlformats.org/presentationml/2006/main" xmlns:r="http://schemas.openxmlformats.org/officeDocument/2006/relationships">
+  <p:cSld>
+    <p:spTree>
+      <p:nvGrpSpPr>
+        <p:cNvPr id="1" name=""/>
+        <p:cNvGrpSpPr/>
+        <p:nvPr/>
+      </p:nvGrpSpPr>
+      <p:grpSpPr>
+        <a:xfrm>
+          <a:off x="0" y="0"/>
+          <a:ext cx="0" cy="0"/>
+          <a:chOff x="0" y="0"/>
+          <a:chExt cx="0" cy="0"/>
+        </a:xfrm>
+      </p:grpSpPr>
+      <p:sp>
+        <p:nvSpPr>
+          <p:cNvPr id="2" name="Slide Image Placeholder 1"/>
+          <p:cNvSpPr>
+            <a:spLocks noGrp="1"/>
+          </p:cNvSpPr>
+          <p:nvPr>
+            <p:ph type="sldImg" idx="2"/>
+          </p:nvPr>
+        </p:nvSpPr>
+        <p:spPr/>
+      </p:sp>
+      <p:sp>
+        <p:nvSpPr>
+          <p:cNvPr id="3" name="Notes Placeholder 2"/>
+          <p:cNvSpPr>
+            <a:spLocks noGrp="1"/>
+          </p:cNvSpPr>
+          <p:nvPr>
+            <p:ph type="body" idx="3" sz="quarter"/>
+          </p:nvPr>
+        </p:nvSpPr>
+        <p:spPr/>
+        <p:txBody>
+          <a:bodyPr/>
+          <a:lstStyle/>
+          <a:p>
+            <a:r>
+              <a:t>Talk through any answers the class found difficult.</a:t>
+            </a:r>
+          </a:p>
+        </p:txBody>
+      </p:sp>
+      <p:sp>
+        <p:nvSpPr>
+          <p:cNvPr id="4" name="Slide Number Placeholder 3"/>
+          <p:cNvSpPr>
+            <a:spLocks noGrp="1"/>
+          </p:cNvSpPr>
+          <p:nvPr>
+            <p:ph type="sldNum" idx="5" sz="quarter"/>
+          </p:nvPr>
+        </p:nvSpPr>
+        <p:spPr/>
+      </p:sp>
+    </p:spTree>
+  </p:cSld>
+  <p:clrMapOvr>
+    <a:masterClrMapping/>
+  </p:clrMapOvr>
+</p:notes>
+</file>
+
+<file path=ppt/notesSlides/notesSlide7.xml><?xml version="1.0" encoding="utf-8"?>
 <p:notes xmlns:a="http://schemas.openxmlformats.org/drawingml/2006/main" xmlns:p="http://schemas.openxmlformats.org/presentationml/2006/main" xmlns:r="http://schemas.openxmlformats.org/officeDocument/2006/relationships">
   <p:cSld>
     <p:spTree>
@@ -4115,6 +4289,2355 @@
 </p:sld>
 </file>
 
+<file path=ppt/slides/slide10.xml><?xml version="1.0" encoding="utf-8"?>
+<p:sld xmlns:a="http://schemas.openxmlformats.org/drawingml/2006/main" xmlns:p="http://schemas.openxmlformats.org/presentationml/2006/main" xmlns:r="http://schemas.openxmlformats.org/officeDocument/2006/relationships">
+  <p:cSld>
+    <p:bg>
+      <p:bgPr>
+        <a:solidFill>
+          <a:srgbClr val="FFFFFF"/>
+        </a:solidFill>
+        <a:effectLst/>
+      </p:bgPr>
+    </p:bg>
+    <p:spTree>
+      <p:nvGrpSpPr>
+        <p:cNvPr id="1" name=""/>
+        <p:cNvGrpSpPr/>
+        <p:nvPr/>
+      </p:nvGrpSpPr>
+      <p:grpSpPr/>
+      <p:sp>
+        <p:nvSpPr>
+          <p:cNvPr id="2" name="TextBox 1"/>
+          <p:cNvSpPr txBox="1"/>
+          <p:nvPr/>
+        </p:nvSpPr>
+        <p:spPr>
+          <a:xfrm>
+            <a:off x="548640" y="320040"/>
+            <a:ext cx="11094415" cy="274320"/>
+          </a:xfrm>
+          <a:prstGeom prst="rect">
+            <a:avLst/>
+          </a:prstGeom>
+          <a:noFill/>
+        </p:spPr>
+        <p:txBody>
+          <a:bodyPr wrap="square" anchor="t" lIns="0" rIns="0" tIns="0" bIns="0"/>
+          <a:lstStyle/>
+          <a:p>
+            <a:pPr algn="l"/>
+            <a:r>
+              <a:rPr sz="1100" b="1" i="0">
+                <a:solidFill>
+                  <a:srgbClr val="54595D"/>
+                </a:solidFill>
+                <a:latin typeface="Calibri"/>
+              </a:rPr>
+              <a:t>ENGINEERING CORE  ·  Core topic 12</a:t>
+            </a:r>
+          </a:p>
+        </p:txBody>
+      </p:sp>
+      <p:sp>
+        <p:nvSpPr>
+          <p:cNvPr id="3" name="TextBox 2"/>
+          <p:cNvSpPr txBox="1"/>
+          <p:nvPr/>
+        </p:nvSpPr>
+        <p:spPr>
+          <a:xfrm>
+            <a:off x="548640" y="566928"/>
+            <a:ext cx="11094415" cy="822960"/>
+          </a:xfrm>
+          <a:prstGeom prst="rect">
+            <a:avLst/>
+          </a:prstGeom>
+          <a:noFill/>
+        </p:spPr>
+        <p:txBody>
+          <a:bodyPr wrap="square" anchor="ctr" lIns="0" rIns="0" tIns="0" bIns="0"/>
+          <a:lstStyle/>
+          <a:p>
+            <a:pPr algn="l"/>
+            <a:r>
+              <a:rPr sz="3200" b="1" i="0">
+                <a:solidFill>
+                  <a:srgbClr val="03306E"/>
+                </a:solidFill>
+                <a:latin typeface="Cambria"/>
+              </a:rPr>
+              <a:t>Check your understanding</a:t>
+            </a:r>
+          </a:p>
+        </p:txBody>
+      </p:sp>
+      <p:sp>
+        <p:nvSpPr>
+          <p:cNvPr id="4" name="TextBox 3"/>
+          <p:cNvSpPr txBox="1"/>
+          <p:nvPr/>
+        </p:nvSpPr>
+        <p:spPr>
+          <a:xfrm>
+            <a:off x="548640" y="6446520"/>
+            <a:ext cx="8229600" cy="274320"/>
+          </a:xfrm>
+          <a:prstGeom prst="rect">
+            <a:avLst/>
+          </a:prstGeom>
+          <a:noFill/>
+        </p:spPr>
+        <p:txBody>
+          <a:bodyPr wrap="square" anchor="t" lIns="0" rIns="0" tIns="0" bIns="0"/>
+          <a:lstStyle/>
+          <a:p>
+            <a:pPr algn="l"/>
+            <a:r>
+              <a:rPr sz="1000" b="0" i="0">
+                <a:solidFill>
+                  <a:srgbClr val="54595D"/>
+                </a:solidFill>
+                <a:latin typeface="Calibri"/>
+              </a:rPr>
+              <a:t>Design and Development for Engineering and Manufacturing T Level  ·  Health and Safety Legislation and Responsibilities</a:t>
+            </a:r>
+          </a:p>
+        </p:txBody>
+      </p:sp>
+      <p:sp>
+        <p:nvSpPr>
+          <p:cNvPr id="5" name="TextBox 4"/>
+          <p:cNvSpPr txBox="1"/>
+          <p:nvPr/>
+        </p:nvSpPr>
+        <p:spPr>
+          <a:xfrm>
+            <a:off x="10728655" y="6446520"/>
+            <a:ext cx="914400" cy="274320"/>
+          </a:xfrm>
+          <a:prstGeom prst="rect">
+            <a:avLst/>
+          </a:prstGeom>
+          <a:noFill/>
+        </p:spPr>
+        <p:txBody>
+          <a:bodyPr wrap="square" anchor="t" lIns="0" rIns="0" tIns="0" bIns="0"/>
+          <a:lstStyle/>
+          <a:p>
+            <a:pPr algn="r"/>
+            <a:r>
+              <a:rPr sz="1000" b="0" i="0">
+                <a:solidFill>
+                  <a:srgbClr val="54595D"/>
+                </a:solidFill>
+                <a:latin typeface="Calibri"/>
+              </a:rPr>
+              <a:t>10</a:t>
+            </a:r>
+          </a:p>
+        </p:txBody>
+      </p:sp>
+      <p:sp>
+        <p:nvSpPr>
+          <p:cNvPr id="6" name="Oval 5"/>
+          <p:cNvSpPr/>
+          <p:nvPr/>
+        </p:nvSpPr>
+        <p:spPr>
+          <a:xfrm>
+            <a:off x="548640" y="1618488"/>
+            <a:ext cx="411480" cy="411480"/>
+          </a:xfrm>
+          <a:prstGeom prst="ellipse">
+            <a:avLst/>
+          </a:prstGeom>
+          <a:solidFill>
+            <a:srgbClr val="F2B705"/>
+          </a:solidFill>
+          <a:ln>
+            <a:noFill/>
+          </a:ln>
+          <a:effectLst/>
+        </p:spPr>
+        <p:style>
+          <a:lnRef idx="1">
+            <a:schemeClr val="accent1"/>
+          </a:lnRef>
+          <a:fillRef idx="3">
+            <a:schemeClr val="accent1"/>
+          </a:fillRef>
+          <a:effectRef idx="2">
+            <a:schemeClr val="accent1"/>
+          </a:effectRef>
+          <a:fontRef idx="minor">
+            <a:schemeClr val="lt1"/>
+          </a:fontRef>
+        </p:style>
+        <p:txBody>
+          <a:bodyPr rtlCol="0" anchor="ctr" lIns="0" rIns="0" tIns="0" bIns="0"/>
+          <a:lstStyle/>
+          <a:p>
+            <a:pPr algn="ctr"/>
+            <a:r>
+              <a:rPr sz="1400" b="1">
+                <a:solidFill>
+                  <a:srgbClr val="202122"/>
+                </a:solidFill>
+                <a:latin typeface="Calibri"/>
+              </a:rPr>
+              <a:t>1</a:t>
+            </a:r>
+          </a:p>
+        </p:txBody>
+      </p:sp>
+      <p:sp>
+        <p:nvSpPr>
+          <p:cNvPr id="7" name="TextBox 6"/>
+          <p:cNvSpPr txBox="1"/>
+          <p:nvPr/>
+        </p:nvSpPr>
+        <p:spPr>
+          <a:xfrm>
+            <a:off x="1234440" y="1600200"/>
+            <a:ext cx="10408615" cy="1030986"/>
+          </a:xfrm>
+          <a:prstGeom prst="rect">
+            <a:avLst/>
+          </a:prstGeom>
+          <a:noFill/>
+        </p:spPr>
+        <p:txBody>
+          <a:bodyPr wrap="square" anchor="t" lIns="0" rIns="0" tIns="0" bIns="0"/>
+          <a:lstStyle/>
+          <a:p>
+            <a:pPr algn="l"/>
+            <a:r>
+              <a:rPr sz="2200" b="0" i="0">
+                <a:solidFill>
+                  <a:srgbClr val="202122"/>
+                </a:solidFill>
+                <a:latin typeface="Calibri"/>
+              </a:rPr>
+              <a:t>Which regulations cover lifting equipment?</a:t>
+            </a:r>
+          </a:p>
+        </p:txBody>
+      </p:sp>
+      <p:sp>
+        <p:nvSpPr>
+          <p:cNvPr id="8" name="Oval 7"/>
+          <p:cNvSpPr/>
+          <p:nvPr/>
+        </p:nvSpPr>
+        <p:spPr>
+          <a:xfrm>
+            <a:off x="548640" y="2814066"/>
+            <a:ext cx="411480" cy="411480"/>
+          </a:xfrm>
+          <a:prstGeom prst="ellipse">
+            <a:avLst/>
+          </a:prstGeom>
+          <a:solidFill>
+            <a:srgbClr val="F2B705"/>
+          </a:solidFill>
+          <a:ln>
+            <a:noFill/>
+          </a:ln>
+          <a:effectLst/>
+        </p:spPr>
+        <p:style>
+          <a:lnRef idx="1">
+            <a:schemeClr val="accent1"/>
+          </a:lnRef>
+          <a:fillRef idx="3">
+            <a:schemeClr val="accent1"/>
+          </a:fillRef>
+          <a:effectRef idx="2">
+            <a:schemeClr val="accent1"/>
+          </a:effectRef>
+          <a:fontRef idx="minor">
+            <a:schemeClr val="lt1"/>
+          </a:fontRef>
+        </p:style>
+        <p:txBody>
+          <a:bodyPr rtlCol="0" anchor="ctr" lIns="0" rIns="0" tIns="0" bIns="0"/>
+          <a:lstStyle/>
+          <a:p>
+            <a:pPr algn="ctr"/>
+            <a:r>
+              <a:rPr sz="1400" b="1">
+                <a:solidFill>
+                  <a:srgbClr val="202122"/>
+                </a:solidFill>
+                <a:latin typeface="Calibri"/>
+              </a:rPr>
+              <a:t>2</a:t>
+            </a:r>
+          </a:p>
+        </p:txBody>
+      </p:sp>
+      <p:sp>
+        <p:nvSpPr>
+          <p:cNvPr id="9" name="TextBox 8"/>
+          <p:cNvSpPr txBox="1"/>
+          <p:nvPr/>
+        </p:nvSpPr>
+        <p:spPr>
+          <a:xfrm>
+            <a:off x="1234440" y="2795778"/>
+            <a:ext cx="10408615" cy="1030986"/>
+          </a:xfrm>
+          <a:prstGeom prst="rect">
+            <a:avLst/>
+          </a:prstGeom>
+          <a:noFill/>
+        </p:spPr>
+        <p:txBody>
+          <a:bodyPr wrap="square" anchor="t" lIns="0" rIns="0" tIns="0" bIns="0"/>
+          <a:lstStyle/>
+          <a:p>
+            <a:pPr algn="l"/>
+            <a:r>
+              <a:rPr sz="2200" b="0" i="0">
+                <a:solidFill>
+                  <a:srgbClr val="202122"/>
+                </a:solidFill>
+                <a:latin typeface="Calibri"/>
+              </a:rPr>
+              <a:t>What does RIDDOR require?</a:t>
+            </a:r>
+          </a:p>
+        </p:txBody>
+      </p:sp>
+      <p:sp>
+        <p:nvSpPr>
+          <p:cNvPr id="10" name="Oval 9"/>
+          <p:cNvSpPr/>
+          <p:nvPr/>
+        </p:nvSpPr>
+        <p:spPr>
+          <a:xfrm>
+            <a:off x="548640" y="4009644"/>
+            <a:ext cx="411480" cy="411480"/>
+          </a:xfrm>
+          <a:prstGeom prst="ellipse">
+            <a:avLst/>
+          </a:prstGeom>
+          <a:solidFill>
+            <a:srgbClr val="F2B705"/>
+          </a:solidFill>
+          <a:ln>
+            <a:noFill/>
+          </a:ln>
+          <a:effectLst/>
+        </p:spPr>
+        <p:style>
+          <a:lnRef idx="1">
+            <a:schemeClr val="accent1"/>
+          </a:lnRef>
+          <a:fillRef idx="3">
+            <a:schemeClr val="accent1"/>
+          </a:fillRef>
+          <a:effectRef idx="2">
+            <a:schemeClr val="accent1"/>
+          </a:effectRef>
+          <a:fontRef idx="minor">
+            <a:schemeClr val="lt1"/>
+          </a:fontRef>
+        </p:style>
+        <p:txBody>
+          <a:bodyPr rtlCol="0" anchor="ctr" lIns="0" rIns="0" tIns="0" bIns="0"/>
+          <a:lstStyle/>
+          <a:p>
+            <a:pPr algn="ctr"/>
+            <a:r>
+              <a:rPr sz="1400" b="1">
+                <a:solidFill>
+                  <a:srgbClr val="202122"/>
+                </a:solidFill>
+                <a:latin typeface="Calibri"/>
+              </a:rPr>
+              <a:t>3</a:t>
+            </a:r>
+          </a:p>
+        </p:txBody>
+      </p:sp>
+      <p:sp>
+        <p:nvSpPr>
+          <p:cNvPr id="11" name="TextBox 10"/>
+          <p:cNvSpPr txBox="1"/>
+          <p:nvPr/>
+        </p:nvSpPr>
+        <p:spPr>
+          <a:xfrm>
+            <a:off x="1234440" y="3991356"/>
+            <a:ext cx="10408615" cy="1030986"/>
+          </a:xfrm>
+          <a:prstGeom prst="rect">
+            <a:avLst/>
+          </a:prstGeom>
+          <a:noFill/>
+        </p:spPr>
+        <p:txBody>
+          <a:bodyPr wrap="square" anchor="t" lIns="0" rIns="0" tIns="0" bIns="0"/>
+          <a:lstStyle/>
+          <a:p>
+            <a:pPr algn="l"/>
+            <a:r>
+              <a:rPr sz="2200" b="0" i="0">
+                <a:solidFill>
+                  <a:srgbClr val="202122"/>
+                </a:solidFill>
+                <a:latin typeface="Calibri"/>
+              </a:rPr>
+              <a:t>Name two employee responsibilities.</a:t>
+            </a:r>
+          </a:p>
+        </p:txBody>
+      </p:sp>
+      <p:sp>
+        <p:nvSpPr>
+          <p:cNvPr id="12" name="Oval 11"/>
+          <p:cNvSpPr/>
+          <p:nvPr/>
+        </p:nvSpPr>
+        <p:spPr>
+          <a:xfrm>
+            <a:off x="548640" y="5205221"/>
+            <a:ext cx="411480" cy="411480"/>
+          </a:xfrm>
+          <a:prstGeom prst="ellipse">
+            <a:avLst/>
+          </a:prstGeom>
+          <a:solidFill>
+            <a:srgbClr val="F2B705"/>
+          </a:solidFill>
+          <a:ln>
+            <a:noFill/>
+          </a:ln>
+          <a:effectLst/>
+        </p:spPr>
+        <p:style>
+          <a:lnRef idx="1">
+            <a:schemeClr val="accent1"/>
+          </a:lnRef>
+          <a:fillRef idx="3">
+            <a:schemeClr val="accent1"/>
+          </a:fillRef>
+          <a:effectRef idx="2">
+            <a:schemeClr val="accent1"/>
+          </a:effectRef>
+          <a:fontRef idx="minor">
+            <a:schemeClr val="lt1"/>
+          </a:fontRef>
+        </p:style>
+        <p:txBody>
+          <a:bodyPr rtlCol="0" anchor="ctr" lIns="0" rIns="0" tIns="0" bIns="0"/>
+          <a:lstStyle/>
+          <a:p>
+            <a:pPr algn="ctr"/>
+            <a:r>
+              <a:rPr sz="1400" b="1">
+                <a:solidFill>
+                  <a:srgbClr val="202122"/>
+                </a:solidFill>
+                <a:latin typeface="Calibri"/>
+              </a:rPr>
+              <a:t>4</a:t>
+            </a:r>
+          </a:p>
+        </p:txBody>
+      </p:sp>
+      <p:sp>
+        <p:nvSpPr>
+          <p:cNvPr id="13" name="TextBox 12"/>
+          <p:cNvSpPr txBox="1"/>
+          <p:nvPr/>
+        </p:nvSpPr>
+        <p:spPr>
+          <a:xfrm>
+            <a:off x="1234440" y="5186933"/>
+            <a:ext cx="10408615" cy="1030986"/>
+          </a:xfrm>
+          <a:prstGeom prst="rect">
+            <a:avLst/>
+          </a:prstGeom>
+          <a:noFill/>
+        </p:spPr>
+        <p:txBody>
+          <a:bodyPr wrap="square" anchor="t" lIns="0" rIns="0" tIns="0" bIns="0"/>
+          <a:lstStyle/>
+          <a:p>
+            <a:pPr algn="l"/>
+            <a:r>
+              <a:rPr sz="2200" b="0" i="0">
+                <a:solidFill>
+                  <a:srgbClr val="202122"/>
+                </a:solidFill>
+                <a:latin typeface="Calibri"/>
+              </a:rPr>
+              <a:t>Who enforces health and safety law in Great Britain?</a:t>
+            </a:r>
+          </a:p>
+        </p:txBody>
+      </p:sp>
+    </p:spTree>
+  </p:cSld>
+  <p:clrMapOvr>
+    <a:masterClrMapping/>
+  </p:clrMapOvr>
+</p:sld>
+</file>
+
+<file path=ppt/slides/slide11.xml><?xml version="1.0" encoding="utf-8"?>
+<p:sld xmlns:a="http://schemas.openxmlformats.org/drawingml/2006/main" xmlns:p="http://schemas.openxmlformats.org/presentationml/2006/main" xmlns:r="http://schemas.openxmlformats.org/officeDocument/2006/relationships">
+  <p:cSld>
+    <p:bg>
+      <p:bgPr>
+        <a:solidFill>
+          <a:srgbClr val="FFFFFF"/>
+        </a:solidFill>
+        <a:effectLst/>
+      </p:bgPr>
+    </p:bg>
+    <p:spTree>
+      <p:nvGrpSpPr>
+        <p:cNvPr id="1" name=""/>
+        <p:cNvGrpSpPr/>
+        <p:nvPr/>
+      </p:nvGrpSpPr>
+      <p:grpSpPr/>
+      <p:sp>
+        <p:nvSpPr>
+          <p:cNvPr id="2" name="TextBox 1"/>
+          <p:cNvSpPr txBox="1"/>
+          <p:nvPr/>
+        </p:nvSpPr>
+        <p:spPr>
+          <a:xfrm>
+            <a:off x="548640" y="320040"/>
+            <a:ext cx="11094415" cy="274320"/>
+          </a:xfrm>
+          <a:prstGeom prst="rect">
+            <a:avLst/>
+          </a:prstGeom>
+          <a:noFill/>
+        </p:spPr>
+        <p:txBody>
+          <a:bodyPr wrap="square" anchor="t" lIns="0" rIns="0" tIns="0" bIns="0"/>
+          <a:lstStyle/>
+          <a:p>
+            <a:pPr algn="l"/>
+            <a:r>
+              <a:rPr sz="1100" b="1" i="0">
+                <a:solidFill>
+                  <a:srgbClr val="54595D"/>
+                </a:solidFill>
+                <a:latin typeface="Calibri"/>
+              </a:rPr>
+              <a:t>ENGINEERING CORE  ·  Core topic 12</a:t>
+            </a:r>
+          </a:p>
+        </p:txBody>
+      </p:sp>
+      <p:sp>
+        <p:nvSpPr>
+          <p:cNvPr id="3" name="TextBox 2"/>
+          <p:cNvSpPr txBox="1"/>
+          <p:nvPr/>
+        </p:nvSpPr>
+        <p:spPr>
+          <a:xfrm>
+            <a:off x="548640" y="566928"/>
+            <a:ext cx="11094415" cy="822960"/>
+          </a:xfrm>
+          <a:prstGeom prst="rect">
+            <a:avLst/>
+          </a:prstGeom>
+          <a:noFill/>
+        </p:spPr>
+        <p:txBody>
+          <a:bodyPr wrap="square" anchor="ctr" lIns="0" rIns="0" tIns="0" bIns="0"/>
+          <a:lstStyle/>
+          <a:p>
+            <a:pPr algn="l"/>
+            <a:r>
+              <a:rPr sz="3200" b="1" i="0">
+                <a:solidFill>
+                  <a:srgbClr val="03306E"/>
+                </a:solidFill>
+                <a:latin typeface="Cambria"/>
+              </a:rPr>
+              <a:t>Answers</a:t>
+            </a:r>
+          </a:p>
+        </p:txBody>
+      </p:sp>
+      <p:sp>
+        <p:nvSpPr>
+          <p:cNvPr id="4" name="TextBox 3"/>
+          <p:cNvSpPr txBox="1"/>
+          <p:nvPr/>
+        </p:nvSpPr>
+        <p:spPr>
+          <a:xfrm>
+            <a:off x="548640" y="6446520"/>
+            <a:ext cx="8229600" cy="274320"/>
+          </a:xfrm>
+          <a:prstGeom prst="rect">
+            <a:avLst/>
+          </a:prstGeom>
+          <a:noFill/>
+        </p:spPr>
+        <p:txBody>
+          <a:bodyPr wrap="square" anchor="t" lIns="0" rIns="0" tIns="0" bIns="0"/>
+          <a:lstStyle/>
+          <a:p>
+            <a:pPr algn="l"/>
+            <a:r>
+              <a:rPr sz="1000" b="0" i="0">
+                <a:solidFill>
+                  <a:srgbClr val="54595D"/>
+                </a:solidFill>
+                <a:latin typeface="Calibri"/>
+              </a:rPr>
+              <a:t>Design and Development for Engineering and Manufacturing T Level  ·  Health and Safety Legislation and Responsibilities</a:t>
+            </a:r>
+          </a:p>
+        </p:txBody>
+      </p:sp>
+      <p:sp>
+        <p:nvSpPr>
+          <p:cNvPr id="5" name="TextBox 4"/>
+          <p:cNvSpPr txBox="1"/>
+          <p:nvPr/>
+        </p:nvSpPr>
+        <p:spPr>
+          <a:xfrm>
+            <a:off x="10728655" y="6446520"/>
+            <a:ext cx="914400" cy="274320"/>
+          </a:xfrm>
+          <a:prstGeom prst="rect">
+            <a:avLst/>
+          </a:prstGeom>
+          <a:noFill/>
+        </p:spPr>
+        <p:txBody>
+          <a:bodyPr wrap="square" anchor="t" lIns="0" rIns="0" tIns="0" bIns="0"/>
+          <a:lstStyle/>
+          <a:p>
+            <a:pPr algn="r"/>
+            <a:r>
+              <a:rPr sz="1000" b="0" i="0">
+                <a:solidFill>
+                  <a:srgbClr val="54595D"/>
+                </a:solidFill>
+                <a:latin typeface="Calibri"/>
+              </a:rPr>
+              <a:t>11</a:t>
+            </a:r>
+          </a:p>
+        </p:txBody>
+      </p:sp>
+      <p:sp>
+        <p:nvSpPr>
+          <p:cNvPr id="6" name="Oval 5"/>
+          <p:cNvSpPr/>
+          <p:nvPr/>
+        </p:nvSpPr>
+        <p:spPr>
+          <a:xfrm>
+            <a:off x="548640" y="1618488"/>
+            <a:ext cx="411480" cy="411480"/>
+          </a:xfrm>
+          <a:prstGeom prst="ellipse">
+            <a:avLst/>
+          </a:prstGeom>
+          <a:solidFill>
+            <a:srgbClr val="F2B705"/>
+          </a:solidFill>
+          <a:ln>
+            <a:noFill/>
+          </a:ln>
+          <a:effectLst/>
+        </p:spPr>
+        <p:style>
+          <a:lnRef idx="1">
+            <a:schemeClr val="accent1"/>
+          </a:lnRef>
+          <a:fillRef idx="3">
+            <a:schemeClr val="accent1"/>
+          </a:fillRef>
+          <a:effectRef idx="2">
+            <a:schemeClr val="accent1"/>
+          </a:effectRef>
+          <a:fontRef idx="minor">
+            <a:schemeClr val="lt1"/>
+          </a:fontRef>
+        </p:style>
+        <p:txBody>
+          <a:bodyPr rtlCol="0" anchor="ctr" lIns="0" rIns="0" tIns="0" bIns="0"/>
+          <a:lstStyle/>
+          <a:p>
+            <a:pPr algn="ctr"/>
+            <a:r>
+              <a:rPr sz="1400" b="1">
+                <a:solidFill>
+                  <a:srgbClr val="202122"/>
+                </a:solidFill>
+                <a:latin typeface="Calibri"/>
+              </a:rPr>
+              <a:t>1</a:t>
+            </a:r>
+          </a:p>
+        </p:txBody>
+      </p:sp>
+      <p:sp>
+        <p:nvSpPr>
+          <p:cNvPr id="7" name="TextBox 6"/>
+          <p:cNvSpPr txBox="1"/>
+          <p:nvPr/>
+        </p:nvSpPr>
+        <p:spPr>
+          <a:xfrm>
+            <a:off x="1234440" y="1600200"/>
+            <a:ext cx="10408615" cy="1030986"/>
+          </a:xfrm>
+          <a:prstGeom prst="rect">
+            <a:avLst/>
+          </a:prstGeom>
+          <a:noFill/>
+        </p:spPr>
+        <p:txBody>
+          <a:bodyPr wrap="square" anchor="t" lIns="0" rIns="0" tIns="0" bIns="0"/>
+          <a:lstStyle/>
+          <a:p>
+            <a:pPr algn="l"/>
+            <a:r>
+              <a:rPr sz="1800" b="0" i="0">
+                <a:solidFill>
+                  <a:srgbClr val="54595D"/>
+                </a:solidFill>
+                <a:latin typeface="Calibri"/>
+              </a:rPr>
+              <a:t>Which regulations cover lifting equipment?</a:t>
+            </a:r>
+          </a:p>
+          <a:p>
+            <a:r>
+              <a:rPr sz="1800" b="1">
+                <a:solidFill>
+                  <a:srgbClr val="03306E"/>
+                </a:solidFill>
+                <a:latin typeface="Calibri"/>
+              </a:rPr>
+              <a:t>LOLER.</a:t>
+            </a:r>
+          </a:p>
+        </p:txBody>
+      </p:sp>
+      <p:sp>
+        <p:nvSpPr>
+          <p:cNvPr id="8" name="Oval 7"/>
+          <p:cNvSpPr/>
+          <p:nvPr/>
+        </p:nvSpPr>
+        <p:spPr>
+          <a:xfrm>
+            <a:off x="548640" y="2814066"/>
+            <a:ext cx="411480" cy="411480"/>
+          </a:xfrm>
+          <a:prstGeom prst="ellipse">
+            <a:avLst/>
+          </a:prstGeom>
+          <a:solidFill>
+            <a:srgbClr val="F2B705"/>
+          </a:solidFill>
+          <a:ln>
+            <a:noFill/>
+          </a:ln>
+          <a:effectLst/>
+        </p:spPr>
+        <p:style>
+          <a:lnRef idx="1">
+            <a:schemeClr val="accent1"/>
+          </a:lnRef>
+          <a:fillRef idx="3">
+            <a:schemeClr val="accent1"/>
+          </a:fillRef>
+          <a:effectRef idx="2">
+            <a:schemeClr val="accent1"/>
+          </a:effectRef>
+          <a:fontRef idx="minor">
+            <a:schemeClr val="lt1"/>
+          </a:fontRef>
+        </p:style>
+        <p:txBody>
+          <a:bodyPr rtlCol="0" anchor="ctr" lIns="0" rIns="0" tIns="0" bIns="0"/>
+          <a:lstStyle/>
+          <a:p>
+            <a:pPr algn="ctr"/>
+            <a:r>
+              <a:rPr sz="1400" b="1">
+                <a:solidFill>
+                  <a:srgbClr val="202122"/>
+                </a:solidFill>
+                <a:latin typeface="Calibri"/>
+              </a:rPr>
+              <a:t>2</a:t>
+            </a:r>
+          </a:p>
+        </p:txBody>
+      </p:sp>
+      <p:sp>
+        <p:nvSpPr>
+          <p:cNvPr id="9" name="TextBox 8"/>
+          <p:cNvSpPr txBox="1"/>
+          <p:nvPr/>
+        </p:nvSpPr>
+        <p:spPr>
+          <a:xfrm>
+            <a:off x="1234440" y="2795778"/>
+            <a:ext cx="10408615" cy="1030986"/>
+          </a:xfrm>
+          <a:prstGeom prst="rect">
+            <a:avLst/>
+          </a:prstGeom>
+          <a:noFill/>
+        </p:spPr>
+        <p:txBody>
+          <a:bodyPr wrap="square" anchor="t" lIns="0" rIns="0" tIns="0" bIns="0"/>
+          <a:lstStyle/>
+          <a:p>
+            <a:pPr algn="l"/>
+            <a:r>
+              <a:rPr sz="1800" b="0" i="0">
+                <a:solidFill>
+                  <a:srgbClr val="54595D"/>
+                </a:solidFill>
+                <a:latin typeface="Calibri"/>
+              </a:rPr>
+              <a:t>What does RIDDOR require?</a:t>
+            </a:r>
+          </a:p>
+          <a:p>
+            <a:r>
+              <a:rPr sz="1800" b="1">
+                <a:solidFill>
+                  <a:srgbClr val="03306E"/>
+                </a:solidFill>
+                <a:latin typeface="Calibri"/>
+              </a:rPr>
+              <a:t>Reporting of injuries, diseases and dangerous occurrences.</a:t>
+            </a:r>
+          </a:p>
+        </p:txBody>
+      </p:sp>
+      <p:sp>
+        <p:nvSpPr>
+          <p:cNvPr id="10" name="Oval 9"/>
+          <p:cNvSpPr/>
+          <p:nvPr/>
+        </p:nvSpPr>
+        <p:spPr>
+          <a:xfrm>
+            <a:off x="548640" y="4009644"/>
+            <a:ext cx="411480" cy="411480"/>
+          </a:xfrm>
+          <a:prstGeom prst="ellipse">
+            <a:avLst/>
+          </a:prstGeom>
+          <a:solidFill>
+            <a:srgbClr val="F2B705"/>
+          </a:solidFill>
+          <a:ln>
+            <a:noFill/>
+          </a:ln>
+          <a:effectLst/>
+        </p:spPr>
+        <p:style>
+          <a:lnRef idx="1">
+            <a:schemeClr val="accent1"/>
+          </a:lnRef>
+          <a:fillRef idx="3">
+            <a:schemeClr val="accent1"/>
+          </a:fillRef>
+          <a:effectRef idx="2">
+            <a:schemeClr val="accent1"/>
+          </a:effectRef>
+          <a:fontRef idx="minor">
+            <a:schemeClr val="lt1"/>
+          </a:fontRef>
+        </p:style>
+        <p:txBody>
+          <a:bodyPr rtlCol="0" anchor="ctr" lIns="0" rIns="0" tIns="0" bIns="0"/>
+          <a:lstStyle/>
+          <a:p>
+            <a:pPr algn="ctr"/>
+            <a:r>
+              <a:rPr sz="1400" b="1">
+                <a:solidFill>
+                  <a:srgbClr val="202122"/>
+                </a:solidFill>
+                <a:latin typeface="Calibri"/>
+              </a:rPr>
+              <a:t>3</a:t>
+            </a:r>
+          </a:p>
+        </p:txBody>
+      </p:sp>
+      <p:sp>
+        <p:nvSpPr>
+          <p:cNvPr id="11" name="TextBox 10"/>
+          <p:cNvSpPr txBox="1"/>
+          <p:nvPr/>
+        </p:nvSpPr>
+        <p:spPr>
+          <a:xfrm>
+            <a:off x="1234440" y="3991356"/>
+            <a:ext cx="10408615" cy="1030986"/>
+          </a:xfrm>
+          <a:prstGeom prst="rect">
+            <a:avLst/>
+          </a:prstGeom>
+          <a:noFill/>
+        </p:spPr>
+        <p:txBody>
+          <a:bodyPr wrap="square" anchor="t" lIns="0" rIns="0" tIns="0" bIns="0"/>
+          <a:lstStyle/>
+          <a:p>
+            <a:pPr algn="l"/>
+            <a:r>
+              <a:rPr sz="1800" b="0" i="0">
+                <a:solidFill>
+                  <a:srgbClr val="54595D"/>
+                </a:solidFill>
+                <a:latin typeface="Calibri"/>
+              </a:rPr>
+              <a:t>Name two employee responsibilities.</a:t>
+            </a:r>
+          </a:p>
+          <a:p>
+            <a:r>
+              <a:rPr sz="1800" b="1">
+                <a:solidFill>
+                  <a:srgbClr val="03306E"/>
+                </a:solidFill>
+                <a:latin typeface="Calibri"/>
+              </a:rPr>
+              <a:t>Any two, e.g. work safely, co-operate, don't misuse safety equipment.</a:t>
+            </a:r>
+          </a:p>
+        </p:txBody>
+      </p:sp>
+      <p:sp>
+        <p:nvSpPr>
+          <p:cNvPr id="12" name="Oval 11"/>
+          <p:cNvSpPr/>
+          <p:nvPr/>
+        </p:nvSpPr>
+        <p:spPr>
+          <a:xfrm>
+            <a:off x="548640" y="5205221"/>
+            <a:ext cx="411480" cy="411480"/>
+          </a:xfrm>
+          <a:prstGeom prst="ellipse">
+            <a:avLst/>
+          </a:prstGeom>
+          <a:solidFill>
+            <a:srgbClr val="F2B705"/>
+          </a:solidFill>
+          <a:ln>
+            <a:noFill/>
+          </a:ln>
+          <a:effectLst/>
+        </p:spPr>
+        <p:style>
+          <a:lnRef idx="1">
+            <a:schemeClr val="accent1"/>
+          </a:lnRef>
+          <a:fillRef idx="3">
+            <a:schemeClr val="accent1"/>
+          </a:fillRef>
+          <a:effectRef idx="2">
+            <a:schemeClr val="accent1"/>
+          </a:effectRef>
+          <a:fontRef idx="minor">
+            <a:schemeClr val="lt1"/>
+          </a:fontRef>
+        </p:style>
+        <p:txBody>
+          <a:bodyPr rtlCol="0" anchor="ctr" lIns="0" rIns="0" tIns="0" bIns="0"/>
+          <a:lstStyle/>
+          <a:p>
+            <a:pPr algn="ctr"/>
+            <a:r>
+              <a:rPr sz="1400" b="1">
+                <a:solidFill>
+                  <a:srgbClr val="202122"/>
+                </a:solidFill>
+                <a:latin typeface="Calibri"/>
+              </a:rPr>
+              <a:t>4</a:t>
+            </a:r>
+          </a:p>
+        </p:txBody>
+      </p:sp>
+      <p:sp>
+        <p:nvSpPr>
+          <p:cNvPr id="13" name="TextBox 12"/>
+          <p:cNvSpPr txBox="1"/>
+          <p:nvPr/>
+        </p:nvSpPr>
+        <p:spPr>
+          <a:xfrm>
+            <a:off x="1234440" y="5186933"/>
+            <a:ext cx="10408615" cy="1030986"/>
+          </a:xfrm>
+          <a:prstGeom prst="rect">
+            <a:avLst/>
+          </a:prstGeom>
+          <a:noFill/>
+        </p:spPr>
+        <p:txBody>
+          <a:bodyPr wrap="square" anchor="t" lIns="0" rIns="0" tIns="0" bIns="0"/>
+          <a:lstStyle/>
+          <a:p>
+            <a:pPr algn="l"/>
+            <a:r>
+              <a:rPr sz="1800" b="0" i="0">
+                <a:solidFill>
+                  <a:srgbClr val="54595D"/>
+                </a:solidFill>
+                <a:latin typeface="Calibri"/>
+              </a:rPr>
+              <a:t>Who enforces health and safety law in Great Britain?</a:t>
+            </a:r>
+          </a:p>
+          <a:p>
+            <a:r>
+              <a:rPr sz="1800" b="1">
+                <a:solidFill>
+                  <a:srgbClr val="03306E"/>
+                </a:solidFill>
+                <a:latin typeface="Calibri"/>
+              </a:rPr>
+              <a:t>The Health and Safety Executive (HSE).</a:t>
+            </a:r>
+          </a:p>
+        </p:txBody>
+      </p:sp>
+    </p:spTree>
+  </p:cSld>
+  <p:clrMapOvr>
+    <a:masterClrMapping/>
+  </p:clrMapOvr>
+</p:sld>
+</file>
+
+<file path=ppt/slides/slide12.xml><?xml version="1.0" encoding="utf-8"?>
+<p:sld xmlns:a="http://schemas.openxmlformats.org/drawingml/2006/main" xmlns:p="http://schemas.openxmlformats.org/presentationml/2006/main" xmlns:r="http://schemas.openxmlformats.org/officeDocument/2006/relationships">
+  <p:cSld>
+    <p:bg>
+      <p:bgPr>
+        <a:solidFill>
+          <a:srgbClr val="FFFFFF"/>
+        </a:solidFill>
+        <a:effectLst/>
+      </p:bgPr>
+    </p:bg>
+    <p:spTree>
+      <p:nvGrpSpPr>
+        <p:cNvPr id="1" name=""/>
+        <p:cNvGrpSpPr/>
+        <p:nvPr/>
+      </p:nvGrpSpPr>
+      <p:grpSpPr/>
+      <p:sp>
+        <p:nvSpPr>
+          <p:cNvPr id="2" name="TextBox 1"/>
+          <p:cNvSpPr txBox="1"/>
+          <p:nvPr/>
+        </p:nvSpPr>
+        <p:spPr>
+          <a:xfrm>
+            <a:off x="548640" y="320040"/>
+            <a:ext cx="11094415" cy="274320"/>
+          </a:xfrm>
+          <a:prstGeom prst="rect">
+            <a:avLst/>
+          </a:prstGeom>
+          <a:noFill/>
+        </p:spPr>
+        <p:txBody>
+          <a:bodyPr wrap="square" anchor="t" lIns="0" rIns="0" tIns="0" bIns="0"/>
+          <a:lstStyle/>
+          <a:p>
+            <a:pPr algn="l"/>
+            <a:r>
+              <a:rPr sz="1100" b="1" i="0">
+                <a:solidFill>
+                  <a:srgbClr val="54595D"/>
+                </a:solidFill>
+                <a:latin typeface="Calibri"/>
+              </a:rPr>
+              <a:t>ENGINEERING CORE  ·  Core topic 12</a:t>
+            </a:r>
+          </a:p>
+        </p:txBody>
+      </p:sp>
+      <p:sp>
+        <p:nvSpPr>
+          <p:cNvPr id="3" name="TextBox 2"/>
+          <p:cNvSpPr txBox="1"/>
+          <p:nvPr/>
+        </p:nvSpPr>
+        <p:spPr>
+          <a:xfrm>
+            <a:off x="548640" y="566928"/>
+            <a:ext cx="11094415" cy="822960"/>
+          </a:xfrm>
+          <a:prstGeom prst="rect">
+            <a:avLst/>
+          </a:prstGeom>
+          <a:noFill/>
+        </p:spPr>
+        <p:txBody>
+          <a:bodyPr wrap="square" anchor="ctr" lIns="0" rIns="0" tIns="0" bIns="0"/>
+          <a:lstStyle/>
+          <a:p>
+            <a:pPr algn="l"/>
+            <a:r>
+              <a:rPr sz="3200" b="1" i="0">
+                <a:solidFill>
+                  <a:srgbClr val="03306E"/>
+                </a:solidFill>
+                <a:latin typeface="Cambria"/>
+              </a:rPr>
+              <a:t>Activity: Legislation match-up</a:t>
+            </a:r>
+          </a:p>
+        </p:txBody>
+      </p:sp>
+      <p:sp>
+        <p:nvSpPr>
+          <p:cNvPr id="4" name="TextBox 3"/>
+          <p:cNvSpPr txBox="1"/>
+          <p:nvPr/>
+        </p:nvSpPr>
+        <p:spPr>
+          <a:xfrm>
+            <a:off x="548640" y="6446520"/>
+            <a:ext cx="8229600" cy="274320"/>
+          </a:xfrm>
+          <a:prstGeom prst="rect">
+            <a:avLst/>
+          </a:prstGeom>
+          <a:noFill/>
+        </p:spPr>
+        <p:txBody>
+          <a:bodyPr wrap="square" anchor="t" lIns="0" rIns="0" tIns="0" bIns="0"/>
+          <a:lstStyle/>
+          <a:p>
+            <a:pPr algn="l"/>
+            <a:r>
+              <a:rPr sz="1000" b="0" i="0">
+                <a:solidFill>
+                  <a:srgbClr val="54595D"/>
+                </a:solidFill>
+                <a:latin typeface="Calibri"/>
+              </a:rPr>
+              <a:t>Design and Development for Engineering and Manufacturing T Level  ·  Health and Safety Legislation and Responsibilities</a:t>
+            </a:r>
+          </a:p>
+        </p:txBody>
+      </p:sp>
+      <p:sp>
+        <p:nvSpPr>
+          <p:cNvPr id="5" name="TextBox 4"/>
+          <p:cNvSpPr txBox="1"/>
+          <p:nvPr/>
+        </p:nvSpPr>
+        <p:spPr>
+          <a:xfrm>
+            <a:off x="10728655" y="6446520"/>
+            <a:ext cx="914400" cy="274320"/>
+          </a:xfrm>
+          <a:prstGeom prst="rect">
+            <a:avLst/>
+          </a:prstGeom>
+          <a:noFill/>
+        </p:spPr>
+        <p:txBody>
+          <a:bodyPr wrap="square" anchor="t" lIns="0" rIns="0" tIns="0" bIns="0"/>
+          <a:lstStyle/>
+          <a:p>
+            <a:pPr algn="r"/>
+            <a:r>
+              <a:rPr sz="1000" b="0" i="0">
+                <a:solidFill>
+                  <a:srgbClr val="54595D"/>
+                </a:solidFill>
+                <a:latin typeface="Calibri"/>
+              </a:rPr>
+              <a:t>12</a:t>
+            </a:r>
+          </a:p>
+        </p:txBody>
+      </p:sp>
+      <p:sp>
+        <p:nvSpPr>
+          <p:cNvPr id="6" name="Rounded Rectangle 5"/>
+          <p:cNvSpPr/>
+          <p:nvPr/>
+        </p:nvSpPr>
+        <p:spPr>
+          <a:xfrm>
+            <a:off x="548640" y="1508760"/>
+            <a:ext cx="2011680" cy="457200"/>
+          </a:xfrm>
+          <a:prstGeom prst="roundRect">
+            <a:avLst>
+              <a:gd name="adj" fmla="val 50000"/>
+            </a:avLst>
+          </a:prstGeom>
+          <a:solidFill>
+            <a:srgbClr val="F2B705"/>
+          </a:solidFill>
+          <a:ln>
+            <a:noFill/>
+          </a:ln>
+          <a:effectLst/>
+        </p:spPr>
+        <p:style>
+          <a:lnRef idx="1">
+            <a:schemeClr val="accent1"/>
+          </a:lnRef>
+          <a:fillRef idx="3">
+            <a:schemeClr val="accent1"/>
+          </a:fillRef>
+          <a:effectRef idx="2">
+            <a:schemeClr val="accent1"/>
+          </a:effectRef>
+          <a:fontRef idx="minor">
+            <a:schemeClr val="lt1"/>
+          </a:fontRef>
+        </p:style>
+        <p:txBody>
+          <a:bodyPr rtlCol="0" anchor="ctr"/>
+          <a:lstStyle/>
+          <a:p/>
+        </p:txBody>
+      </p:sp>
+      <p:sp>
+        <p:nvSpPr>
+          <p:cNvPr id="7" name="TextBox 6"/>
+          <p:cNvSpPr txBox="1"/>
+          <p:nvPr/>
+        </p:nvSpPr>
+        <p:spPr>
+          <a:xfrm>
+            <a:off x="548640" y="1508760"/>
+            <a:ext cx="2011680" cy="457200"/>
+          </a:xfrm>
+          <a:prstGeom prst="rect">
+            <a:avLst/>
+          </a:prstGeom>
+          <a:noFill/>
+        </p:spPr>
+        <p:txBody>
+          <a:bodyPr wrap="square" anchor="ctr" lIns="0" rIns="0" tIns="0" bIns="0"/>
+          <a:lstStyle/>
+          <a:p>
+            <a:pPr algn="ctr"/>
+            <a:r>
+              <a:rPr sz="1400" b="1" i="0">
+                <a:solidFill>
+                  <a:srgbClr val="202122"/>
+                </a:solidFill>
+                <a:latin typeface="Calibri"/>
+              </a:rPr>
+              <a:t>20 minutes</a:t>
+            </a:r>
+          </a:p>
+        </p:txBody>
+      </p:sp>
+      <p:sp>
+        <p:nvSpPr>
+          <p:cNvPr id="8" name="TextBox 7"/>
+          <p:cNvSpPr txBox="1"/>
+          <p:nvPr/>
+        </p:nvSpPr>
+        <p:spPr>
+          <a:xfrm>
+            <a:off x="2743200" y="1508760"/>
+            <a:ext cx="4754880" cy="457200"/>
+          </a:xfrm>
+          <a:prstGeom prst="rect">
+            <a:avLst/>
+          </a:prstGeom>
+          <a:noFill/>
+        </p:spPr>
+        <p:txBody>
+          <a:bodyPr wrap="square" anchor="ctr" lIns="0" rIns="0" tIns="0" bIns="0"/>
+          <a:lstStyle/>
+          <a:p>
+            <a:pPr algn="l"/>
+            <a:r>
+              <a:rPr sz="1400" b="0" i="1">
+                <a:solidFill>
+                  <a:srgbClr val="54595D"/>
+                </a:solidFill>
+                <a:latin typeface="Calibri"/>
+              </a:rPr>
+              <a:t>Pairs</a:t>
+            </a:r>
+          </a:p>
+        </p:txBody>
+      </p:sp>
+      <p:sp>
+        <p:nvSpPr>
+          <p:cNvPr id="9" name="Oval 8"/>
+          <p:cNvSpPr/>
+          <p:nvPr/>
+        </p:nvSpPr>
+        <p:spPr>
+          <a:xfrm>
+            <a:off x="548640" y="2482596"/>
+            <a:ext cx="384048" cy="384048"/>
+          </a:xfrm>
+          <a:prstGeom prst="ellipse">
+            <a:avLst/>
+          </a:prstGeom>
+          <a:solidFill>
+            <a:srgbClr val="0645AD"/>
+          </a:solidFill>
+          <a:ln>
+            <a:noFill/>
+          </a:ln>
+          <a:effectLst/>
+        </p:spPr>
+        <p:style>
+          <a:lnRef idx="1">
+            <a:schemeClr val="accent1"/>
+          </a:lnRef>
+          <a:fillRef idx="3">
+            <a:schemeClr val="accent1"/>
+          </a:fillRef>
+          <a:effectRef idx="2">
+            <a:schemeClr val="accent1"/>
+          </a:effectRef>
+          <a:fontRef idx="minor">
+            <a:schemeClr val="lt1"/>
+          </a:fontRef>
+        </p:style>
+        <p:txBody>
+          <a:bodyPr rtlCol="0" anchor="ctr" lIns="0" rIns="0" tIns="0" bIns="0"/>
+          <a:lstStyle/>
+          <a:p>
+            <a:pPr algn="ctr"/>
+            <a:r>
+              <a:rPr sz="1300" b="1">
+                <a:solidFill>
+                  <a:srgbClr val="FFFFFF"/>
+                </a:solidFill>
+                <a:latin typeface="Calibri"/>
+              </a:rPr>
+              <a:t>1</a:t>
+            </a:r>
+          </a:p>
+        </p:txBody>
+      </p:sp>
+      <p:sp>
+        <p:nvSpPr>
+          <p:cNvPr id="10" name="TextBox 9"/>
+          <p:cNvSpPr txBox="1"/>
+          <p:nvPr/>
+        </p:nvSpPr>
+        <p:spPr>
+          <a:xfrm>
+            <a:off x="1143000" y="2240280"/>
+            <a:ext cx="5943600" cy="868680"/>
+          </a:xfrm>
+          <a:prstGeom prst="rect">
+            <a:avLst/>
+          </a:prstGeom>
+          <a:noFill/>
+        </p:spPr>
+        <p:txBody>
+          <a:bodyPr wrap="square" anchor="ctr" lIns="0" rIns="0" tIns="0" bIns="0"/>
+          <a:lstStyle/>
+          <a:p>
+            <a:pPr algn="l"/>
+            <a:r>
+              <a:rPr sz="1700" b="0" i="0">
+                <a:solidFill>
+                  <a:srgbClr val="202122"/>
+                </a:solidFill>
+                <a:latin typeface="Calibri"/>
+              </a:rPr>
+              <a:t>Your teacher gives you ten workshop scenarios.</a:t>
+            </a:r>
+          </a:p>
+        </p:txBody>
+      </p:sp>
+      <p:sp>
+        <p:nvSpPr>
+          <p:cNvPr id="11" name="Oval 10"/>
+          <p:cNvSpPr/>
+          <p:nvPr/>
+        </p:nvSpPr>
+        <p:spPr>
+          <a:xfrm>
+            <a:off x="548640" y="3461004"/>
+            <a:ext cx="384048" cy="384048"/>
+          </a:xfrm>
+          <a:prstGeom prst="ellipse">
+            <a:avLst/>
+          </a:prstGeom>
+          <a:solidFill>
+            <a:srgbClr val="0645AD"/>
+          </a:solidFill>
+          <a:ln>
+            <a:noFill/>
+          </a:ln>
+          <a:effectLst/>
+        </p:spPr>
+        <p:style>
+          <a:lnRef idx="1">
+            <a:schemeClr val="accent1"/>
+          </a:lnRef>
+          <a:fillRef idx="3">
+            <a:schemeClr val="accent1"/>
+          </a:fillRef>
+          <a:effectRef idx="2">
+            <a:schemeClr val="accent1"/>
+          </a:effectRef>
+          <a:fontRef idx="minor">
+            <a:schemeClr val="lt1"/>
+          </a:fontRef>
+        </p:style>
+        <p:txBody>
+          <a:bodyPr rtlCol="0" anchor="ctr" lIns="0" rIns="0" tIns="0" bIns="0"/>
+          <a:lstStyle/>
+          <a:p>
+            <a:pPr algn="ctr"/>
+            <a:r>
+              <a:rPr sz="1300" b="1">
+                <a:solidFill>
+                  <a:srgbClr val="FFFFFF"/>
+                </a:solidFill>
+                <a:latin typeface="Calibri"/>
+              </a:rPr>
+              <a:t>2</a:t>
+            </a:r>
+          </a:p>
+        </p:txBody>
+      </p:sp>
+      <p:sp>
+        <p:nvSpPr>
+          <p:cNvPr id="12" name="TextBox 11"/>
+          <p:cNvSpPr txBox="1"/>
+          <p:nvPr/>
+        </p:nvSpPr>
+        <p:spPr>
+          <a:xfrm>
+            <a:off x="1143000" y="3218688"/>
+            <a:ext cx="5943600" cy="868680"/>
+          </a:xfrm>
+          <a:prstGeom prst="rect">
+            <a:avLst/>
+          </a:prstGeom>
+          <a:noFill/>
+        </p:spPr>
+        <p:txBody>
+          <a:bodyPr wrap="square" anchor="ctr" lIns="0" rIns="0" tIns="0" bIns="0"/>
+          <a:lstStyle/>
+          <a:p>
+            <a:pPr algn="l"/>
+            <a:r>
+              <a:rPr sz="1700" b="0" i="0">
+                <a:solidFill>
+                  <a:srgbClr val="202122"/>
+                </a:solidFill>
+                <a:latin typeface="Calibri"/>
+              </a:rPr>
+              <a:t>Match each to the legislation that applies.</a:t>
+            </a:r>
+          </a:p>
+        </p:txBody>
+      </p:sp>
+      <p:sp>
+        <p:nvSpPr>
+          <p:cNvPr id="13" name="Oval 12"/>
+          <p:cNvSpPr/>
+          <p:nvPr/>
+        </p:nvSpPr>
+        <p:spPr>
+          <a:xfrm>
+            <a:off x="548640" y="4439412"/>
+            <a:ext cx="384048" cy="384048"/>
+          </a:xfrm>
+          <a:prstGeom prst="ellipse">
+            <a:avLst/>
+          </a:prstGeom>
+          <a:solidFill>
+            <a:srgbClr val="0645AD"/>
+          </a:solidFill>
+          <a:ln>
+            <a:noFill/>
+          </a:ln>
+          <a:effectLst/>
+        </p:spPr>
+        <p:style>
+          <a:lnRef idx="1">
+            <a:schemeClr val="accent1"/>
+          </a:lnRef>
+          <a:fillRef idx="3">
+            <a:schemeClr val="accent1"/>
+          </a:fillRef>
+          <a:effectRef idx="2">
+            <a:schemeClr val="accent1"/>
+          </a:effectRef>
+          <a:fontRef idx="minor">
+            <a:schemeClr val="lt1"/>
+          </a:fontRef>
+        </p:style>
+        <p:txBody>
+          <a:bodyPr rtlCol="0" anchor="ctr" lIns="0" rIns="0" tIns="0" bIns="0"/>
+          <a:lstStyle/>
+          <a:p>
+            <a:pPr algn="ctr"/>
+            <a:r>
+              <a:rPr sz="1300" b="1">
+                <a:solidFill>
+                  <a:srgbClr val="FFFFFF"/>
+                </a:solidFill>
+                <a:latin typeface="Calibri"/>
+              </a:rPr>
+              <a:t>3</a:t>
+            </a:r>
+          </a:p>
+        </p:txBody>
+      </p:sp>
+      <p:sp>
+        <p:nvSpPr>
+          <p:cNvPr id="14" name="TextBox 13"/>
+          <p:cNvSpPr txBox="1"/>
+          <p:nvPr/>
+        </p:nvSpPr>
+        <p:spPr>
+          <a:xfrm>
+            <a:off x="1143000" y="4197096"/>
+            <a:ext cx="5943600" cy="868680"/>
+          </a:xfrm>
+          <a:prstGeom prst="rect">
+            <a:avLst/>
+          </a:prstGeom>
+          <a:noFill/>
+        </p:spPr>
+        <p:txBody>
+          <a:bodyPr wrap="square" anchor="ctr" lIns="0" rIns="0" tIns="0" bIns="0"/>
+          <a:lstStyle/>
+          <a:p>
+            <a:pPr algn="l"/>
+            <a:r>
+              <a:rPr sz="1700" b="0" i="0">
+                <a:solidFill>
+                  <a:srgbClr val="202122"/>
+                </a:solidFill>
+                <a:latin typeface="Calibri"/>
+              </a:rPr>
+              <a:t>Decide who is responsible in each case.</a:t>
+            </a:r>
+          </a:p>
+        </p:txBody>
+      </p:sp>
+      <p:sp>
+        <p:nvSpPr>
+          <p:cNvPr id="15" name="Oval 14"/>
+          <p:cNvSpPr/>
+          <p:nvPr/>
+        </p:nvSpPr>
+        <p:spPr>
+          <a:xfrm>
+            <a:off x="548640" y="5417820"/>
+            <a:ext cx="384048" cy="384048"/>
+          </a:xfrm>
+          <a:prstGeom prst="ellipse">
+            <a:avLst/>
+          </a:prstGeom>
+          <a:solidFill>
+            <a:srgbClr val="0645AD"/>
+          </a:solidFill>
+          <a:ln>
+            <a:noFill/>
+          </a:ln>
+          <a:effectLst/>
+        </p:spPr>
+        <p:style>
+          <a:lnRef idx="1">
+            <a:schemeClr val="accent1"/>
+          </a:lnRef>
+          <a:fillRef idx="3">
+            <a:schemeClr val="accent1"/>
+          </a:fillRef>
+          <a:effectRef idx="2">
+            <a:schemeClr val="accent1"/>
+          </a:effectRef>
+          <a:fontRef idx="minor">
+            <a:schemeClr val="lt1"/>
+          </a:fontRef>
+        </p:style>
+        <p:txBody>
+          <a:bodyPr rtlCol="0" anchor="ctr" lIns="0" rIns="0" tIns="0" bIns="0"/>
+          <a:lstStyle/>
+          <a:p>
+            <a:pPr algn="ctr"/>
+            <a:r>
+              <a:rPr sz="1300" b="1">
+                <a:solidFill>
+                  <a:srgbClr val="FFFFFF"/>
+                </a:solidFill>
+                <a:latin typeface="Calibri"/>
+              </a:rPr>
+              <a:t>4</a:t>
+            </a:r>
+          </a:p>
+        </p:txBody>
+      </p:sp>
+      <p:sp>
+        <p:nvSpPr>
+          <p:cNvPr id="16" name="TextBox 15"/>
+          <p:cNvSpPr txBox="1"/>
+          <p:nvPr/>
+        </p:nvSpPr>
+        <p:spPr>
+          <a:xfrm>
+            <a:off x="1143000" y="5175504"/>
+            <a:ext cx="5943600" cy="868680"/>
+          </a:xfrm>
+          <a:prstGeom prst="rect">
+            <a:avLst/>
+          </a:prstGeom>
+          <a:noFill/>
+        </p:spPr>
+        <p:txBody>
+          <a:bodyPr wrap="square" anchor="ctr" lIns="0" rIns="0" tIns="0" bIns="0"/>
+          <a:lstStyle/>
+          <a:p>
+            <a:pPr algn="l"/>
+            <a:r>
+              <a:rPr sz="1700" b="0" i="0">
+                <a:solidFill>
+                  <a:srgbClr val="202122"/>
+                </a:solidFill>
+                <a:latin typeface="Calibri"/>
+              </a:rPr>
+              <a:t>Pick the most serious and explain the consequences of non-compliance.</a:t>
+            </a:r>
+          </a:p>
+        </p:txBody>
+      </p:sp>
+      <p:sp>
+        <p:nvSpPr>
+          <p:cNvPr id="17" name="Rounded Rectangle 16"/>
+          <p:cNvSpPr/>
+          <p:nvPr/>
+        </p:nvSpPr>
+        <p:spPr>
+          <a:xfrm>
+            <a:off x="7772400" y="1508760"/>
+            <a:ext cx="3867912" cy="4572000"/>
+          </a:xfrm>
+          <a:prstGeom prst="roundRect">
+            <a:avLst>
+              <a:gd name="adj" fmla="val 8000"/>
+            </a:avLst>
+          </a:prstGeom>
+          <a:solidFill>
+            <a:srgbClr val="EAF3FF"/>
+          </a:solidFill>
+          <a:ln>
+            <a:noFill/>
+          </a:ln>
+          <a:effectLst/>
+        </p:spPr>
+        <p:style>
+          <a:lnRef idx="1">
+            <a:schemeClr val="accent1"/>
+          </a:lnRef>
+          <a:fillRef idx="3">
+            <a:schemeClr val="accent1"/>
+          </a:fillRef>
+          <a:effectRef idx="2">
+            <a:schemeClr val="accent1"/>
+          </a:effectRef>
+          <a:fontRef idx="minor">
+            <a:schemeClr val="lt1"/>
+          </a:fontRef>
+        </p:style>
+        <p:txBody>
+          <a:bodyPr rtlCol="0" anchor="ctr"/>
+          <a:lstStyle/>
+          <a:p/>
+        </p:txBody>
+      </p:sp>
+      <p:sp>
+        <p:nvSpPr>
+          <p:cNvPr id="18" name="TextBox 17"/>
+          <p:cNvSpPr txBox="1"/>
+          <p:nvPr/>
+        </p:nvSpPr>
+        <p:spPr>
+          <a:xfrm>
+            <a:off x="8046720" y="1737360"/>
+            <a:ext cx="3291840" cy="365760"/>
+          </a:xfrm>
+          <a:prstGeom prst="rect">
+            <a:avLst/>
+          </a:prstGeom>
+          <a:noFill/>
+        </p:spPr>
+        <p:txBody>
+          <a:bodyPr wrap="square" anchor="t" lIns="0" rIns="0" tIns="0" bIns="0"/>
+          <a:lstStyle/>
+          <a:p>
+            <a:pPr algn="l"/>
+            <a:r>
+              <a:rPr sz="1300" b="1" i="0">
+                <a:solidFill>
+                  <a:srgbClr val="0645AD"/>
+                </a:solidFill>
+                <a:latin typeface="Calibri"/>
+              </a:rPr>
+              <a:t>SUCCESS CRITERIA</a:t>
+            </a:r>
+          </a:p>
+        </p:txBody>
+      </p:sp>
+      <p:sp>
+        <p:nvSpPr>
+          <p:cNvPr id="19" name="TextBox 18"/>
+          <p:cNvSpPr txBox="1"/>
+          <p:nvPr/>
+        </p:nvSpPr>
+        <p:spPr>
+          <a:xfrm>
+            <a:off x="8046720" y="2240280"/>
+            <a:ext cx="3337560" cy="3657600"/>
+          </a:xfrm>
+          <a:prstGeom prst="rect">
+            <a:avLst/>
+          </a:prstGeom>
+          <a:noFill/>
+        </p:spPr>
+        <p:txBody>
+          <a:bodyPr wrap="square" lIns="0" rIns="0" tIns="0" bIns="0">
+            <a:spAutoFit/>
+          </a:bodyPr>
+          <a:lstStyle/>
+          <a:p>
+            <a:pPr marL="274320" indent="-274320">
+              <a:spcAft>
+                <a:spcPts val="810"/>
+              </a:spcAft>
+              <a:buClr>
+                <a:srgbClr val="0645AD"/>
+              </a:buClr>
+              <a:buFont typeface="Arial"/>
+              <a:buChar char="•"/>
+            </a:pPr>
+            <a:r>
+              <a:rPr sz="1800" b="0">
+                <a:solidFill>
+                  <a:srgbClr val="202122"/>
+                </a:solidFill>
+                <a:latin typeface="Calibri"/>
+              </a:rPr>
+              <a:t>Correct legislation named</a:t>
+            </a:r>
+          </a:p>
+          <a:p>
+            <a:pPr marL="274320" indent="-274320">
+              <a:spcAft>
+                <a:spcPts val="810"/>
+              </a:spcAft>
+              <a:buClr>
+                <a:srgbClr val="0645AD"/>
+              </a:buClr>
+              <a:buFont typeface="Arial"/>
+              <a:buChar char="•"/>
+            </a:pPr>
+            <a:r>
+              <a:rPr sz="1800" b="0">
+                <a:solidFill>
+                  <a:srgbClr val="202122"/>
+                </a:solidFill>
+                <a:latin typeface="Calibri"/>
+              </a:rPr>
+              <a:t>Responsibilities split correctly</a:t>
+            </a:r>
+          </a:p>
+          <a:p>
+            <a:pPr marL="274320" indent="-274320">
+              <a:spcAft>
+                <a:spcPts val="810"/>
+              </a:spcAft>
+              <a:buClr>
+                <a:srgbClr val="0645AD"/>
+              </a:buClr>
+              <a:buFont typeface="Arial"/>
+              <a:buChar char="•"/>
+            </a:pPr>
+            <a:r>
+              <a:rPr sz="1800" b="0">
+                <a:solidFill>
+                  <a:srgbClr val="202122"/>
+                </a:solidFill>
+                <a:latin typeface="Calibri"/>
+              </a:rPr>
+              <a:t>Consequences are realistic</a:t>
+            </a:r>
+          </a:p>
+        </p:txBody>
+      </p:sp>
+    </p:spTree>
+  </p:cSld>
+  <p:clrMapOvr>
+    <a:masterClrMapping/>
+  </p:clrMapOvr>
+</p:sld>
+</file>
+
+<file path=ppt/slides/slide13.xml><?xml version="1.0" encoding="utf-8"?>
+<p:sld xmlns:a="http://schemas.openxmlformats.org/drawingml/2006/main" xmlns:p="http://schemas.openxmlformats.org/presentationml/2006/main" xmlns:r="http://schemas.openxmlformats.org/officeDocument/2006/relationships">
+  <p:cSld>
+    <p:bg>
+      <p:bgPr>
+        <a:solidFill>
+          <a:srgbClr val="03306E"/>
+        </a:solidFill>
+        <a:effectLst/>
+      </p:bgPr>
+    </p:bg>
+    <p:spTree>
+      <p:nvGrpSpPr>
+        <p:cNvPr id="1" name=""/>
+        <p:cNvGrpSpPr/>
+        <p:nvPr/>
+      </p:nvGrpSpPr>
+      <p:grpSpPr/>
+      <p:sp>
+        <p:nvSpPr>
+          <p:cNvPr id="2" name="TextBox 1"/>
+          <p:cNvSpPr txBox="1"/>
+          <p:nvPr/>
+        </p:nvSpPr>
+        <p:spPr>
+          <a:xfrm>
+            <a:off x="548640" y="320040"/>
+            <a:ext cx="11094415" cy="274320"/>
+          </a:xfrm>
+          <a:prstGeom prst="rect">
+            <a:avLst/>
+          </a:prstGeom>
+          <a:noFill/>
+        </p:spPr>
+        <p:txBody>
+          <a:bodyPr wrap="square" anchor="t" lIns="0" rIns="0" tIns="0" bIns="0"/>
+          <a:lstStyle/>
+          <a:p>
+            <a:pPr algn="l"/>
+            <a:r>
+              <a:rPr sz="1100" b="1" i="0">
+                <a:solidFill>
+                  <a:srgbClr val="A9C8F0"/>
+                </a:solidFill>
+                <a:latin typeface="Calibri"/>
+              </a:rPr>
+              <a:t>ENGINEERING CORE  ·  Core topic 12</a:t>
+            </a:r>
+          </a:p>
+        </p:txBody>
+      </p:sp>
+      <p:sp>
+        <p:nvSpPr>
+          <p:cNvPr id="3" name="TextBox 2"/>
+          <p:cNvSpPr txBox="1"/>
+          <p:nvPr/>
+        </p:nvSpPr>
+        <p:spPr>
+          <a:xfrm>
+            <a:off x="548640" y="566928"/>
+            <a:ext cx="11094415" cy="822960"/>
+          </a:xfrm>
+          <a:prstGeom prst="rect">
+            <a:avLst/>
+          </a:prstGeom>
+          <a:noFill/>
+        </p:spPr>
+        <p:txBody>
+          <a:bodyPr wrap="square" anchor="ctr" lIns="0" rIns="0" tIns="0" bIns="0"/>
+          <a:lstStyle/>
+          <a:p>
+            <a:pPr algn="l"/>
+            <a:r>
+              <a:rPr sz="3200" b="1" i="0">
+                <a:solidFill>
+                  <a:srgbClr val="FFFFFF"/>
+                </a:solidFill>
+                <a:latin typeface="Cambria"/>
+              </a:rPr>
+              <a:t>Exit ticket</a:t>
+            </a:r>
+          </a:p>
+        </p:txBody>
+      </p:sp>
+      <p:sp>
+        <p:nvSpPr>
+          <p:cNvPr id="4" name="Oval 3"/>
+          <p:cNvSpPr/>
+          <p:nvPr/>
+        </p:nvSpPr>
+        <p:spPr>
+          <a:xfrm>
+            <a:off x="548640" y="1737360"/>
+            <a:ext cx="502920" cy="502920"/>
+          </a:xfrm>
+          <a:prstGeom prst="ellipse">
+            <a:avLst/>
+          </a:prstGeom>
+          <a:solidFill>
+            <a:srgbClr val="F2B705"/>
+          </a:solidFill>
+          <a:ln>
+            <a:noFill/>
+          </a:ln>
+          <a:effectLst/>
+        </p:spPr>
+        <p:style>
+          <a:lnRef idx="1">
+            <a:schemeClr val="accent1"/>
+          </a:lnRef>
+          <a:fillRef idx="3">
+            <a:schemeClr val="accent1"/>
+          </a:fillRef>
+          <a:effectRef idx="2">
+            <a:schemeClr val="accent1"/>
+          </a:effectRef>
+          <a:fontRef idx="minor">
+            <a:schemeClr val="lt1"/>
+          </a:fontRef>
+        </p:style>
+        <p:txBody>
+          <a:bodyPr rtlCol="0" anchor="ctr" lIns="0" rIns="0" tIns="0" bIns="0"/>
+          <a:lstStyle/>
+          <a:p>
+            <a:pPr algn="ctr"/>
+            <a:r>
+              <a:rPr sz="1700" b="1">
+                <a:solidFill>
+                  <a:srgbClr val="202122"/>
+                </a:solidFill>
+                <a:latin typeface="Calibri"/>
+              </a:rPr>
+              <a:t>1</a:t>
+            </a:r>
+          </a:p>
+        </p:txBody>
+      </p:sp>
+      <p:sp>
+        <p:nvSpPr>
+          <p:cNvPr id="5" name="TextBox 4"/>
+          <p:cNvSpPr txBox="1"/>
+          <p:nvPr/>
+        </p:nvSpPr>
+        <p:spPr>
+          <a:xfrm>
+            <a:off x="1325880" y="1645920"/>
+            <a:ext cx="6583680" cy="822960"/>
+          </a:xfrm>
+          <a:prstGeom prst="rect">
+            <a:avLst/>
+          </a:prstGeom>
+          <a:noFill/>
+        </p:spPr>
+        <p:txBody>
+          <a:bodyPr wrap="square" anchor="ctr" lIns="0" rIns="0" tIns="0" bIns="0"/>
+          <a:lstStyle/>
+          <a:p>
+            <a:pPr algn="l"/>
+            <a:r>
+              <a:rPr sz="2000" b="0" i="0">
+                <a:solidFill>
+                  <a:srgbClr val="FFFFFF"/>
+                </a:solidFill>
+                <a:latin typeface="Calibri"/>
+              </a:rPr>
+              <a:t>Which regulation covers noise from a CNC machine?</a:t>
+            </a:r>
+          </a:p>
+        </p:txBody>
+      </p:sp>
+      <p:sp>
+        <p:nvSpPr>
+          <p:cNvPr id="6" name="Oval 5"/>
+          <p:cNvSpPr/>
+          <p:nvPr/>
+        </p:nvSpPr>
+        <p:spPr>
+          <a:xfrm>
+            <a:off x="548640" y="2697480"/>
+            <a:ext cx="502920" cy="502920"/>
+          </a:xfrm>
+          <a:prstGeom prst="ellipse">
+            <a:avLst/>
+          </a:prstGeom>
+          <a:solidFill>
+            <a:srgbClr val="F2B705"/>
+          </a:solidFill>
+          <a:ln>
+            <a:noFill/>
+          </a:ln>
+          <a:effectLst/>
+        </p:spPr>
+        <p:style>
+          <a:lnRef idx="1">
+            <a:schemeClr val="accent1"/>
+          </a:lnRef>
+          <a:fillRef idx="3">
+            <a:schemeClr val="accent1"/>
+          </a:fillRef>
+          <a:effectRef idx="2">
+            <a:schemeClr val="accent1"/>
+          </a:effectRef>
+          <a:fontRef idx="minor">
+            <a:schemeClr val="lt1"/>
+          </a:fontRef>
+        </p:style>
+        <p:txBody>
+          <a:bodyPr rtlCol="0" anchor="ctr" lIns="0" rIns="0" tIns="0" bIns="0"/>
+          <a:lstStyle/>
+          <a:p>
+            <a:pPr algn="ctr"/>
+            <a:r>
+              <a:rPr sz="1700" b="1">
+                <a:solidFill>
+                  <a:srgbClr val="202122"/>
+                </a:solidFill>
+                <a:latin typeface="Calibri"/>
+              </a:rPr>
+              <a:t>2</a:t>
+            </a:r>
+          </a:p>
+        </p:txBody>
+      </p:sp>
+      <p:sp>
+        <p:nvSpPr>
+          <p:cNvPr id="7" name="TextBox 6"/>
+          <p:cNvSpPr txBox="1"/>
+          <p:nvPr/>
+        </p:nvSpPr>
+        <p:spPr>
+          <a:xfrm>
+            <a:off x="1325880" y="2606040"/>
+            <a:ext cx="6583680" cy="822960"/>
+          </a:xfrm>
+          <a:prstGeom prst="rect">
+            <a:avLst/>
+          </a:prstGeom>
+          <a:noFill/>
+        </p:spPr>
+        <p:txBody>
+          <a:bodyPr wrap="square" anchor="ctr" lIns="0" rIns="0" tIns="0" bIns="0"/>
+          <a:lstStyle/>
+          <a:p>
+            <a:pPr algn="l"/>
+            <a:r>
+              <a:rPr sz="2000" b="0" i="0">
+                <a:solidFill>
+                  <a:srgbClr val="FFFFFF"/>
+                </a:solidFill>
+                <a:latin typeface="Calibri"/>
+              </a:rPr>
+              <a:t>Why is wellbeing part of health and safety?</a:t>
+            </a:r>
+          </a:p>
+        </p:txBody>
+      </p:sp>
+      <p:sp>
+        <p:nvSpPr>
+          <p:cNvPr id="8" name="Oval 7"/>
+          <p:cNvSpPr/>
+          <p:nvPr/>
+        </p:nvSpPr>
+        <p:spPr>
+          <a:xfrm>
+            <a:off x="548640" y="3657600"/>
+            <a:ext cx="502920" cy="502920"/>
+          </a:xfrm>
+          <a:prstGeom prst="ellipse">
+            <a:avLst/>
+          </a:prstGeom>
+          <a:solidFill>
+            <a:srgbClr val="F2B705"/>
+          </a:solidFill>
+          <a:ln>
+            <a:noFill/>
+          </a:ln>
+          <a:effectLst/>
+        </p:spPr>
+        <p:style>
+          <a:lnRef idx="1">
+            <a:schemeClr val="accent1"/>
+          </a:lnRef>
+          <a:fillRef idx="3">
+            <a:schemeClr val="accent1"/>
+          </a:fillRef>
+          <a:effectRef idx="2">
+            <a:schemeClr val="accent1"/>
+          </a:effectRef>
+          <a:fontRef idx="minor">
+            <a:schemeClr val="lt1"/>
+          </a:fontRef>
+        </p:style>
+        <p:txBody>
+          <a:bodyPr rtlCol="0" anchor="ctr" lIns="0" rIns="0" tIns="0" bIns="0"/>
+          <a:lstStyle/>
+          <a:p>
+            <a:pPr algn="ctr"/>
+            <a:r>
+              <a:rPr sz="1700" b="1">
+                <a:solidFill>
+                  <a:srgbClr val="202122"/>
+                </a:solidFill>
+                <a:latin typeface="Calibri"/>
+              </a:rPr>
+              <a:t>3</a:t>
+            </a:r>
+          </a:p>
+        </p:txBody>
+      </p:sp>
+      <p:sp>
+        <p:nvSpPr>
+          <p:cNvPr id="9" name="TextBox 8"/>
+          <p:cNvSpPr txBox="1"/>
+          <p:nvPr/>
+        </p:nvSpPr>
+        <p:spPr>
+          <a:xfrm>
+            <a:off x="1325880" y="3566160"/>
+            <a:ext cx="6583680" cy="822960"/>
+          </a:xfrm>
+          <a:prstGeom prst="rect">
+            <a:avLst/>
+          </a:prstGeom>
+          <a:noFill/>
+        </p:spPr>
+        <p:txBody>
+          <a:bodyPr wrap="square" anchor="ctr" lIns="0" rIns="0" tIns="0" bIns="0"/>
+          <a:lstStyle/>
+          <a:p>
+            <a:pPr algn="l"/>
+            <a:r>
+              <a:rPr sz="2000" b="0" i="0">
+                <a:solidFill>
+                  <a:srgbClr val="FFFFFF"/>
+                </a:solidFill>
+                <a:latin typeface="Calibri"/>
+              </a:rPr>
+              <a:t>What should you do if asked to use a machine you're not trained on?</a:t>
+            </a:r>
+          </a:p>
+        </p:txBody>
+      </p:sp>
+      <p:sp>
+        <p:nvSpPr>
+          <p:cNvPr id="10" name="Rounded Rectangle 9"/>
+          <p:cNvSpPr/>
+          <p:nvPr/>
+        </p:nvSpPr>
+        <p:spPr>
+          <a:xfrm>
+            <a:off x="8229600" y="1645920"/>
+            <a:ext cx="3410712" cy="2926080"/>
+          </a:xfrm>
+          <a:prstGeom prst="roundRect">
+            <a:avLst>
+              <a:gd name="adj" fmla="val 8000"/>
+            </a:avLst>
+          </a:prstGeom>
+          <a:solidFill>
+            <a:srgbClr val="0645AD"/>
+          </a:solidFill>
+          <a:ln>
+            <a:noFill/>
+          </a:ln>
+          <a:effectLst/>
+        </p:spPr>
+        <p:style>
+          <a:lnRef idx="1">
+            <a:schemeClr val="accent1"/>
+          </a:lnRef>
+          <a:fillRef idx="3">
+            <a:schemeClr val="accent1"/>
+          </a:fillRef>
+          <a:effectRef idx="2">
+            <a:schemeClr val="accent1"/>
+          </a:effectRef>
+          <a:fontRef idx="minor">
+            <a:schemeClr val="lt1"/>
+          </a:fontRef>
+        </p:style>
+        <p:txBody>
+          <a:bodyPr rtlCol="0" anchor="ctr"/>
+          <a:lstStyle/>
+          <a:p/>
+        </p:txBody>
+      </p:sp>
+      <p:sp>
+        <p:nvSpPr>
+          <p:cNvPr id="11" name="TextBox 10"/>
+          <p:cNvSpPr txBox="1"/>
+          <p:nvPr/>
+        </p:nvSpPr>
+        <p:spPr>
+          <a:xfrm>
+            <a:off x="8503920" y="1874519"/>
+            <a:ext cx="2926080" cy="365760"/>
+          </a:xfrm>
+          <a:prstGeom prst="rect">
+            <a:avLst/>
+          </a:prstGeom>
+          <a:noFill/>
+        </p:spPr>
+        <p:txBody>
+          <a:bodyPr wrap="square" anchor="t" lIns="0" rIns="0" tIns="0" bIns="0"/>
+          <a:lstStyle/>
+          <a:p>
+            <a:pPr algn="l"/>
+            <a:r>
+              <a:rPr sz="1300" b="1" i="0">
+                <a:solidFill>
+                  <a:srgbClr val="A9C8F0"/>
+                </a:solidFill>
+                <a:latin typeface="Calibri"/>
+              </a:rPr>
+              <a:t>REVISE THIS TOPIC</a:t>
+            </a:r>
+          </a:p>
+        </p:txBody>
+      </p:sp>
+      <p:sp>
+        <p:nvSpPr>
+          <p:cNvPr id="12" name="TextBox 11"/>
+          <p:cNvSpPr txBox="1"/>
+          <p:nvPr/>
+        </p:nvSpPr>
+        <p:spPr>
+          <a:xfrm>
+            <a:off x="8503920" y="2286000"/>
+            <a:ext cx="2926080" cy="548640"/>
+          </a:xfrm>
+          <a:prstGeom prst="rect">
+            <a:avLst/>
+          </a:prstGeom>
+          <a:noFill/>
+        </p:spPr>
+        <p:txBody>
+          <a:bodyPr wrap="square" anchor="t" lIns="0" rIns="0" tIns="0" bIns="0"/>
+          <a:lstStyle/>
+          <a:p>
+            <a:pPr algn="l"/>
+            <a:r>
+              <a:rPr sz="1400" b="0" i="0">
+                <a:solidFill>
+                  <a:srgbClr val="FFFFFF"/>
+                </a:solidFill>
+                <a:latin typeface="Calibri"/>
+              </a:rPr>
+              <a:t>Revision notes for this lesson are on the study wiki:</a:t>
+            </a:r>
+          </a:p>
+        </p:txBody>
+      </p:sp>
+      <p:sp>
+        <p:nvSpPr>
+          <p:cNvPr id="13" name="TextBox 12"/>
+          <p:cNvSpPr txBox="1"/>
+          <p:nvPr/>
+        </p:nvSpPr>
+        <p:spPr>
+          <a:xfrm>
+            <a:off x="8503920" y="2926080"/>
+            <a:ext cx="2926080" cy="1463040"/>
+          </a:xfrm>
+          <a:prstGeom prst="rect">
+            <a:avLst/>
+          </a:prstGeom>
+          <a:noFill/>
+        </p:spPr>
+        <p:txBody>
+          <a:bodyPr wrap="square" anchor="t" lIns="0" rIns="0" tIns="0" bIns="0"/>
+          <a:lstStyle/>
+          <a:p>
+            <a:pPr algn="l"/>
+            <a:r>
+              <a:rPr sz="2000" b="1" i="0">
+                <a:solidFill>
+                  <a:srgbClr val="FFFFFF"/>
+                </a:solidFill>
+                <a:latin typeface="Cambria"/>
+              </a:rPr>
+              <a:t>Engineering Core, Part 2</a:t>
+            </a:r>
+          </a:p>
+        </p:txBody>
+      </p:sp>
+      <p:sp>
+        <p:nvSpPr>
+          <p:cNvPr id="14" name="TextBox 13"/>
+          <p:cNvSpPr txBox="1"/>
+          <p:nvPr/>
+        </p:nvSpPr>
+        <p:spPr>
+          <a:xfrm>
+            <a:off x="548640" y="5669280"/>
+            <a:ext cx="11094415" cy="548640"/>
+          </a:xfrm>
+          <a:prstGeom prst="rect">
+            <a:avLst/>
+          </a:prstGeom>
+          <a:noFill/>
+        </p:spPr>
+        <p:txBody>
+          <a:bodyPr wrap="square" anchor="t" lIns="0" rIns="0" tIns="0" bIns="0"/>
+          <a:lstStyle/>
+          <a:p>
+            <a:pPr algn="l"/>
+            <a:r>
+              <a:rPr sz="1200" b="0" i="0">
+                <a:solidFill>
+                  <a:srgbClr val="A9C8F0"/>
+                </a:solidFill>
+                <a:latin typeface="Calibri"/>
+              </a:rPr>
+              <a:t>https://lana6478.github.io/T-level-Design-Development-Engineering-Manufacturing/#/01-core-component/02-engineering-core-part2.md</a:t>
+            </a:r>
+          </a:p>
+        </p:txBody>
+      </p:sp>
+    </p:spTree>
+  </p:cSld>
+  <p:clrMapOvr>
+    <a:masterClrMapping/>
+  </p:clrMapOvr>
+</p:sld>
+</file>
+
 <file path=ppt/slides/slide2.xml><?xml version="1.0" encoding="utf-8"?>
 <p:sld xmlns:a="http://schemas.openxmlformats.org/drawingml/2006/main" xmlns:p="http://schemas.openxmlformats.org/presentationml/2006/main" xmlns:r="http://schemas.openxmlformats.org/officeDocument/2006/relationships">
   <p:cSld>
@@ -4820,6 +7343,366 @@
                 <a:latin typeface="Calibri"/>
               </a:rPr>
               <a:t>3</a:t>
+            </a:r>
+          </a:p>
+        </p:txBody>
+      </p:sp>
+      <p:sp>
+        <p:nvSpPr>
+          <p:cNvPr id="6" name="TextBox 5"/>
+          <p:cNvSpPr txBox="1"/>
+          <p:nvPr/>
+        </p:nvSpPr>
+        <p:spPr>
+          <a:xfrm>
+            <a:off x="548640" y="1554480"/>
+            <a:ext cx="6720840" cy="4617720"/>
+          </a:xfrm>
+          <a:prstGeom prst="rect">
+            <a:avLst/>
+          </a:prstGeom>
+          <a:noFill/>
+        </p:spPr>
+        <p:txBody>
+          <a:bodyPr wrap="square" lIns="0" rIns="0" tIns="0" bIns="0">
+            <a:spAutoFit/>
+          </a:bodyPr>
+          <a:lstStyle/>
+          <a:p>
+            <a:pPr>
+              <a:spcAft>
+                <a:spcPts val="1320"/>
+              </a:spcAft>
+            </a:pPr>
+            <a:r>
+              <a:rPr sz="2200" b="0">
+                <a:solidFill>
+                  <a:srgbClr val="202122"/>
+                </a:solidFill>
+                <a:latin typeface="Calibri"/>
+              </a:rPr>
+              <a:t>The Health and Safety at Work Act (HASAWA) sets general duties for everyone at work. The Management Regulations require risk assessments. PUWER makes sure work equipment is safe and maintained. LOLER covers lifting operations and equipment. The PPE Regulations cover protective equipment. The Noise at Work Regulations protect hearing. The Manual Handling and Work at Height Regulations cover lifting and working above ground. The Electricity at Work Regulations cover electrical safety. CEMFAW covers first aid. RIDDOR requires serious incidents to be reported. COSHH controls hazardous substances.</a:t>
+            </a:r>
+          </a:p>
+        </p:txBody>
+      </p:sp>
+      <p:sp>
+        <p:nvSpPr>
+          <p:cNvPr id="7" name="Rounded Rectangle 6"/>
+          <p:cNvSpPr/>
+          <p:nvPr/>
+        </p:nvSpPr>
+        <p:spPr>
+          <a:xfrm>
+            <a:off x="7772400" y="1554480"/>
+            <a:ext cx="3867912" cy="4526280"/>
+          </a:xfrm>
+          <a:prstGeom prst="roundRect">
+            <a:avLst>
+              <a:gd name="adj" fmla="val 8000"/>
+            </a:avLst>
+          </a:prstGeom>
+          <a:solidFill>
+            <a:srgbClr val="03306E"/>
+          </a:solidFill>
+          <a:ln>
+            <a:noFill/>
+          </a:ln>
+          <a:effectLst/>
+        </p:spPr>
+        <p:style>
+          <a:lnRef idx="1">
+            <a:schemeClr val="accent1"/>
+          </a:lnRef>
+          <a:fillRef idx="3">
+            <a:schemeClr val="accent1"/>
+          </a:fillRef>
+          <a:effectRef idx="2">
+            <a:schemeClr val="accent1"/>
+          </a:effectRef>
+          <a:fontRef idx="minor">
+            <a:schemeClr val="lt1"/>
+          </a:fontRef>
+        </p:style>
+        <p:txBody>
+          <a:bodyPr rtlCol="0" anchor="ctr"/>
+          <a:lstStyle/>
+          <a:p/>
+        </p:txBody>
+      </p:sp>
+      <p:sp>
+        <p:nvSpPr>
+          <p:cNvPr id="8" name="Oval 7"/>
+          <p:cNvSpPr/>
+          <p:nvPr/>
+        </p:nvSpPr>
+        <p:spPr>
+          <a:xfrm>
+            <a:off x="8046720" y="1828800"/>
+            <a:ext cx="548640" cy="548640"/>
+          </a:xfrm>
+          <a:prstGeom prst="ellipse">
+            <a:avLst/>
+          </a:prstGeom>
+          <a:solidFill>
+            <a:srgbClr val="F2B705"/>
+          </a:solidFill>
+          <a:ln>
+            <a:noFill/>
+          </a:ln>
+          <a:effectLst/>
+        </p:spPr>
+        <p:style>
+          <a:lnRef idx="1">
+            <a:schemeClr val="accent1"/>
+          </a:lnRef>
+          <a:fillRef idx="3">
+            <a:schemeClr val="accent1"/>
+          </a:fillRef>
+          <a:effectRef idx="2">
+            <a:schemeClr val="accent1"/>
+          </a:effectRef>
+          <a:fontRef idx="minor">
+            <a:schemeClr val="lt1"/>
+          </a:fontRef>
+        </p:style>
+        <p:txBody>
+          <a:bodyPr rtlCol="0" anchor="ctr" lIns="0" rIns="0" tIns="0" bIns="0"/>
+          <a:lstStyle/>
+          <a:p>
+            <a:pPr algn="ctr"/>
+            <a:r>
+              <a:rPr sz="1300" b="1">
+                <a:solidFill>
+                  <a:srgbClr val="202122"/>
+                </a:solidFill>
+                <a:latin typeface="Calibri"/>
+              </a:rPr>
+              <a:t>e.g.</a:t>
+            </a:r>
+          </a:p>
+        </p:txBody>
+      </p:sp>
+      <p:sp>
+        <p:nvSpPr>
+          <p:cNvPr id="9" name="TextBox 8"/>
+          <p:cNvSpPr txBox="1"/>
+          <p:nvPr/>
+        </p:nvSpPr>
+        <p:spPr>
+          <a:xfrm>
+            <a:off x="8046720" y="2560320"/>
+            <a:ext cx="3291840" cy="365760"/>
+          </a:xfrm>
+          <a:prstGeom prst="rect">
+            <a:avLst/>
+          </a:prstGeom>
+          <a:noFill/>
+        </p:spPr>
+        <p:txBody>
+          <a:bodyPr wrap="square" anchor="t" lIns="0" rIns="0" tIns="0" bIns="0"/>
+          <a:lstStyle/>
+          <a:p>
+            <a:pPr algn="l"/>
+            <a:r>
+              <a:rPr sz="1300" b="1" i="0">
+                <a:solidFill>
+                  <a:srgbClr val="A9C8F0"/>
+                </a:solidFill>
+                <a:latin typeface="Calibri"/>
+              </a:rPr>
+              <a:t>EXAMPLE</a:t>
+            </a:r>
+          </a:p>
+        </p:txBody>
+      </p:sp>
+      <p:sp>
+        <p:nvSpPr>
+          <p:cNvPr id="10" name="TextBox 9"/>
+          <p:cNvSpPr txBox="1"/>
+          <p:nvPr/>
+        </p:nvSpPr>
+        <p:spPr>
+          <a:xfrm>
+            <a:off x="8046720" y="2971800"/>
+            <a:ext cx="3291840" cy="2971800"/>
+          </a:xfrm>
+          <a:prstGeom prst="rect">
+            <a:avLst/>
+          </a:prstGeom>
+          <a:noFill/>
+        </p:spPr>
+        <p:txBody>
+          <a:bodyPr wrap="square" anchor="t" lIns="0" rIns="0" tIns="0" bIns="0"/>
+          <a:lstStyle/>
+          <a:p>
+            <a:pPr algn="l"/>
+            <a:r>
+              <a:rPr sz="1900" b="0" i="0">
+                <a:solidFill>
+                  <a:srgbClr val="FFFFFF"/>
+                </a:solidFill>
+                <a:latin typeface="Cambria"/>
+              </a:rPr>
+              <a:t>Using an overhead crane brings in LOLER (the crane), PUWER (the equipment), PPE (hard hats) and HASAWA (general duty).</a:t>
+            </a:r>
+          </a:p>
+        </p:txBody>
+      </p:sp>
+    </p:spTree>
+  </p:cSld>
+  <p:clrMapOvr>
+    <a:masterClrMapping/>
+  </p:clrMapOvr>
+</p:sld>
+</file>
+
+<file path=ppt/slides/slide4.xml><?xml version="1.0" encoding="utf-8"?>
+<p:sld xmlns:a="http://schemas.openxmlformats.org/drawingml/2006/main" xmlns:p="http://schemas.openxmlformats.org/presentationml/2006/main" xmlns:r="http://schemas.openxmlformats.org/officeDocument/2006/relationships">
+  <p:cSld>
+    <p:bg>
+      <p:bgPr>
+        <a:solidFill>
+          <a:srgbClr val="FFFFFF"/>
+        </a:solidFill>
+        <a:effectLst/>
+      </p:bgPr>
+    </p:bg>
+    <p:spTree>
+      <p:nvGrpSpPr>
+        <p:cNvPr id="1" name=""/>
+        <p:cNvGrpSpPr/>
+        <p:nvPr/>
+      </p:nvGrpSpPr>
+      <p:grpSpPr/>
+      <p:sp>
+        <p:nvSpPr>
+          <p:cNvPr id="2" name="TextBox 1"/>
+          <p:cNvSpPr txBox="1"/>
+          <p:nvPr/>
+        </p:nvSpPr>
+        <p:spPr>
+          <a:xfrm>
+            <a:off x="548640" y="320040"/>
+            <a:ext cx="11094415" cy="274320"/>
+          </a:xfrm>
+          <a:prstGeom prst="rect">
+            <a:avLst/>
+          </a:prstGeom>
+          <a:noFill/>
+        </p:spPr>
+        <p:txBody>
+          <a:bodyPr wrap="square" anchor="t" lIns="0" rIns="0" tIns="0" bIns="0"/>
+          <a:lstStyle/>
+          <a:p>
+            <a:pPr algn="l"/>
+            <a:r>
+              <a:rPr sz="1100" b="1" i="0">
+                <a:solidFill>
+                  <a:srgbClr val="54595D"/>
+                </a:solidFill>
+                <a:latin typeface="Calibri"/>
+              </a:rPr>
+              <a:t>ENGINEERING CORE  ·  Core topic 12</a:t>
+            </a:r>
+          </a:p>
+        </p:txBody>
+      </p:sp>
+      <p:sp>
+        <p:nvSpPr>
+          <p:cNvPr id="3" name="TextBox 2"/>
+          <p:cNvSpPr txBox="1"/>
+          <p:nvPr/>
+        </p:nvSpPr>
+        <p:spPr>
+          <a:xfrm>
+            <a:off x="548640" y="566928"/>
+            <a:ext cx="11094415" cy="822960"/>
+          </a:xfrm>
+          <a:prstGeom prst="rect">
+            <a:avLst/>
+          </a:prstGeom>
+          <a:noFill/>
+        </p:spPr>
+        <p:txBody>
+          <a:bodyPr wrap="square" anchor="ctr" lIns="0" rIns="0" tIns="0" bIns="0"/>
+          <a:lstStyle/>
+          <a:p>
+            <a:pPr algn="l"/>
+            <a:r>
+              <a:rPr sz="3200" b="1" i="0">
+                <a:solidFill>
+                  <a:srgbClr val="03306E"/>
+                </a:solidFill>
+                <a:latin typeface="Cambria"/>
+              </a:rPr>
+              <a:t>Key legislation</a:t>
+            </a:r>
+          </a:p>
+        </p:txBody>
+      </p:sp>
+      <p:sp>
+        <p:nvSpPr>
+          <p:cNvPr id="4" name="TextBox 3"/>
+          <p:cNvSpPr txBox="1"/>
+          <p:nvPr/>
+        </p:nvSpPr>
+        <p:spPr>
+          <a:xfrm>
+            <a:off x="548640" y="6446520"/>
+            <a:ext cx="8229600" cy="274320"/>
+          </a:xfrm>
+          <a:prstGeom prst="rect">
+            <a:avLst/>
+          </a:prstGeom>
+          <a:noFill/>
+        </p:spPr>
+        <p:txBody>
+          <a:bodyPr wrap="square" anchor="t" lIns="0" rIns="0" tIns="0" bIns="0"/>
+          <a:lstStyle/>
+          <a:p>
+            <a:pPr algn="l"/>
+            <a:r>
+              <a:rPr sz="1000" b="0" i="0">
+                <a:solidFill>
+                  <a:srgbClr val="54595D"/>
+                </a:solidFill>
+                <a:latin typeface="Calibri"/>
+              </a:rPr>
+              <a:t>Design and Development for Engineering and Manufacturing T Level  ·  Health and Safety Legislation and Responsibilities</a:t>
+            </a:r>
+          </a:p>
+        </p:txBody>
+      </p:sp>
+      <p:sp>
+        <p:nvSpPr>
+          <p:cNvPr id="5" name="TextBox 4"/>
+          <p:cNvSpPr txBox="1"/>
+          <p:nvPr/>
+        </p:nvSpPr>
+        <p:spPr>
+          <a:xfrm>
+            <a:off x="10728655" y="6446520"/>
+            <a:ext cx="914400" cy="274320"/>
+          </a:xfrm>
+          <a:prstGeom prst="rect">
+            <a:avLst/>
+          </a:prstGeom>
+          <a:noFill/>
+        </p:spPr>
+        <p:txBody>
+          <a:bodyPr wrap="square" anchor="t" lIns="0" rIns="0" tIns="0" bIns="0"/>
+          <a:lstStyle/>
+          <a:p>
+            <a:pPr algn="r"/>
+            <a:r>
+              <a:rPr sz="1000" b="0" i="0">
+                <a:solidFill>
+                  <a:srgbClr val="54595D"/>
+                </a:solidFill>
+                <a:latin typeface="Calibri"/>
+              </a:rPr>
+              <a:t>4</a:t>
             </a:r>
           </a:p>
         </p:txBody>
@@ -5180,641 +8063,6 @@
 </p:sld>
 </file>
 
-<file path=ppt/slides/slide4.xml><?xml version="1.0" encoding="utf-8"?>
-<p:sld xmlns:a="http://schemas.openxmlformats.org/drawingml/2006/main" xmlns:p="http://schemas.openxmlformats.org/presentationml/2006/main" xmlns:r="http://schemas.openxmlformats.org/officeDocument/2006/relationships">
-  <p:cSld>
-    <p:bg>
-      <p:bgPr>
-        <a:solidFill>
-          <a:srgbClr val="FFFFFF"/>
-        </a:solidFill>
-        <a:effectLst/>
-      </p:bgPr>
-    </p:bg>
-    <p:spTree>
-      <p:nvGrpSpPr>
-        <p:cNvPr id="1" name=""/>
-        <p:cNvGrpSpPr/>
-        <p:nvPr/>
-      </p:nvGrpSpPr>
-      <p:grpSpPr/>
-      <p:sp>
-        <p:nvSpPr>
-          <p:cNvPr id="2" name="TextBox 1"/>
-          <p:cNvSpPr txBox="1"/>
-          <p:nvPr/>
-        </p:nvSpPr>
-        <p:spPr>
-          <a:xfrm>
-            <a:off x="548640" y="320040"/>
-            <a:ext cx="11094415" cy="274320"/>
-          </a:xfrm>
-          <a:prstGeom prst="rect">
-            <a:avLst/>
-          </a:prstGeom>
-          <a:noFill/>
-        </p:spPr>
-        <p:txBody>
-          <a:bodyPr wrap="square" anchor="t" lIns="0" rIns="0" tIns="0" bIns="0"/>
-          <a:lstStyle/>
-          <a:p>
-            <a:pPr algn="l"/>
-            <a:r>
-              <a:rPr sz="1100" b="1" i="0">
-                <a:solidFill>
-                  <a:srgbClr val="54595D"/>
-                </a:solidFill>
-                <a:latin typeface="Calibri"/>
-              </a:rPr>
-              <a:t>ENGINEERING CORE  ·  Core topic 12</a:t>
-            </a:r>
-          </a:p>
-        </p:txBody>
-      </p:sp>
-      <p:sp>
-        <p:nvSpPr>
-          <p:cNvPr id="3" name="TextBox 2"/>
-          <p:cNvSpPr txBox="1"/>
-          <p:nvPr/>
-        </p:nvSpPr>
-        <p:spPr>
-          <a:xfrm>
-            <a:off x="548640" y="566928"/>
-            <a:ext cx="11094415" cy="822960"/>
-          </a:xfrm>
-          <a:prstGeom prst="rect">
-            <a:avLst/>
-          </a:prstGeom>
-          <a:noFill/>
-        </p:spPr>
-        <p:txBody>
-          <a:bodyPr wrap="square" anchor="ctr" lIns="0" rIns="0" tIns="0" bIns="0"/>
-          <a:lstStyle/>
-          <a:p>
-            <a:pPr algn="l"/>
-            <a:r>
-              <a:rPr sz="3200" b="1" i="0">
-                <a:solidFill>
-                  <a:srgbClr val="03306E"/>
-                </a:solidFill>
-                <a:latin typeface="Cambria"/>
-              </a:rPr>
-              <a:t>Responsibilities</a:t>
-            </a:r>
-          </a:p>
-        </p:txBody>
-      </p:sp>
-      <p:sp>
-        <p:nvSpPr>
-          <p:cNvPr id="4" name="TextBox 3"/>
-          <p:cNvSpPr txBox="1"/>
-          <p:nvPr/>
-        </p:nvSpPr>
-        <p:spPr>
-          <a:xfrm>
-            <a:off x="548640" y="6446520"/>
-            <a:ext cx="8229600" cy="274320"/>
-          </a:xfrm>
-          <a:prstGeom prst="rect">
-            <a:avLst/>
-          </a:prstGeom>
-          <a:noFill/>
-        </p:spPr>
-        <p:txBody>
-          <a:bodyPr wrap="square" anchor="t" lIns="0" rIns="0" tIns="0" bIns="0"/>
-          <a:lstStyle/>
-          <a:p>
-            <a:pPr algn="l"/>
-            <a:r>
-              <a:rPr sz="1000" b="0" i="0">
-                <a:solidFill>
-                  <a:srgbClr val="54595D"/>
-                </a:solidFill>
-                <a:latin typeface="Calibri"/>
-              </a:rPr>
-              <a:t>Design and Development for Engineering and Manufacturing T Level  ·  Health and Safety Legislation and Responsibilities</a:t>
-            </a:r>
-          </a:p>
-        </p:txBody>
-      </p:sp>
-      <p:sp>
-        <p:nvSpPr>
-          <p:cNvPr id="5" name="TextBox 4"/>
-          <p:cNvSpPr txBox="1"/>
-          <p:nvPr/>
-        </p:nvSpPr>
-        <p:spPr>
-          <a:xfrm>
-            <a:off x="10728655" y="6446520"/>
-            <a:ext cx="914400" cy="274320"/>
-          </a:xfrm>
-          <a:prstGeom prst="rect">
-            <a:avLst/>
-          </a:prstGeom>
-          <a:noFill/>
-        </p:spPr>
-        <p:txBody>
-          <a:bodyPr wrap="square" anchor="t" lIns="0" rIns="0" tIns="0" bIns="0"/>
-          <a:lstStyle/>
-          <a:p>
-            <a:pPr algn="r"/>
-            <a:r>
-              <a:rPr sz="1000" b="0" i="0">
-                <a:solidFill>
-                  <a:srgbClr val="54595D"/>
-                </a:solidFill>
-                <a:latin typeface="Calibri"/>
-              </a:rPr>
-              <a:t>4</a:t>
-            </a:r>
-          </a:p>
-        </p:txBody>
-      </p:sp>
-      <p:sp>
-        <p:nvSpPr>
-          <p:cNvPr id="6" name="Rounded Rectangle 5"/>
-          <p:cNvSpPr/>
-          <p:nvPr/>
-        </p:nvSpPr>
-        <p:spPr>
-          <a:xfrm>
-            <a:off x="548640" y="1600200"/>
-            <a:ext cx="5364327" cy="640080"/>
-          </a:xfrm>
-          <a:prstGeom prst="roundRect">
-            <a:avLst>
-              <a:gd name="adj" fmla="val 15000"/>
-            </a:avLst>
-          </a:prstGeom>
-          <a:solidFill>
-            <a:srgbClr val="03306E"/>
-          </a:solidFill>
-          <a:ln>
-            <a:noFill/>
-          </a:ln>
-          <a:effectLst/>
-        </p:spPr>
-        <p:style>
-          <a:lnRef idx="1">
-            <a:schemeClr val="accent1"/>
-          </a:lnRef>
-          <a:fillRef idx="3">
-            <a:schemeClr val="accent1"/>
-          </a:fillRef>
-          <a:effectRef idx="2">
-            <a:schemeClr val="accent1"/>
-          </a:effectRef>
-          <a:fontRef idx="minor">
-            <a:schemeClr val="lt1"/>
-          </a:fontRef>
-        </p:style>
-        <p:txBody>
-          <a:bodyPr rtlCol="0" anchor="ctr"/>
-          <a:lstStyle/>
-          <a:p/>
-        </p:txBody>
-      </p:sp>
-      <p:sp>
-        <p:nvSpPr>
-          <p:cNvPr id="7" name="TextBox 6"/>
-          <p:cNvSpPr txBox="1"/>
-          <p:nvPr/>
-        </p:nvSpPr>
-        <p:spPr>
-          <a:xfrm>
-            <a:off x="777240" y="1600200"/>
-            <a:ext cx="4907127" cy="640080"/>
-          </a:xfrm>
-          <a:prstGeom prst="rect">
-            <a:avLst/>
-          </a:prstGeom>
-          <a:noFill/>
-        </p:spPr>
-        <p:txBody>
-          <a:bodyPr wrap="square" anchor="ctr" lIns="0" rIns="0" tIns="0" bIns="0"/>
-          <a:lstStyle/>
-          <a:p>
-            <a:pPr algn="l"/>
-            <a:r>
-              <a:rPr sz="2000" b="1" i="0">
-                <a:solidFill>
-                  <a:srgbClr val="FFFFFF"/>
-                </a:solidFill>
-                <a:latin typeface="Calibri"/>
-              </a:rPr>
-              <a:t>Employees</a:t>
-            </a:r>
-          </a:p>
-        </p:txBody>
-      </p:sp>
-      <p:sp>
-        <p:nvSpPr>
-          <p:cNvPr id="8" name="Rounded Rectangle 7"/>
-          <p:cNvSpPr/>
-          <p:nvPr/>
-        </p:nvSpPr>
-        <p:spPr>
-          <a:xfrm>
-            <a:off x="548640" y="2377440"/>
-            <a:ext cx="5364327" cy="3794760"/>
-          </a:xfrm>
-          <a:prstGeom prst="roundRect">
-            <a:avLst>
-              <a:gd name="adj" fmla="val 4000"/>
-            </a:avLst>
-          </a:prstGeom>
-          <a:solidFill>
-            <a:srgbClr val="EAF3FF"/>
-          </a:solidFill>
-          <a:ln>
-            <a:noFill/>
-          </a:ln>
-          <a:effectLst/>
-        </p:spPr>
-        <p:style>
-          <a:lnRef idx="1">
-            <a:schemeClr val="accent1"/>
-          </a:lnRef>
-          <a:fillRef idx="3">
-            <a:schemeClr val="accent1"/>
-          </a:fillRef>
-          <a:effectRef idx="2">
-            <a:schemeClr val="accent1"/>
-          </a:effectRef>
-          <a:fontRef idx="minor">
-            <a:schemeClr val="lt1"/>
-          </a:fontRef>
-        </p:style>
-        <p:txBody>
-          <a:bodyPr rtlCol="0" anchor="ctr"/>
-          <a:lstStyle/>
-          <a:p/>
-        </p:txBody>
-      </p:sp>
-      <p:sp>
-        <p:nvSpPr>
-          <p:cNvPr id="9" name="TextBox 8"/>
-          <p:cNvSpPr txBox="1"/>
-          <p:nvPr/>
-        </p:nvSpPr>
-        <p:spPr>
-          <a:xfrm>
-            <a:off x="822959" y="2606040"/>
-            <a:ext cx="4815687" cy="3337560"/>
-          </a:xfrm>
-          <a:prstGeom prst="rect">
-            <a:avLst/>
-          </a:prstGeom>
-          <a:noFill/>
-        </p:spPr>
-        <p:txBody>
-          <a:bodyPr wrap="square" lIns="0" rIns="0" tIns="0" bIns="0">
-            <a:spAutoFit/>
-          </a:bodyPr>
-          <a:lstStyle/>
-          <a:p>
-            <a:pPr marL="274320" indent="-274320">
-              <a:spcAft>
-                <a:spcPts val="990"/>
-              </a:spcAft>
-              <a:buClr>
-                <a:srgbClr val="0645AD"/>
-              </a:buClr>
-              <a:buFont typeface="Arial"/>
-              <a:buChar char="•"/>
-            </a:pPr>
-            <a:r>
-              <a:rPr sz="2200" b="0">
-                <a:solidFill>
-                  <a:srgbClr val="202122"/>
-                </a:solidFill>
-                <a:latin typeface="Calibri"/>
-              </a:rPr>
-              <a:t>Work safely</a:t>
-            </a:r>
-          </a:p>
-          <a:p>
-            <a:pPr marL="274320" indent="-274320">
-              <a:spcAft>
-                <a:spcPts val="990"/>
-              </a:spcAft>
-              <a:buClr>
-                <a:srgbClr val="0645AD"/>
-              </a:buClr>
-              <a:buFont typeface="Arial"/>
-              <a:buChar char="•"/>
-            </a:pPr>
-            <a:r>
-              <a:rPr sz="2200" b="0">
-                <a:solidFill>
-                  <a:srgbClr val="202122"/>
-                </a:solidFill>
-                <a:latin typeface="Calibri"/>
-              </a:rPr>
-              <a:t>Don't attempt untrained or unauthorised tasks</a:t>
-            </a:r>
-          </a:p>
-          <a:p>
-            <a:pPr marL="274320" indent="-274320">
-              <a:spcAft>
-                <a:spcPts val="990"/>
-              </a:spcAft>
-              <a:buClr>
-                <a:srgbClr val="0645AD"/>
-              </a:buClr>
-              <a:buFont typeface="Arial"/>
-              <a:buChar char="•"/>
-            </a:pPr>
-            <a:r>
-              <a:rPr sz="2200" b="0">
-                <a:solidFill>
-                  <a:srgbClr val="202122"/>
-                </a:solidFill>
-                <a:latin typeface="Calibri"/>
-              </a:rPr>
-              <a:t>Co-operate with the employer</a:t>
-            </a:r>
-          </a:p>
-          <a:p>
-            <a:pPr marL="274320" indent="-274320">
-              <a:spcAft>
-                <a:spcPts val="990"/>
-              </a:spcAft>
-              <a:buClr>
-                <a:srgbClr val="0645AD"/>
-              </a:buClr>
-              <a:buFont typeface="Arial"/>
-              <a:buChar char="•"/>
-            </a:pPr>
-            <a:r>
-              <a:rPr sz="2200" b="0">
-                <a:solidFill>
-                  <a:srgbClr val="202122"/>
-                </a:solidFill>
-                <a:latin typeface="Calibri"/>
-              </a:rPr>
-              <a:t>Don't misuse or interfere with safety provisions</a:t>
-            </a:r>
-          </a:p>
-        </p:txBody>
-      </p:sp>
-      <p:sp>
-        <p:nvSpPr>
-          <p:cNvPr id="10" name="Rounded Rectangle 9"/>
-          <p:cNvSpPr/>
-          <p:nvPr/>
-        </p:nvSpPr>
-        <p:spPr>
-          <a:xfrm>
-            <a:off x="6278727" y="1600200"/>
-            <a:ext cx="5364327" cy="640080"/>
-          </a:xfrm>
-          <a:prstGeom prst="roundRect">
-            <a:avLst>
-              <a:gd name="adj" fmla="val 15000"/>
-            </a:avLst>
-          </a:prstGeom>
-          <a:solidFill>
-            <a:srgbClr val="0645AD"/>
-          </a:solidFill>
-          <a:ln>
-            <a:noFill/>
-          </a:ln>
-          <a:effectLst/>
-        </p:spPr>
-        <p:style>
-          <a:lnRef idx="1">
-            <a:schemeClr val="accent1"/>
-          </a:lnRef>
-          <a:fillRef idx="3">
-            <a:schemeClr val="accent1"/>
-          </a:fillRef>
-          <a:effectRef idx="2">
-            <a:schemeClr val="accent1"/>
-          </a:effectRef>
-          <a:fontRef idx="minor">
-            <a:schemeClr val="lt1"/>
-          </a:fontRef>
-        </p:style>
-        <p:txBody>
-          <a:bodyPr rtlCol="0" anchor="ctr"/>
-          <a:lstStyle/>
-          <a:p/>
-        </p:txBody>
-      </p:sp>
-      <p:sp>
-        <p:nvSpPr>
-          <p:cNvPr id="11" name="TextBox 10"/>
-          <p:cNvSpPr txBox="1"/>
-          <p:nvPr/>
-        </p:nvSpPr>
-        <p:spPr>
-          <a:xfrm>
-            <a:off x="6507327" y="1600200"/>
-            <a:ext cx="4907127" cy="640080"/>
-          </a:xfrm>
-          <a:prstGeom prst="rect">
-            <a:avLst/>
-          </a:prstGeom>
-          <a:noFill/>
-        </p:spPr>
-        <p:txBody>
-          <a:bodyPr wrap="square" anchor="ctr" lIns="0" rIns="0" tIns="0" bIns="0"/>
-          <a:lstStyle/>
-          <a:p>
-            <a:pPr algn="l"/>
-            <a:r>
-              <a:rPr sz="2000" b="1" i="0">
-                <a:solidFill>
-                  <a:srgbClr val="FFFFFF"/>
-                </a:solidFill>
-                <a:latin typeface="Calibri"/>
-              </a:rPr>
-              <a:t>Employers</a:t>
-            </a:r>
-          </a:p>
-        </p:txBody>
-      </p:sp>
-      <p:sp>
-        <p:nvSpPr>
-          <p:cNvPr id="12" name="Rounded Rectangle 11"/>
-          <p:cNvSpPr/>
-          <p:nvPr/>
-        </p:nvSpPr>
-        <p:spPr>
-          <a:xfrm>
-            <a:off x="6278727" y="2377440"/>
-            <a:ext cx="5364327" cy="3794760"/>
-          </a:xfrm>
-          <a:prstGeom prst="roundRect">
-            <a:avLst>
-              <a:gd name="adj" fmla="val 4000"/>
-            </a:avLst>
-          </a:prstGeom>
-          <a:solidFill>
-            <a:srgbClr val="EAF3FF"/>
-          </a:solidFill>
-          <a:ln>
-            <a:noFill/>
-          </a:ln>
-          <a:effectLst/>
-        </p:spPr>
-        <p:style>
-          <a:lnRef idx="1">
-            <a:schemeClr val="accent1"/>
-          </a:lnRef>
-          <a:fillRef idx="3">
-            <a:schemeClr val="accent1"/>
-          </a:fillRef>
-          <a:effectRef idx="2">
-            <a:schemeClr val="accent1"/>
-          </a:effectRef>
-          <a:fontRef idx="minor">
-            <a:schemeClr val="lt1"/>
-          </a:fontRef>
-        </p:style>
-        <p:txBody>
-          <a:bodyPr rtlCol="0" anchor="ctr"/>
-          <a:lstStyle/>
-          <a:p/>
-        </p:txBody>
-      </p:sp>
-      <p:sp>
-        <p:nvSpPr>
-          <p:cNvPr id="13" name="TextBox 12"/>
-          <p:cNvSpPr txBox="1"/>
-          <p:nvPr/>
-        </p:nvSpPr>
-        <p:spPr>
-          <a:xfrm>
-            <a:off x="6553047" y="2606040"/>
-            <a:ext cx="4815687" cy="3337560"/>
-          </a:xfrm>
-          <a:prstGeom prst="rect">
-            <a:avLst/>
-          </a:prstGeom>
-          <a:noFill/>
-        </p:spPr>
-        <p:txBody>
-          <a:bodyPr wrap="square" lIns="0" rIns="0" tIns="0" bIns="0">
-            <a:spAutoFit/>
-          </a:bodyPr>
-          <a:lstStyle/>
-          <a:p>
-            <a:pPr marL="274320" indent="-274320">
-              <a:spcAft>
-                <a:spcPts val="855"/>
-              </a:spcAft>
-              <a:buClr>
-                <a:srgbClr val="0645AD"/>
-              </a:buClr>
-              <a:buFont typeface="Arial"/>
-              <a:buChar char="•"/>
-            </a:pPr>
-            <a:r>
-              <a:rPr sz="1900" b="0">
-                <a:solidFill>
-                  <a:srgbClr val="202122"/>
-                </a:solidFill>
-                <a:latin typeface="Calibri"/>
-              </a:rPr>
-              <a:t>Minimise handling, storage and transport risks</a:t>
-            </a:r>
-          </a:p>
-          <a:p>
-            <a:pPr marL="274320" indent="-274320">
-              <a:spcAft>
-                <a:spcPts val="855"/>
-              </a:spcAft>
-              <a:buClr>
-                <a:srgbClr val="0645AD"/>
-              </a:buClr>
-              <a:buFont typeface="Arial"/>
-              <a:buChar char="•"/>
-            </a:pPr>
-            <a:r>
-              <a:rPr sz="1900" b="0">
-                <a:solidFill>
-                  <a:srgbClr val="202122"/>
-                </a:solidFill>
-                <a:latin typeface="Calibri"/>
-              </a:rPr>
-              <a:t>Provide instruction, training and supervision</a:t>
-            </a:r>
-          </a:p>
-          <a:p>
-            <a:pPr marL="274320" indent="-274320">
-              <a:spcAft>
-                <a:spcPts val="855"/>
-              </a:spcAft>
-              <a:buClr>
-                <a:srgbClr val="0645AD"/>
-              </a:buClr>
-              <a:buFont typeface="Arial"/>
-              <a:buChar char="•"/>
-            </a:pPr>
-            <a:r>
-              <a:rPr sz="1900" b="0">
-                <a:solidFill>
-                  <a:srgbClr val="202122"/>
-                </a:solidFill>
-                <a:latin typeface="Calibri"/>
-              </a:rPr>
-              <a:t>Maintain a safe workplace</a:t>
-            </a:r>
-          </a:p>
-          <a:p>
-            <a:pPr marL="274320" indent="-274320">
-              <a:spcAft>
-                <a:spcPts val="855"/>
-              </a:spcAft>
-              <a:buClr>
-                <a:srgbClr val="0645AD"/>
-              </a:buClr>
-              <a:buFont typeface="Arial"/>
-              <a:buChar char="•"/>
-            </a:pPr>
-            <a:r>
-              <a:rPr sz="1900" b="0">
-                <a:solidFill>
-                  <a:srgbClr val="202122"/>
-                </a:solidFill>
-                <a:latin typeface="Calibri"/>
-              </a:rPr>
-              <a:t>Publish a health and safety policy</a:t>
-            </a:r>
-          </a:p>
-          <a:p>
-            <a:pPr marL="274320" indent="-274320">
-              <a:spcAft>
-                <a:spcPts val="855"/>
-              </a:spcAft>
-              <a:buClr>
-                <a:srgbClr val="0645AD"/>
-              </a:buClr>
-              <a:buFont typeface="Arial"/>
-              <a:buChar char="•"/>
-            </a:pPr>
-            <a:r>
-              <a:rPr sz="1900" b="0">
-                <a:solidFill>
-                  <a:srgbClr val="202122"/>
-                </a:solidFill>
-                <a:latin typeface="Calibri"/>
-              </a:rPr>
-              <a:t>Protect visitors, contractors and the public</a:t>
-            </a:r>
-          </a:p>
-        </p:txBody>
-      </p:sp>
-    </p:spTree>
-  </p:cSld>
-  <p:clrMapOvr>
-    <a:masterClrMapping/>
-  </p:clrMapOvr>
-</p:sld>
-</file>
-
 <file path=ppt/slides/slide5.xml><?xml version="1.0" encoding="utf-8"?>
 <p:sld xmlns:a="http://schemas.openxmlformats.org/drawingml/2006/main" xmlns:p="http://schemas.openxmlformats.org/presentationml/2006/main" xmlns:r="http://schemas.openxmlformats.org/officeDocument/2006/relationships">
   <p:cSld>
@@ -5894,7 +8142,7 @@
                 </a:solidFill>
                 <a:latin typeface="Cambria"/>
               </a:rPr>
-              <a:t>Why it matters</a:t>
+              <a:t>Quick check: Key legislation</a:t>
             </a:r>
           </a:p>
         </p:txBody>
@@ -5967,58 +8215,14 @@
       </p:sp>
       <p:sp>
         <p:nvSpPr>
-          <p:cNvPr id="6" name="Rounded Rectangle 5"/>
+          <p:cNvPr id="6" name="Oval 5"/>
           <p:cNvSpPr/>
           <p:nvPr/>
         </p:nvSpPr>
         <p:spPr>
           <a:xfrm>
-            <a:off x="548640" y="1600200"/>
-            <a:ext cx="5410047" cy="2148840"/>
-          </a:xfrm>
-          <a:prstGeom prst="roundRect">
-            <a:avLst>
-              <a:gd name="adj" fmla="val 6000"/>
-            </a:avLst>
-          </a:prstGeom>
-          <a:solidFill>
-            <a:srgbClr val="EAF3FF"/>
-          </a:solidFill>
-          <a:ln>
-            <a:noFill/>
-          </a:ln>
-          <a:effectLst/>
-        </p:spPr>
-        <p:style>
-          <a:lnRef idx="1">
-            <a:schemeClr val="accent1"/>
-          </a:lnRef>
-          <a:fillRef idx="3">
-            <a:schemeClr val="accent1"/>
-          </a:fillRef>
-          <a:effectRef idx="2">
-            <a:schemeClr val="accent1"/>
-          </a:effectRef>
-          <a:fontRef idx="minor">
-            <a:schemeClr val="lt1"/>
-          </a:fontRef>
-        </p:style>
-        <p:txBody>
-          <a:bodyPr rtlCol="0" anchor="ctr"/>
-          <a:lstStyle/>
-          <a:p/>
-        </p:txBody>
-      </p:sp>
-      <p:sp>
-        <p:nvSpPr>
-          <p:cNvPr id="7" name="Oval 6"/>
-          <p:cNvSpPr/>
-          <p:nvPr/>
-        </p:nvSpPr>
-        <p:spPr>
-          <a:xfrm>
-            <a:off x="777240" y="1828800"/>
-            <a:ext cx="457200" cy="457200"/>
+            <a:off x="548640" y="1691640"/>
+            <a:ext cx="502920" cy="502920"/>
           </a:xfrm>
           <a:prstGeom prst="ellipse">
             <a:avLst/>
@@ -6051,7 +8255,7 @@
           <a:p>
             <a:pPr algn="ctr"/>
             <a:r>
-              <a:rPr sz="1500" b="1">
+              <a:rPr sz="1600" b="1">
                 <a:solidFill>
                   <a:srgbClr val="202122"/>
                 </a:solidFill>
@@ -6064,14 +8268,14 @@
       </p:sp>
       <p:sp>
         <p:nvSpPr>
-          <p:cNvPr id="8" name="TextBox 7"/>
+          <p:cNvPr id="7" name="TextBox 6"/>
           <p:cNvSpPr txBox="1"/>
           <p:nvPr/>
         </p:nvSpPr>
         <p:spPr>
           <a:xfrm>
-            <a:off x="1371600" y="1801368"/>
-            <a:ext cx="4404207" cy="512064"/>
+            <a:off x="1371600" y="1645920"/>
+            <a:ext cx="10271455" cy="1188720"/>
           </a:xfrm>
           <a:prstGeom prst="rect">
             <a:avLst/>
@@ -6079,109 +8283,32 @@
           <a:noFill/>
         </p:spPr>
         <p:txBody>
-          <a:bodyPr wrap="square" anchor="ctr" lIns="0" rIns="0" tIns="0" bIns="0"/>
+          <a:bodyPr wrap="square" anchor="t" lIns="0" rIns="0" tIns="0" bIns="0"/>
           <a:lstStyle/>
           <a:p>
             <a:pPr algn="l"/>
             <a:r>
-              <a:rPr sz="1900" b="1" i="0">
-                <a:solidFill>
-                  <a:srgbClr val="03306E"/>
-                </a:solidFill>
-                <a:latin typeface="Calibri"/>
-              </a:rPr>
-              <a:t>Fewer accidents</a:t>
-            </a:r>
-          </a:p>
-        </p:txBody>
-      </p:sp>
-      <p:sp>
-        <p:nvSpPr>
-          <p:cNvPr id="9" name="TextBox 8"/>
-          <p:cNvSpPr txBox="1"/>
-          <p:nvPr/>
-        </p:nvSpPr>
-        <p:spPr>
-          <a:xfrm>
-            <a:off x="777240" y="2468880"/>
-            <a:ext cx="4952847" cy="1143000"/>
-          </a:xfrm>
-          <a:prstGeom prst="rect">
-            <a:avLst/>
-          </a:prstGeom>
-          <a:noFill/>
-        </p:spPr>
-        <p:txBody>
-          <a:bodyPr wrap="square" anchor="t" lIns="0" rIns="0" tIns="0" bIns="0"/>
-          <a:lstStyle/>
-          <a:p>
-            <a:pPr algn="l"/>
-            <a:r>
-              <a:rPr sz="2000" b="0" i="0">
+              <a:rPr sz="2400" b="0" i="0">
                 <a:solidFill>
                   <a:srgbClr val="202122"/>
                 </a:solidFill>
                 <a:latin typeface="Calibri"/>
               </a:rPr>
-              <a:t>Legislation has reduced accident and incident rates.</a:t>
-            </a:r>
-          </a:p>
-        </p:txBody>
-      </p:sp>
-      <p:sp>
-        <p:nvSpPr>
-          <p:cNvPr id="10" name="Rounded Rectangle 9"/>
+              <a:t>Which regulations cover lifting equipment?</a:t>
+            </a:r>
+          </a:p>
+        </p:txBody>
+      </p:sp>
+      <p:sp>
+        <p:nvSpPr>
+          <p:cNvPr id="8" name="Oval 7"/>
           <p:cNvSpPr/>
           <p:nvPr/>
         </p:nvSpPr>
         <p:spPr>
           <a:xfrm>
-            <a:off x="6233007" y="1600200"/>
-            <a:ext cx="5410047" cy="2148840"/>
-          </a:xfrm>
-          <a:prstGeom prst="roundRect">
-            <a:avLst>
-              <a:gd name="adj" fmla="val 6000"/>
-            </a:avLst>
-          </a:prstGeom>
-          <a:solidFill>
-            <a:srgbClr val="EAF3FF"/>
-          </a:solidFill>
-          <a:ln>
-            <a:noFill/>
-          </a:ln>
-          <a:effectLst/>
-        </p:spPr>
-        <p:style>
-          <a:lnRef idx="1">
-            <a:schemeClr val="accent1"/>
-          </a:lnRef>
-          <a:fillRef idx="3">
-            <a:schemeClr val="accent1"/>
-          </a:fillRef>
-          <a:effectRef idx="2">
-            <a:schemeClr val="accent1"/>
-          </a:effectRef>
-          <a:fontRef idx="minor">
-            <a:schemeClr val="lt1"/>
-          </a:fontRef>
-        </p:style>
-        <p:txBody>
-          <a:bodyPr rtlCol="0" anchor="ctr"/>
-          <a:lstStyle/>
-          <a:p/>
-        </p:txBody>
-      </p:sp>
-      <p:sp>
-        <p:nvSpPr>
-          <p:cNvPr id="11" name="Oval 10"/>
-          <p:cNvSpPr/>
-          <p:nvPr/>
-        </p:nvSpPr>
-        <p:spPr>
-          <a:xfrm>
-            <a:off x="6461607" y="1828800"/>
-            <a:ext cx="457200" cy="457200"/>
+            <a:off x="548640" y="3108960"/>
+            <a:ext cx="502920" cy="502920"/>
           </a:xfrm>
           <a:prstGeom prst="ellipse">
             <a:avLst/>
@@ -6214,7 +8341,7 @@
           <a:p>
             <a:pPr algn="ctr"/>
             <a:r>
-              <a:rPr sz="1500" b="1">
+              <a:rPr sz="1600" b="1">
                 <a:solidFill>
                   <a:srgbClr val="202122"/>
                 </a:solidFill>
@@ -6227,14 +8354,14 @@
       </p:sp>
       <p:sp>
         <p:nvSpPr>
-          <p:cNvPr id="12" name="TextBox 11"/>
+          <p:cNvPr id="9" name="TextBox 8"/>
           <p:cNvSpPr txBox="1"/>
           <p:nvPr/>
         </p:nvSpPr>
         <p:spPr>
           <a:xfrm>
-            <a:off x="7055967" y="1801368"/>
-            <a:ext cx="4404207" cy="512064"/>
+            <a:off x="1371600" y="3063240"/>
+            <a:ext cx="10271455" cy="1188720"/>
           </a:xfrm>
           <a:prstGeom prst="rect">
             <a:avLst/>
@@ -6242,109 +8369,32 @@
           <a:noFill/>
         </p:spPr>
         <p:txBody>
-          <a:bodyPr wrap="square" anchor="ctr" lIns="0" rIns="0" tIns="0" bIns="0"/>
+          <a:bodyPr wrap="square" anchor="t" lIns="0" rIns="0" tIns="0" bIns="0"/>
           <a:lstStyle/>
           <a:p>
             <a:pPr algn="l"/>
             <a:r>
-              <a:rPr sz="1900" b="1" i="0">
-                <a:solidFill>
-                  <a:srgbClr val="03306E"/>
-                </a:solidFill>
-                <a:latin typeface="Calibri"/>
-              </a:rPr>
-              <a:t>Wellbeing</a:t>
-            </a:r>
-          </a:p>
-        </p:txBody>
-      </p:sp>
-      <p:sp>
-        <p:nvSpPr>
-          <p:cNvPr id="13" name="TextBox 12"/>
-          <p:cNvSpPr txBox="1"/>
-          <p:nvPr/>
-        </p:nvSpPr>
-        <p:spPr>
-          <a:xfrm>
-            <a:off x="6461607" y="2468880"/>
-            <a:ext cx="4952847" cy="1143000"/>
-          </a:xfrm>
-          <a:prstGeom prst="rect">
-            <a:avLst/>
-          </a:prstGeom>
-          <a:noFill/>
-        </p:spPr>
-        <p:txBody>
-          <a:bodyPr wrap="square" anchor="t" lIns="0" rIns="0" tIns="0" bIns="0"/>
-          <a:lstStyle/>
-          <a:p>
-            <a:pPr algn="l"/>
-            <a:r>
-              <a:rPr sz="2000" b="0" i="0">
+              <a:rPr sz="2400" b="0" i="0">
                 <a:solidFill>
                   <a:srgbClr val="202122"/>
                 </a:solidFill>
                 <a:latin typeface="Calibri"/>
               </a:rPr>
-              <a:t>Mental health and wellbeing matter as much as physical safety.</a:t>
-            </a:r>
-          </a:p>
-        </p:txBody>
-      </p:sp>
-      <p:sp>
-        <p:nvSpPr>
-          <p:cNvPr id="14" name="Rounded Rectangle 13"/>
+              <a:t>What does COSHH control?</a:t>
+            </a:r>
+          </a:p>
+        </p:txBody>
+      </p:sp>
+      <p:sp>
+        <p:nvSpPr>
+          <p:cNvPr id="10" name="Oval 9"/>
           <p:cNvSpPr/>
           <p:nvPr/>
         </p:nvSpPr>
         <p:spPr>
           <a:xfrm>
-            <a:off x="548640" y="4023360"/>
-            <a:ext cx="5410047" cy="2148840"/>
-          </a:xfrm>
-          <a:prstGeom prst="roundRect">
-            <a:avLst>
-              <a:gd name="adj" fmla="val 6000"/>
-            </a:avLst>
-          </a:prstGeom>
-          <a:solidFill>
-            <a:srgbClr val="EAF3FF"/>
-          </a:solidFill>
-          <a:ln>
-            <a:noFill/>
-          </a:ln>
-          <a:effectLst/>
-        </p:spPr>
-        <p:style>
-          <a:lnRef idx="1">
-            <a:schemeClr val="accent1"/>
-          </a:lnRef>
-          <a:fillRef idx="3">
-            <a:schemeClr val="accent1"/>
-          </a:fillRef>
-          <a:effectRef idx="2">
-            <a:schemeClr val="accent1"/>
-          </a:effectRef>
-          <a:fontRef idx="minor">
-            <a:schemeClr val="lt1"/>
-          </a:fontRef>
-        </p:style>
-        <p:txBody>
-          <a:bodyPr rtlCol="0" anchor="ctr"/>
-          <a:lstStyle/>
-          <a:p/>
-        </p:txBody>
-      </p:sp>
-      <p:sp>
-        <p:nvSpPr>
-          <p:cNvPr id="15" name="Oval 14"/>
-          <p:cNvSpPr/>
-          <p:nvPr/>
-        </p:nvSpPr>
-        <p:spPr>
-          <a:xfrm>
-            <a:off x="777240" y="4251960"/>
-            <a:ext cx="457200" cy="457200"/>
+            <a:off x="548640" y="4526280"/>
+            <a:ext cx="502920" cy="502920"/>
           </a:xfrm>
           <a:prstGeom prst="ellipse">
             <a:avLst/>
@@ -6377,7 +8427,7 @@
           <a:p>
             <a:pPr algn="ctr"/>
             <a:r>
-              <a:rPr sz="1500" b="1">
+              <a:rPr sz="1600" b="1">
                 <a:solidFill>
                   <a:srgbClr val="202122"/>
                 </a:solidFill>
@@ -6390,14 +8440,14 @@
       </p:sp>
       <p:sp>
         <p:nvSpPr>
-          <p:cNvPr id="16" name="TextBox 15"/>
+          <p:cNvPr id="11" name="TextBox 10"/>
           <p:cNvSpPr txBox="1"/>
           <p:nvPr/>
         </p:nvSpPr>
         <p:spPr>
           <a:xfrm>
-            <a:off x="1371600" y="4224528"/>
-            <a:ext cx="4404207" cy="512064"/>
+            <a:off x="1371600" y="4480560"/>
+            <a:ext cx="10271455" cy="1188720"/>
           </a:xfrm>
           <a:prstGeom prst="rect">
             <a:avLst/>
@@ -6405,32 +8455,32 @@
           <a:noFill/>
         </p:spPr>
         <p:txBody>
-          <a:bodyPr wrap="square" anchor="ctr" lIns="0" rIns="0" tIns="0" bIns="0"/>
+          <a:bodyPr wrap="square" anchor="t" lIns="0" rIns="0" tIns="0" bIns="0"/>
           <a:lstStyle/>
           <a:p>
             <a:pPr algn="l"/>
             <a:r>
-              <a:rPr sz="1900" b="1" i="0">
-                <a:solidFill>
-                  <a:srgbClr val="03306E"/>
-                </a:solidFill>
-                <a:latin typeface="Calibri"/>
-              </a:rPr>
-              <a:t>Enforcement</a:t>
-            </a:r>
-          </a:p>
-        </p:txBody>
-      </p:sp>
-      <p:sp>
-        <p:nvSpPr>
-          <p:cNvPr id="17" name="TextBox 16"/>
+              <a:rPr sz="2400" b="0" i="0">
+                <a:solidFill>
+                  <a:srgbClr val="202122"/>
+                </a:solidFill>
+                <a:latin typeface="Calibri"/>
+              </a:rPr>
+              <a:t>What does RIDDOR require?</a:t>
+            </a:r>
+          </a:p>
+        </p:txBody>
+      </p:sp>
+      <p:sp>
+        <p:nvSpPr>
+          <p:cNvPr id="12" name="TextBox 11"/>
           <p:cNvSpPr txBox="1"/>
           <p:nvPr/>
         </p:nvSpPr>
         <p:spPr>
           <a:xfrm>
-            <a:off x="777240" y="4892040"/>
-            <a:ext cx="4952847" cy="1143000"/>
+            <a:off x="548640" y="5852160"/>
+            <a:ext cx="11094415" cy="365760"/>
           </a:xfrm>
           <a:prstGeom prst="rect">
             <a:avLst/>
@@ -6443,176 +8493,13 @@
           <a:p>
             <a:pPr algn="l"/>
             <a:r>
-              <a:rPr sz="2000" b="0" i="0">
-                <a:solidFill>
-                  <a:srgbClr val="202122"/>
-                </a:solidFill>
-                <a:latin typeface="Calibri"/>
-              </a:rPr>
-              <a:t>The HSE enforces the law.</a:t>
-            </a:r>
-          </a:p>
-        </p:txBody>
-      </p:sp>
-      <p:sp>
-        <p:nvSpPr>
-          <p:cNvPr id="18" name="Rounded Rectangle 17"/>
-          <p:cNvSpPr/>
-          <p:nvPr/>
-        </p:nvSpPr>
-        <p:spPr>
-          <a:xfrm>
-            <a:off x="6233007" y="4023360"/>
-            <a:ext cx="5410047" cy="2148840"/>
-          </a:xfrm>
-          <a:prstGeom prst="roundRect">
-            <a:avLst>
-              <a:gd name="adj" fmla="val 6000"/>
-            </a:avLst>
-          </a:prstGeom>
-          <a:solidFill>
-            <a:srgbClr val="EAF3FF"/>
-          </a:solidFill>
-          <a:ln>
-            <a:noFill/>
-          </a:ln>
-          <a:effectLst/>
-        </p:spPr>
-        <p:style>
-          <a:lnRef idx="1">
-            <a:schemeClr val="accent1"/>
-          </a:lnRef>
-          <a:fillRef idx="3">
-            <a:schemeClr val="accent1"/>
-          </a:fillRef>
-          <a:effectRef idx="2">
-            <a:schemeClr val="accent1"/>
-          </a:effectRef>
-          <a:fontRef idx="minor">
-            <a:schemeClr val="lt1"/>
-          </a:fontRef>
-        </p:style>
-        <p:txBody>
-          <a:bodyPr rtlCol="0" anchor="ctr"/>
-          <a:lstStyle/>
-          <a:p/>
-        </p:txBody>
-      </p:sp>
-      <p:sp>
-        <p:nvSpPr>
-          <p:cNvPr id="19" name="Oval 18"/>
-          <p:cNvSpPr/>
-          <p:nvPr/>
-        </p:nvSpPr>
-        <p:spPr>
-          <a:xfrm>
-            <a:off x="6461607" y="4251960"/>
-            <a:ext cx="457200" cy="457200"/>
-          </a:xfrm>
-          <a:prstGeom prst="ellipse">
-            <a:avLst/>
-          </a:prstGeom>
-          <a:solidFill>
-            <a:srgbClr val="F2B705"/>
-          </a:solidFill>
-          <a:ln>
-            <a:noFill/>
-          </a:ln>
-          <a:effectLst/>
-        </p:spPr>
-        <p:style>
-          <a:lnRef idx="1">
-            <a:schemeClr val="accent1"/>
-          </a:lnRef>
-          <a:fillRef idx="3">
-            <a:schemeClr val="accent1"/>
-          </a:fillRef>
-          <a:effectRef idx="2">
-            <a:schemeClr val="accent1"/>
-          </a:effectRef>
-          <a:fontRef idx="minor">
-            <a:schemeClr val="lt1"/>
-          </a:fontRef>
-        </p:style>
-        <p:txBody>
-          <a:bodyPr rtlCol="0" anchor="ctr" lIns="0" rIns="0" tIns="0" bIns="0"/>
-          <a:lstStyle/>
-          <a:p>
-            <a:pPr algn="ctr"/>
-            <a:r>
-              <a:rPr sz="1500" b="1">
-                <a:solidFill>
-                  <a:srgbClr val="202122"/>
-                </a:solidFill>
-                <a:latin typeface="Calibri"/>
-              </a:rPr>
-              <a:t>4</a:t>
-            </a:r>
-          </a:p>
-        </p:txBody>
-      </p:sp>
-      <p:sp>
-        <p:nvSpPr>
-          <p:cNvPr id="20" name="TextBox 19"/>
-          <p:cNvSpPr txBox="1"/>
-          <p:nvPr/>
-        </p:nvSpPr>
-        <p:spPr>
-          <a:xfrm>
-            <a:off x="7055967" y="4224528"/>
-            <a:ext cx="4404207" cy="512064"/>
-          </a:xfrm>
-          <a:prstGeom prst="rect">
-            <a:avLst/>
-          </a:prstGeom>
-          <a:noFill/>
-        </p:spPr>
-        <p:txBody>
-          <a:bodyPr wrap="square" anchor="ctr" lIns="0" rIns="0" tIns="0" bIns="0"/>
-          <a:lstStyle/>
-          <a:p>
-            <a:pPr algn="l"/>
-            <a:r>
-              <a:rPr sz="1900" b="1" i="0">
-                <a:solidFill>
-                  <a:srgbClr val="03306E"/>
-                </a:solidFill>
-                <a:latin typeface="Calibri"/>
-              </a:rPr>
-              <a:t>Non-compliance</a:t>
-            </a:r>
-          </a:p>
-        </p:txBody>
-      </p:sp>
-      <p:sp>
-        <p:nvSpPr>
-          <p:cNvPr id="21" name="TextBox 20"/>
-          <p:cNvSpPr txBox="1"/>
-          <p:nvPr/>
-        </p:nvSpPr>
-        <p:spPr>
-          <a:xfrm>
-            <a:off x="6461607" y="4892040"/>
-            <a:ext cx="4952847" cy="1143000"/>
-          </a:xfrm>
-          <a:prstGeom prst="rect">
-            <a:avLst/>
-          </a:prstGeom>
-          <a:noFill/>
-        </p:spPr>
-        <p:txBody>
-          <a:bodyPr wrap="square" anchor="t" lIns="0" rIns="0" tIns="0" bIns="0"/>
-          <a:lstStyle/>
-          <a:p>
-            <a:pPr algn="l"/>
-            <a:r>
-              <a:rPr sz="2000" b="0" i="0">
-                <a:solidFill>
-                  <a:srgbClr val="202122"/>
-                </a:solidFill>
-                <a:latin typeface="Calibri"/>
-              </a:rPr>
-              <a:t>Injury, prosecution, fines, closure and reputational damage.</a:t>
+              <a:rPr sz="1300" b="0" i="1">
+                <a:solidFill>
+                  <a:srgbClr val="54595D"/>
+                </a:solidFill>
+                <a:latin typeface="Calibri"/>
+              </a:rPr>
+              <a:t>Answer on mini whiteboards or in your book. Answers are in the speaker notes.</a:t>
             </a:r>
           </a:p>
         </p:txBody>
@@ -6704,7 +8591,7 @@
                 </a:solidFill>
                 <a:latin typeface="Cambria"/>
               </a:rPr>
-              <a:t>Check your understanding</a:t>
+              <a:t>Responsibilities</a:t>
             </a:r>
           </a:p>
         </p:txBody>
@@ -6777,14 +8664,129 @@
       </p:sp>
       <p:sp>
         <p:nvSpPr>
-          <p:cNvPr id="6" name="Oval 5"/>
+          <p:cNvPr id="6" name="TextBox 5"/>
+          <p:cNvSpPr txBox="1"/>
+          <p:nvPr/>
+        </p:nvSpPr>
+        <p:spPr>
+          <a:xfrm>
+            <a:off x="548640" y="1554480"/>
+            <a:ext cx="6720840" cy="4617720"/>
+          </a:xfrm>
+          <a:prstGeom prst="rect">
+            <a:avLst/>
+          </a:prstGeom>
+          <a:noFill/>
+        </p:spPr>
+        <p:txBody>
+          <a:bodyPr wrap="square" lIns="0" rIns="0" tIns="0" bIns="0">
+            <a:spAutoFit/>
+          </a:bodyPr>
+          <a:lstStyle/>
+          <a:p>
+            <a:pPr>
+              <a:spcAft>
+                <a:spcPts val="1260"/>
+              </a:spcAft>
+            </a:pPr>
+            <a:r>
+              <a:rPr sz="2100" b="0">
+                <a:solidFill>
+                  <a:srgbClr val="202122"/>
+                </a:solidFill>
+                <a:latin typeface="Calibri"/>
+              </a:rPr>
+              <a:t>Employees must work safely, not attempt tasks they're not trained or authorised for, co-operate with their employer, and never interfere with or misuse safety equipment.</a:t>
+            </a:r>
+          </a:p>
+          <a:p>
+            <a:pPr>
+              <a:spcAft>
+                <a:spcPts val="1260"/>
+              </a:spcAft>
+            </a:pPr>
+            <a:r>
+              <a:rPr sz="2100" b="0">
+                <a:solidFill>
+                  <a:srgbClr val="202122"/>
+                </a:solidFill>
+                <a:latin typeface="Calibri"/>
+              </a:rPr>
+              <a:t>Employers must minimise risks from handling, storage and transport, provide instruction, training and supervision, maintain a safe workplace, publish a health and safety policy, arrange safety representatives and committees, and protect visitors, contractors and the public.</a:t>
+            </a:r>
+          </a:p>
+          <a:p>
+            <a:pPr>
+              <a:spcAft>
+                <a:spcPts val="1260"/>
+              </a:spcAft>
+            </a:pPr>
+            <a:r>
+              <a:rPr sz="2100" b="0">
+                <a:solidFill>
+                  <a:srgbClr val="202122"/>
+                </a:solidFill>
+                <a:latin typeface="Calibri"/>
+              </a:rPr>
+              <a:t>The Health and Safety Executive (HSE) enforces the law. Breaking it can mean injury, prosecution, fines and damaged reputations.</a:t>
+            </a:r>
+          </a:p>
+        </p:txBody>
+      </p:sp>
+      <p:sp>
+        <p:nvSpPr>
+          <p:cNvPr id="7" name="Rounded Rectangle 6"/>
           <p:cNvSpPr/>
           <p:nvPr/>
         </p:nvSpPr>
         <p:spPr>
           <a:xfrm>
-            <a:off x="548640" y="1618488"/>
-            <a:ext cx="411480" cy="411480"/>
+            <a:off x="7772400" y="1554480"/>
+            <a:ext cx="3867912" cy="4526280"/>
+          </a:xfrm>
+          <a:prstGeom prst="roundRect">
+            <a:avLst>
+              <a:gd name="adj" fmla="val 8000"/>
+            </a:avLst>
+          </a:prstGeom>
+          <a:solidFill>
+            <a:srgbClr val="03306E"/>
+          </a:solidFill>
+          <a:ln>
+            <a:noFill/>
+          </a:ln>
+          <a:effectLst/>
+        </p:spPr>
+        <p:style>
+          <a:lnRef idx="1">
+            <a:schemeClr val="accent1"/>
+          </a:lnRef>
+          <a:fillRef idx="3">
+            <a:schemeClr val="accent1"/>
+          </a:fillRef>
+          <a:effectRef idx="2">
+            <a:schemeClr val="accent1"/>
+          </a:effectRef>
+          <a:fontRef idx="minor">
+            <a:schemeClr val="lt1"/>
+          </a:fontRef>
+        </p:style>
+        <p:txBody>
+          <a:bodyPr rtlCol="0" anchor="ctr"/>
+          <a:lstStyle/>
+          <a:p/>
+        </p:txBody>
+      </p:sp>
+      <p:sp>
+        <p:nvSpPr>
+          <p:cNvPr id="8" name="Oval 7"/>
+          <p:cNvSpPr/>
+          <p:nvPr/>
+        </p:nvSpPr>
+        <p:spPr>
+          <a:xfrm>
+            <a:off x="8046720" y="1828800"/>
+            <a:ext cx="548640" cy="548640"/>
           </a:xfrm>
           <a:prstGeom prst="ellipse">
             <a:avLst/>
@@ -6817,99 +8819,13 @@
           <a:p>
             <a:pPr algn="ctr"/>
             <a:r>
-              <a:rPr sz="1400" b="1">
+              <a:rPr sz="1300" b="1">
                 <a:solidFill>
                   <a:srgbClr val="202122"/>
                 </a:solidFill>
                 <a:latin typeface="Calibri"/>
               </a:rPr>
-              <a:t>1</a:t>
-            </a:r>
-          </a:p>
-        </p:txBody>
-      </p:sp>
-      <p:sp>
-        <p:nvSpPr>
-          <p:cNvPr id="7" name="TextBox 6"/>
-          <p:cNvSpPr txBox="1"/>
-          <p:nvPr/>
-        </p:nvSpPr>
-        <p:spPr>
-          <a:xfrm>
-            <a:off x="1234440" y="1600200"/>
-            <a:ext cx="10408615" cy="1030986"/>
-          </a:xfrm>
-          <a:prstGeom prst="rect">
-            <a:avLst/>
-          </a:prstGeom>
-          <a:noFill/>
-        </p:spPr>
-        <p:txBody>
-          <a:bodyPr wrap="square" anchor="t" lIns="0" rIns="0" tIns="0" bIns="0"/>
-          <a:lstStyle/>
-          <a:p>
-            <a:pPr algn="l"/>
-            <a:r>
-              <a:rPr sz="2200" b="0" i="0">
-                <a:solidFill>
-                  <a:srgbClr val="202122"/>
-                </a:solidFill>
-                <a:latin typeface="Calibri"/>
-              </a:rPr>
-              <a:t>Which regulations cover lifting equipment?</a:t>
-            </a:r>
-          </a:p>
-        </p:txBody>
-      </p:sp>
-      <p:sp>
-        <p:nvSpPr>
-          <p:cNvPr id="8" name="Oval 7"/>
-          <p:cNvSpPr/>
-          <p:nvPr/>
-        </p:nvSpPr>
-        <p:spPr>
-          <a:xfrm>
-            <a:off x="548640" y="2814066"/>
-            <a:ext cx="411480" cy="411480"/>
-          </a:xfrm>
-          <a:prstGeom prst="ellipse">
-            <a:avLst/>
-          </a:prstGeom>
-          <a:solidFill>
-            <a:srgbClr val="F2B705"/>
-          </a:solidFill>
-          <a:ln>
-            <a:noFill/>
-          </a:ln>
-          <a:effectLst/>
-        </p:spPr>
-        <p:style>
-          <a:lnRef idx="1">
-            <a:schemeClr val="accent1"/>
-          </a:lnRef>
-          <a:fillRef idx="3">
-            <a:schemeClr val="accent1"/>
-          </a:fillRef>
-          <a:effectRef idx="2">
-            <a:schemeClr val="accent1"/>
-          </a:effectRef>
-          <a:fontRef idx="minor">
-            <a:schemeClr val="lt1"/>
-          </a:fontRef>
-        </p:style>
-        <p:txBody>
-          <a:bodyPr rtlCol="0" anchor="ctr" lIns="0" rIns="0" tIns="0" bIns="0"/>
-          <a:lstStyle/>
-          <a:p>
-            <a:pPr algn="ctr"/>
-            <a:r>
-              <a:rPr sz="1400" b="1">
-                <a:solidFill>
-                  <a:srgbClr val="202122"/>
-                </a:solidFill>
-                <a:latin typeface="Calibri"/>
-              </a:rPr>
-              <a:t>2</a:t>
+              <a:t>e.g.</a:t>
             </a:r>
           </a:p>
         </p:txBody>
@@ -6922,8 +8838,8 @@
         </p:nvSpPr>
         <p:spPr>
           <a:xfrm>
-            <a:off x="1234440" y="2795778"/>
-            <a:ext cx="10408615" cy="1030986"/>
+            <a:off x="8046720" y="2560320"/>
+            <a:ext cx="3291840" cy="365760"/>
           </a:xfrm>
           <a:prstGeom prst="rect">
             <a:avLst/>
@@ -6936,80 +8852,27 @@
           <a:p>
             <a:pPr algn="l"/>
             <a:r>
-              <a:rPr sz="2200" b="0" i="0">
-                <a:solidFill>
-                  <a:srgbClr val="202122"/>
-                </a:solidFill>
-                <a:latin typeface="Calibri"/>
-              </a:rPr>
-              <a:t>What does RIDDOR require?</a:t>
-            </a:r>
-          </a:p>
-        </p:txBody>
-      </p:sp>
-      <p:sp>
-        <p:nvSpPr>
-          <p:cNvPr id="10" name="Oval 9"/>
-          <p:cNvSpPr/>
-          <p:nvPr/>
-        </p:nvSpPr>
-        <p:spPr>
-          <a:xfrm>
-            <a:off x="548640" y="4009644"/>
-            <a:ext cx="411480" cy="411480"/>
-          </a:xfrm>
-          <a:prstGeom prst="ellipse">
-            <a:avLst/>
-          </a:prstGeom>
-          <a:solidFill>
-            <a:srgbClr val="F2B705"/>
-          </a:solidFill>
-          <a:ln>
-            <a:noFill/>
-          </a:ln>
-          <a:effectLst/>
-        </p:spPr>
-        <p:style>
-          <a:lnRef idx="1">
-            <a:schemeClr val="accent1"/>
-          </a:lnRef>
-          <a:fillRef idx="3">
-            <a:schemeClr val="accent1"/>
-          </a:fillRef>
-          <a:effectRef idx="2">
-            <a:schemeClr val="accent1"/>
-          </a:effectRef>
-          <a:fontRef idx="minor">
-            <a:schemeClr val="lt1"/>
-          </a:fontRef>
-        </p:style>
-        <p:txBody>
-          <a:bodyPr rtlCol="0" anchor="ctr" lIns="0" rIns="0" tIns="0" bIns="0"/>
-          <a:lstStyle/>
-          <a:p>
-            <a:pPr algn="ctr"/>
-            <a:r>
-              <a:rPr sz="1400" b="1">
-                <a:solidFill>
-                  <a:srgbClr val="202122"/>
-                </a:solidFill>
-                <a:latin typeface="Calibri"/>
-              </a:rPr>
-              <a:t>3</a:t>
-            </a:r>
-          </a:p>
-        </p:txBody>
-      </p:sp>
-      <p:sp>
-        <p:nvSpPr>
-          <p:cNvPr id="11" name="TextBox 10"/>
+              <a:rPr sz="1300" b="1" i="0">
+                <a:solidFill>
+                  <a:srgbClr val="A9C8F0"/>
+                </a:solidFill>
+                <a:latin typeface="Calibri"/>
+              </a:rPr>
+              <a:t>EXAMPLE</a:t>
+            </a:r>
+          </a:p>
+        </p:txBody>
+      </p:sp>
+      <p:sp>
+        <p:nvSpPr>
+          <p:cNvPr id="10" name="TextBox 9"/>
           <p:cNvSpPr txBox="1"/>
           <p:nvPr/>
         </p:nvSpPr>
         <p:spPr>
           <a:xfrm>
-            <a:off x="1234440" y="3991356"/>
-            <a:ext cx="10408615" cy="1030986"/>
+            <a:off x="8046720" y="2971800"/>
+            <a:ext cx="3291840" cy="2971800"/>
           </a:xfrm>
           <a:prstGeom prst="rect">
             <a:avLst/>
@@ -7022,99 +8885,13 @@
           <a:p>
             <a:pPr algn="l"/>
             <a:r>
-              <a:rPr sz="2200" b="0" i="0">
-                <a:solidFill>
-                  <a:srgbClr val="202122"/>
-                </a:solidFill>
-                <a:latin typeface="Calibri"/>
-              </a:rPr>
-              <a:t>Name two employee responsibilities.</a:t>
-            </a:r>
-          </a:p>
-        </p:txBody>
-      </p:sp>
-      <p:sp>
-        <p:nvSpPr>
-          <p:cNvPr id="12" name="Oval 11"/>
-          <p:cNvSpPr/>
-          <p:nvPr/>
-        </p:nvSpPr>
-        <p:spPr>
-          <a:xfrm>
-            <a:off x="548640" y="5205221"/>
-            <a:ext cx="411480" cy="411480"/>
-          </a:xfrm>
-          <a:prstGeom prst="ellipse">
-            <a:avLst/>
-          </a:prstGeom>
-          <a:solidFill>
-            <a:srgbClr val="F2B705"/>
-          </a:solidFill>
-          <a:ln>
-            <a:noFill/>
-          </a:ln>
-          <a:effectLst/>
-        </p:spPr>
-        <p:style>
-          <a:lnRef idx="1">
-            <a:schemeClr val="accent1"/>
-          </a:lnRef>
-          <a:fillRef idx="3">
-            <a:schemeClr val="accent1"/>
-          </a:fillRef>
-          <a:effectRef idx="2">
-            <a:schemeClr val="accent1"/>
-          </a:effectRef>
-          <a:fontRef idx="minor">
-            <a:schemeClr val="lt1"/>
-          </a:fontRef>
-        </p:style>
-        <p:txBody>
-          <a:bodyPr rtlCol="0" anchor="ctr" lIns="0" rIns="0" tIns="0" bIns="0"/>
-          <a:lstStyle/>
-          <a:p>
-            <a:pPr algn="ctr"/>
-            <a:r>
-              <a:rPr sz="1400" b="1">
-                <a:solidFill>
-                  <a:srgbClr val="202122"/>
-                </a:solidFill>
-                <a:latin typeface="Calibri"/>
-              </a:rPr>
-              <a:t>4</a:t>
-            </a:r>
-          </a:p>
-        </p:txBody>
-      </p:sp>
-      <p:sp>
-        <p:nvSpPr>
-          <p:cNvPr id="13" name="TextBox 12"/>
-          <p:cNvSpPr txBox="1"/>
-          <p:nvPr/>
-        </p:nvSpPr>
-        <p:spPr>
-          <a:xfrm>
-            <a:off x="1234440" y="5186933"/>
-            <a:ext cx="10408615" cy="1030986"/>
-          </a:xfrm>
-          <a:prstGeom prst="rect">
-            <a:avLst/>
-          </a:prstGeom>
-          <a:noFill/>
-        </p:spPr>
-        <p:txBody>
-          <a:bodyPr wrap="square" anchor="t" lIns="0" rIns="0" tIns="0" bIns="0"/>
-          <a:lstStyle/>
-          <a:p>
-            <a:pPr algn="l"/>
-            <a:r>
-              <a:rPr sz="2200" b="0" i="0">
-                <a:solidFill>
-                  <a:srgbClr val="202122"/>
-                </a:solidFill>
-                <a:latin typeface="Calibri"/>
-              </a:rPr>
-              <a:t>Who enforces health and safety law in Great Britain?</a:t>
+              <a:rPr sz="1900" b="0" i="0">
+                <a:solidFill>
+                  <a:srgbClr val="FFFFFF"/>
+                </a:solidFill>
+                <a:latin typeface="Cambria"/>
+              </a:rPr>
+              <a:t>A worker removes a machine guard to work faster and is injured. Both the worker (misusing safety equipment) and the employer (supervision) may be at fault.</a:t>
             </a:r>
           </a:p>
         </p:txBody>
@@ -7206,7 +8983,7 @@
                 </a:solidFill>
                 <a:latin typeface="Cambria"/>
               </a:rPr>
-              <a:t>Answers</a:t>
+              <a:t>Responsibilities</a:t>
             </a:r>
           </a:p>
         </p:txBody>
@@ -7279,20 +9056,22 @@
       </p:sp>
       <p:sp>
         <p:nvSpPr>
-          <p:cNvPr id="6" name="Oval 5"/>
+          <p:cNvPr id="6" name="Rounded Rectangle 5"/>
           <p:cNvSpPr/>
           <p:nvPr/>
         </p:nvSpPr>
         <p:spPr>
           <a:xfrm>
-            <a:off x="548640" y="1618488"/>
-            <a:ext cx="411480" cy="411480"/>
-          </a:xfrm>
-          <a:prstGeom prst="ellipse">
-            <a:avLst/>
+            <a:off x="548640" y="1600200"/>
+            <a:ext cx="5364327" cy="640080"/>
+          </a:xfrm>
+          <a:prstGeom prst="roundRect">
+            <a:avLst>
+              <a:gd name="adj" fmla="val 15000"/>
+            </a:avLst>
           </a:prstGeom>
           <a:solidFill>
-            <a:srgbClr val="F2B705"/>
+            <a:srgbClr val="03306E"/>
           </a:solidFill>
           <a:ln>
             <a:noFill/>
@@ -7314,20 +9093,9 @@
           </a:fontRef>
         </p:style>
         <p:txBody>
-          <a:bodyPr rtlCol="0" anchor="ctr" lIns="0" rIns="0" tIns="0" bIns="0"/>
-          <a:lstStyle/>
-          <a:p>
-            <a:pPr algn="ctr"/>
-            <a:r>
-              <a:rPr sz="1400" b="1">
-                <a:solidFill>
-                  <a:srgbClr val="202122"/>
-                </a:solidFill>
-                <a:latin typeface="Calibri"/>
-              </a:rPr>
-              <a:t>1</a:t>
-            </a:r>
-          </a:p>
+          <a:bodyPr rtlCol="0" anchor="ctr"/>
+          <a:lstStyle/>
+          <a:p/>
         </p:txBody>
       </p:sp>
       <p:sp>
@@ -7338,8 +9106,8 @@
         </p:nvSpPr>
         <p:spPr>
           <a:xfrm>
-            <a:off x="1234440" y="1600200"/>
-            <a:ext cx="10408615" cy="1030986"/>
+            <a:off x="777240" y="1600200"/>
+            <a:ext cx="4907127" cy="640080"/>
           </a:xfrm>
           <a:prstGeom prst="rect">
             <a:avLst/>
@@ -7347,49 +9115,40 @@
           <a:noFill/>
         </p:spPr>
         <p:txBody>
-          <a:bodyPr wrap="square" anchor="t" lIns="0" rIns="0" tIns="0" bIns="0"/>
+          <a:bodyPr wrap="square" anchor="ctr" lIns="0" rIns="0" tIns="0" bIns="0"/>
           <a:lstStyle/>
           <a:p>
             <a:pPr algn="l"/>
             <a:r>
-              <a:rPr sz="1800" b="0" i="0">
-                <a:solidFill>
-                  <a:srgbClr val="54595D"/>
-                </a:solidFill>
-                <a:latin typeface="Calibri"/>
-              </a:rPr>
-              <a:t>Which regulations cover lifting equipment?</a:t>
-            </a:r>
-          </a:p>
-          <a:p>
-            <a:r>
-              <a:rPr sz="1800" b="1">
-                <a:solidFill>
-                  <a:srgbClr val="03306E"/>
-                </a:solidFill>
-                <a:latin typeface="Calibri"/>
-              </a:rPr>
-              <a:t>LOLER.</a:t>
-            </a:r>
-          </a:p>
-        </p:txBody>
-      </p:sp>
-      <p:sp>
-        <p:nvSpPr>
-          <p:cNvPr id="8" name="Oval 7"/>
+              <a:rPr sz="2000" b="1" i="0">
+                <a:solidFill>
+                  <a:srgbClr val="FFFFFF"/>
+                </a:solidFill>
+                <a:latin typeface="Calibri"/>
+              </a:rPr>
+              <a:t>Employees</a:t>
+            </a:r>
+          </a:p>
+        </p:txBody>
+      </p:sp>
+      <p:sp>
+        <p:nvSpPr>
+          <p:cNvPr id="8" name="Rounded Rectangle 7"/>
           <p:cNvSpPr/>
           <p:nvPr/>
         </p:nvSpPr>
         <p:spPr>
           <a:xfrm>
-            <a:off x="548640" y="2814066"/>
-            <a:ext cx="411480" cy="411480"/>
-          </a:xfrm>
-          <a:prstGeom prst="ellipse">
-            <a:avLst/>
+            <a:off x="548640" y="2377440"/>
+            <a:ext cx="5364327" cy="3794760"/>
+          </a:xfrm>
+          <a:prstGeom prst="roundRect">
+            <a:avLst>
+              <a:gd name="adj" fmla="val 4000"/>
+            </a:avLst>
           </a:prstGeom>
           <a:solidFill>
-            <a:srgbClr val="F2B705"/>
+            <a:srgbClr val="EAF3FF"/>
           </a:solidFill>
           <a:ln>
             <a:noFill/>
@@ -7411,20 +9170,9 @@
           </a:fontRef>
         </p:style>
         <p:txBody>
-          <a:bodyPr rtlCol="0" anchor="ctr" lIns="0" rIns="0" tIns="0" bIns="0"/>
-          <a:lstStyle/>
-          <a:p>
-            <a:pPr algn="ctr"/>
-            <a:r>
-              <a:rPr sz="1400" b="1">
-                <a:solidFill>
-                  <a:srgbClr val="202122"/>
-                </a:solidFill>
-                <a:latin typeface="Calibri"/>
-              </a:rPr>
-              <a:t>2</a:t>
-            </a:r>
-          </a:p>
+          <a:bodyPr rtlCol="0" anchor="ctr"/>
+          <a:lstStyle/>
+          <a:p/>
         </p:txBody>
       </p:sp>
       <p:sp>
@@ -7435,8 +9183,8 @@
         </p:nvSpPr>
         <p:spPr>
           <a:xfrm>
-            <a:off x="1234440" y="2795778"/>
-            <a:ext cx="10408615" cy="1030986"/>
+            <a:off x="822959" y="2606040"/>
+            <a:ext cx="4815687" cy="3337560"/>
           </a:xfrm>
           <a:prstGeom prst="rect">
             <a:avLst/>
@@ -7444,49 +9192,114 @@
           <a:noFill/>
         </p:spPr>
         <p:txBody>
-          <a:bodyPr wrap="square" anchor="t" lIns="0" rIns="0" tIns="0" bIns="0"/>
-          <a:lstStyle/>
-          <a:p>
-            <a:pPr algn="l"/>
-            <a:r>
-              <a:rPr sz="1800" b="0" i="0">
-                <a:solidFill>
-                  <a:srgbClr val="54595D"/>
-                </a:solidFill>
-                <a:latin typeface="Calibri"/>
-              </a:rPr>
-              <a:t>What does RIDDOR require?</a:t>
-            </a:r>
-          </a:p>
-          <a:p>
-            <a:r>
-              <a:rPr sz="1800" b="1">
-                <a:solidFill>
-                  <a:srgbClr val="03306E"/>
-                </a:solidFill>
-                <a:latin typeface="Calibri"/>
-              </a:rPr>
-              <a:t>Reporting of injuries, diseases and dangerous occurrences.</a:t>
-            </a:r>
-          </a:p>
-        </p:txBody>
-      </p:sp>
-      <p:sp>
-        <p:nvSpPr>
-          <p:cNvPr id="10" name="Oval 9"/>
+          <a:bodyPr wrap="square" lIns="0" rIns="0" tIns="0" bIns="0">
+            <a:spAutoFit/>
+          </a:bodyPr>
+          <a:lstStyle/>
+          <a:p>
+            <a:pPr marL="274320" indent="-274320">
+              <a:spcAft>
+                <a:spcPts val="990"/>
+              </a:spcAft>
+              <a:buClr>
+                <a:srgbClr val="0645AD"/>
+              </a:buClr>
+              <a:buFont typeface="Arial"/>
+              <a:buChar char="•"/>
+            </a:pPr>
+            <a:r>
+              <a:rPr sz="2200" b="0">
+                <a:solidFill>
+                  <a:srgbClr val="202122"/>
+                </a:solidFill>
+                <a:latin typeface="Calibri"/>
+              </a:rPr>
+              <a:t>Work safely</a:t>
+            </a:r>
+          </a:p>
+          <a:p>
+            <a:pPr marL="274320" indent="-274320">
+              <a:spcAft>
+                <a:spcPts val="990"/>
+              </a:spcAft>
+              <a:buClr>
+                <a:srgbClr val="0645AD"/>
+              </a:buClr>
+              <a:buFont typeface="Arial"/>
+              <a:buChar char="•"/>
+            </a:pPr>
+            <a:r>
+              <a:rPr sz="2200" b="0">
+                <a:solidFill>
+                  <a:srgbClr val="202122"/>
+                </a:solidFill>
+                <a:latin typeface="Calibri"/>
+              </a:rPr>
+              <a:t>Don't attempt untrained or unauthorised tasks</a:t>
+            </a:r>
+          </a:p>
+          <a:p>
+            <a:pPr marL="274320" indent="-274320">
+              <a:spcAft>
+                <a:spcPts val="990"/>
+              </a:spcAft>
+              <a:buClr>
+                <a:srgbClr val="0645AD"/>
+              </a:buClr>
+              <a:buFont typeface="Arial"/>
+              <a:buChar char="•"/>
+            </a:pPr>
+            <a:r>
+              <a:rPr sz="2200" b="0">
+                <a:solidFill>
+                  <a:srgbClr val="202122"/>
+                </a:solidFill>
+                <a:latin typeface="Calibri"/>
+              </a:rPr>
+              <a:t>Co-operate with the employer</a:t>
+            </a:r>
+          </a:p>
+          <a:p>
+            <a:pPr marL="274320" indent="-274320">
+              <a:spcAft>
+                <a:spcPts val="990"/>
+              </a:spcAft>
+              <a:buClr>
+                <a:srgbClr val="0645AD"/>
+              </a:buClr>
+              <a:buFont typeface="Arial"/>
+              <a:buChar char="•"/>
+            </a:pPr>
+            <a:r>
+              <a:rPr sz="2200" b="0">
+                <a:solidFill>
+                  <a:srgbClr val="202122"/>
+                </a:solidFill>
+                <a:latin typeface="Calibri"/>
+              </a:rPr>
+              <a:t>Don't misuse or interfere with safety provisions</a:t>
+            </a:r>
+          </a:p>
+        </p:txBody>
+      </p:sp>
+      <p:sp>
+        <p:nvSpPr>
+          <p:cNvPr id="10" name="Rounded Rectangle 9"/>
           <p:cNvSpPr/>
           <p:nvPr/>
         </p:nvSpPr>
         <p:spPr>
           <a:xfrm>
-            <a:off x="548640" y="4009644"/>
-            <a:ext cx="411480" cy="411480"/>
-          </a:xfrm>
-          <a:prstGeom prst="ellipse">
-            <a:avLst/>
+            <a:off x="6278727" y="1600200"/>
+            <a:ext cx="5364327" cy="640080"/>
+          </a:xfrm>
+          <a:prstGeom prst="roundRect">
+            <a:avLst>
+              <a:gd name="adj" fmla="val 15000"/>
+            </a:avLst>
           </a:prstGeom>
           <a:solidFill>
-            <a:srgbClr val="F2B705"/>
+            <a:srgbClr val="0645AD"/>
           </a:solidFill>
           <a:ln>
             <a:noFill/>
@@ -7508,20 +9321,9 @@
           </a:fontRef>
         </p:style>
         <p:txBody>
-          <a:bodyPr rtlCol="0" anchor="ctr" lIns="0" rIns="0" tIns="0" bIns="0"/>
-          <a:lstStyle/>
-          <a:p>
-            <a:pPr algn="ctr"/>
-            <a:r>
-              <a:rPr sz="1400" b="1">
-                <a:solidFill>
-                  <a:srgbClr val="202122"/>
-                </a:solidFill>
-                <a:latin typeface="Calibri"/>
-              </a:rPr>
-              <a:t>3</a:t>
-            </a:r>
-          </a:p>
+          <a:bodyPr rtlCol="0" anchor="ctr"/>
+          <a:lstStyle/>
+          <a:p/>
         </p:txBody>
       </p:sp>
       <p:sp>
@@ -7532,8 +9334,8 @@
         </p:nvSpPr>
         <p:spPr>
           <a:xfrm>
-            <a:off x="1234440" y="3991356"/>
-            <a:ext cx="10408615" cy="1030986"/>
+            <a:off x="6507327" y="1600200"/>
+            <a:ext cx="4907127" cy="640080"/>
           </a:xfrm>
           <a:prstGeom prst="rect">
             <a:avLst/>
@@ -7541,49 +9343,40 @@
           <a:noFill/>
         </p:spPr>
         <p:txBody>
-          <a:bodyPr wrap="square" anchor="t" lIns="0" rIns="0" tIns="0" bIns="0"/>
+          <a:bodyPr wrap="square" anchor="ctr" lIns="0" rIns="0" tIns="0" bIns="0"/>
           <a:lstStyle/>
           <a:p>
             <a:pPr algn="l"/>
             <a:r>
-              <a:rPr sz="1800" b="0" i="0">
-                <a:solidFill>
-                  <a:srgbClr val="54595D"/>
-                </a:solidFill>
-                <a:latin typeface="Calibri"/>
-              </a:rPr>
-              <a:t>Name two employee responsibilities.</a:t>
-            </a:r>
-          </a:p>
-          <a:p>
-            <a:r>
-              <a:rPr sz="1800" b="1">
-                <a:solidFill>
-                  <a:srgbClr val="03306E"/>
-                </a:solidFill>
-                <a:latin typeface="Calibri"/>
-              </a:rPr>
-              <a:t>Any two, e.g. work safely, co-operate, don't misuse safety equipment.</a:t>
-            </a:r>
-          </a:p>
-        </p:txBody>
-      </p:sp>
-      <p:sp>
-        <p:nvSpPr>
-          <p:cNvPr id="12" name="Oval 11"/>
+              <a:rPr sz="2000" b="1" i="0">
+                <a:solidFill>
+                  <a:srgbClr val="FFFFFF"/>
+                </a:solidFill>
+                <a:latin typeface="Calibri"/>
+              </a:rPr>
+              <a:t>Employers</a:t>
+            </a:r>
+          </a:p>
+        </p:txBody>
+      </p:sp>
+      <p:sp>
+        <p:nvSpPr>
+          <p:cNvPr id="12" name="Rounded Rectangle 11"/>
           <p:cNvSpPr/>
           <p:nvPr/>
         </p:nvSpPr>
         <p:spPr>
           <a:xfrm>
-            <a:off x="548640" y="5205221"/>
-            <a:ext cx="411480" cy="411480"/>
-          </a:xfrm>
-          <a:prstGeom prst="ellipse">
-            <a:avLst/>
+            <a:off x="6278727" y="2377440"/>
+            <a:ext cx="5364327" cy="3794760"/>
+          </a:xfrm>
+          <a:prstGeom prst="roundRect">
+            <a:avLst>
+              <a:gd name="adj" fmla="val 4000"/>
+            </a:avLst>
           </a:prstGeom>
           <a:solidFill>
-            <a:srgbClr val="F2B705"/>
+            <a:srgbClr val="EAF3FF"/>
           </a:solidFill>
           <a:ln>
             <a:noFill/>
@@ -7605,20 +9398,9 @@
           </a:fontRef>
         </p:style>
         <p:txBody>
-          <a:bodyPr rtlCol="0" anchor="ctr" lIns="0" rIns="0" tIns="0" bIns="0"/>
-          <a:lstStyle/>
-          <a:p>
-            <a:pPr algn="ctr"/>
-            <a:r>
-              <a:rPr sz="1400" b="1">
-                <a:solidFill>
-                  <a:srgbClr val="202122"/>
-                </a:solidFill>
-                <a:latin typeface="Calibri"/>
-              </a:rPr>
-              <a:t>4</a:t>
-            </a:r>
-          </a:p>
+          <a:bodyPr rtlCol="0" anchor="ctr"/>
+          <a:lstStyle/>
+          <a:p/>
         </p:txBody>
       </p:sp>
       <p:sp>
@@ -7629,8 +9411,8 @@
         </p:nvSpPr>
         <p:spPr>
           <a:xfrm>
-            <a:off x="1234440" y="5186933"/>
-            <a:ext cx="10408615" cy="1030986"/>
+            <a:off x="6553047" y="2606040"/>
+            <a:ext cx="4815687" cy="3337560"/>
           </a:xfrm>
           <a:prstGeom prst="rect">
             <a:avLst/>
@@ -7638,29 +9420,113 @@
           <a:noFill/>
         </p:spPr>
         <p:txBody>
-          <a:bodyPr wrap="square" anchor="t" lIns="0" rIns="0" tIns="0" bIns="0"/>
-          <a:lstStyle/>
-          <a:p>
-            <a:pPr algn="l"/>
-            <a:r>
-              <a:rPr sz="1800" b="0" i="0">
-                <a:solidFill>
-                  <a:srgbClr val="54595D"/>
-                </a:solidFill>
-                <a:latin typeface="Calibri"/>
-              </a:rPr>
-              <a:t>Who enforces health and safety law in Great Britain?</a:t>
-            </a:r>
-          </a:p>
-          <a:p>
-            <a:r>
-              <a:rPr sz="1800" b="1">
-                <a:solidFill>
-                  <a:srgbClr val="03306E"/>
-                </a:solidFill>
-                <a:latin typeface="Calibri"/>
-              </a:rPr>
-              <a:t>The Health and Safety Executive (HSE).</a:t>
+          <a:bodyPr wrap="square" lIns="0" rIns="0" tIns="0" bIns="0">
+            <a:spAutoFit/>
+          </a:bodyPr>
+          <a:lstStyle/>
+          <a:p>
+            <a:pPr marL="274320" indent="-274320">
+              <a:spcAft>
+                <a:spcPts val="855"/>
+              </a:spcAft>
+              <a:buClr>
+                <a:srgbClr val="0645AD"/>
+              </a:buClr>
+              <a:buFont typeface="Arial"/>
+              <a:buChar char="•"/>
+            </a:pPr>
+            <a:r>
+              <a:rPr sz="1900" b="0">
+                <a:solidFill>
+                  <a:srgbClr val="202122"/>
+                </a:solidFill>
+                <a:latin typeface="Calibri"/>
+              </a:rPr>
+              <a:t>Minimise handling, storage and transport risks</a:t>
+            </a:r>
+          </a:p>
+          <a:p>
+            <a:pPr marL="274320" indent="-274320">
+              <a:spcAft>
+                <a:spcPts val="855"/>
+              </a:spcAft>
+              <a:buClr>
+                <a:srgbClr val="0645AD"/>
+              </a:buClr>
+              <a:buFont typeface="Arial"/>
+              <a:buChar char="•"/>
+            </a:pPr>
+            <a:r>
+              <a:rPr sz="1900" b="0">
+                <a:solidFill>
+                  <a:srgbClr val="202122"/>
+                </a:solidFill>
+                <a:latin typeface="Calibri"/>
+              </a:rPr>
+              <a:t>Provide instruction, training and supervision</a:t>
+            </a:r>
+          </a:p>
+          <a:p>
+            <a:pPr marL="274320" indent="-274320">
+              <a:spcAft>
+                <a:spcPts val="855"/>
+              </a:spcAft>
+              <a:buClr>
+                <a:srgbClr val="0645AD"/>
+              </a:buClr>
+              <a:buFont typeface="Arial"/>
+              <a:buChar char="•"/>
+            </a:pPr>
+            <a:r>
+              <a:rPr sz="1900" b="0">
+                <a:solidFill>
+                  <a:srgbClr val="202122"/>
+                </a:solidFill>
+                <a:latin typeface="Calibri"/>
+              </a:rPr>
+              <a:t>Maintain a safe workplace</a:t>
+            </a:r>
+          </a:p>
+          <a:p>
+            <a:pPr marL="274320" indent="-274320">
+              <a:spcAft>
+                <a:spcPts val="855"/>
+              </a:spcAft>
+              <a:buClr>
+                <a:srgbClr val="0645AD"/>
+              </a:buClr>
+              <a:buFont typeface="Arial"/>
+              <a:buChar char="•"/>
+            </a:pPr>
+            <a:r>
+              <a:rPr sz="1900" b="0">
+                <a:solidFill>
+                  <a:srgbClr val="202122"/>
+                </a:solidFill>
+                <a:latin typeface="Calibri"/>
+              </a:rPr>
+              <a:t>Publish a health and safety policy</a:t>
+            </a:r>
+          </a:p>
+          <a:p>
+            <a:pPr marL="274320" indent="-274320">
+              <a:spcAft>
+                <a:spcPts val="855"/>
+              </a:spcAft>
+              <a:buClr>
+                <a:srgbClr val="0645AD"/>
+              </a:buClr>
+              <a:buFont typeface="Arial"/>
+              <a:buChar char="•"/>
+            </a:pPr>
+            <a:r>
+              <a:rPr sz="1900" b="0">
+                <a:solidFill>
+                  <a:srgbClr val="202122"/>
+                </a:solidFill>
+                <a:latin typeface="Calibri"/>
+              </a:rPr>
+              <a:t>Protect visitors, contractors and the public</a:t>
             </a:r>
           </a:p>
         </p:txBody>
@@ -7752,7 +9618,7 @@
                 </a:solidFill>
                 <a:latin typeface="Cambria"/>
               </a:rPr>
-              <a:t>Activity: Legislation match-up</a:t>
+              <a:t>Quick check: Responsibilities</a:t>
             </a:r>
           </a:p>
         </p:txBody>
@@ -7825,19 +9691,17 @@
       </p:sp>
       <p:sp>
         <p:nvSpPr>
-          <p:cNvPr id="6" name="Rounded Rectangle 5"/>
+          <p:cNvPr id="6" name="Oval 5"/>
           <p:cNvSpPr/>
           <p:nvPr/>
         </p:nvSpPr>
         <p:spPr>
           <a:xfrm>
-            <a:off x="548640" y="1508760"/>
-            <a:ext cx="2011680" cy="457200"/>
-          </a:xfrm>
-          <a:prstGeom prst="roundRect">
-            <a:avLst>
-              <a:gd name="adj" fmla="val 50000"/>
-            </a:avLst>
+            <a:off x="548640" y="1691640"/>
+            <a:ext cx="502920" cy="502920"/>
+          </a:xfrm>
+          <a:prstGeom prst="ellipse">
+            <a:avLst/>
           </a:prstGeom>
           <a:solidFill>
             <a:srgbClr val="F2B705"/>
@@ -7862,9 +9726,20 @@
           </a:fontRef>
         </p:style>
         <p:txBody>
-          <a:bodyPr rtlCol="0" anchor="ctr"/>
-          <a:lstStyle/>
-          <a:p/>
+          <a:bodyPr rtlCol="0" anchor="ctr" lIns="0" rIns="0" tIns="0" bIns="0"/>
+          <a:lstStyle/>
+          <a:p>
+            <a:pPr algn="ctr"/>
+            <a:r>
+              <a:rPr sz="1600" b="1">
+                <a:solidFill>
+                  <a:srgbClr val="202122"/>
+                </a:solidFill>
+                <a:latin typeface="Calibri"/>
+              </a:rPr>
+              <a:t>1</a:t>
+            </a:r>
+          </a:p>
         </p:txBody>
       </p:sp>
       <p:sp>
@@ -7875,8 +9750,8 @@
         </p:nvSpPr>
         <p:spPr>
           <a:xfrm>
-            <a:off x="548640" y="1508760"/>
-            <a:ext cx="2011680" cy="457200"/>
+            <a:off x="1371600" y="1645920"/>
+            <a:ext cx="10271455" cy="1188720"/>
           </a:xfrm>
           <a:prstGeom prst="rect">
             <a:avLst/>
@@ -7884,71 +9759,38 @@
           <a:noFill/>
         </p:spPr>
         <p:txBody>
-          <a:bodyPr wrap="square" anchor="ctr" lIns="0" rIns="0" tIns="0" bIns="0"/>
-          <a:lstStyle/>
-          <a:p>
-            <a:pPr algn="ctr"/>
-            <a:r>
-              <a:rPr sz="1400" b="1" i="0">
+          <a:bodyPr wrap="square" anchor="t" lIns="0" rIns="0" tIns="0" bIns="0"/>
+          <a:lstStyle/>
+          <a:p>
+            <a:pPr algn="l"/>
+            <a:r>
+              <a:rPr sz="2400" b="0" i="0">
                 <a:solidFill>
                   <a:srgbClr val="202122"/>
                 </a:solidFill>
                 <a:latin typeface="Calibri"/>
               </a:rPr>
-              <a:t>20 minutes</a:t>
-            </a:r>
-          </a:p>
-        </p:txBody>
-      </p:sp>
-      <p:sp>
-        <p:nvSpPr>
-          <p:cNvPr id="8" name="TextBox 7"/>
-          <p:cNvSpPr txBox="1"/>
-          <p:nvPr/>
-        </p:nvSpPr>
-        <p:spPr>
-          <a:xfrm>
-            <a:off x="2743200" y="1508760"/>
-            <a:ext cx="4754880" cy="457200"/>
-          </a:xfrm>
-          <a:prstGeom prst="rect">
-            <a:avLst/>
-          </a:prstGeom>
-          <a:noFill/>
-        </p:spPr>
-        <p:txBody>
-          <a:bodyPr wrap="square" anchor="ctr" lIns="0" rIns="0" tIns="0" bIns="0"/>
-          <a:lstStyle/>
-          <a:p>
-            <a:pPr algn="l"/>
-            <a:r>
-              <a:rPr sz="1400" b="0" i="1">
-                <a:solidFill>
-                  <a:srgbClr val="54595D"/>
-                </a:solidFill>
-                <a:latin typeface="Calibri"/>
-              </a:rPr>
-              <a:t>Pairs</a:t>
-            </a:r>
-          </a:p>
-        </p:txBody>
-      </p:sp>
-      <p:sp>
-        <p:nvSpPr>
-          <p:cNvPr id="9" name="Oval 8"/>
+              <a:t>Name two employee responsibilities.</a:t>
+            </a:r>
+          </a:p>
+        </p:txBody>
+      </p:sp>
+      <p:sp>
+        <p:nvSpPr>
+          <p:cNvPr id="8" name="Oval 7"/>
           <p:cNvSpPr/>
           <p:nvPr/>
         </p:nvSpPr>
         <p:spPr>
           <a:xfrm>
-            <a:off x="548640" y="2482596"/>
-            <a:ext cx="384048" cy="384048"/>
+            <a:off x="548640" y="3108960"/>
+            <a:ext cx="502920" cy="502920"/>
           </a:xfrm>
           <a:prstGeom prst="ellipse">
             <a:avLst/>
           </a:prstGeom>
           <a:solidFill>
-            <a:srgbClr val="0645AD"/>
+            <a:srgbClr val="F2B705"/>
           </a:solidFill>
           <a:ln>
             <a:noFill/>
@@ -7975,27 +9817,27 @@
           <a:p>
             <a:pPr algn="ctr"/>
             <a:r>
-              <a:rPr sz="1300" b="1">
-                <a:solidFill>
-                  <a:srgbClr val="FFFFFF"/>
-                </a:solidFill>
-                <a:latin typeface="Calibri"/>
-              </a:rPr>
-              <a:t>1</a:t>
-            </a:r>
-          </a:p>
-        </p:txBody>
-      </p:sp>
-      <p:sp>
-        <p:nvSpPr>
-          <p:cNvPr id="10" name="TextBox 9"/>
+              <a:rPr sz="1600" b="1">
+                <a:solidFill>
+                  <a:srgbClr val="202122"/>
+                </a:solidFill>
+                <a:latin typeface="Calibri"/>
+              </a:rPr>
+              <a:t>2</a:t>
+            </a:r>
+          </a:p>
+        </p:txBody>
+      </p:sp>
+      <p:sp>
+        <p:nvSpPr>
+          <p:cNvPr id="9" name="TextBox 8"/>
           <p:cNvSpPr txBox="1"/>
           <p:nvPr/>
         </p:nvSpPr>
         <p:spPr>
           <a:xfrm>
-            <a:off x="1143000" y="2240280"/>
-            <a:ext cx="5943600" cy="868680"/>
+            <a:off x="1371600" y="3063240"/>
+            <a:ext cx="10271455" cy="1188720"/>
           </a:xfrm>
           <a:prstGeom prst="rect">
             <a:avLst/>
@@ -8003,38 +9845,38 @@
           <a:noFill/>
         </p:spPr>
         <p:txBody>
-          <a:bodyPr wrap="square" anchor="ctr" lIns="0" rIns="0" tIns="0" bIns="0"/>
+          <a:bodyPr wrap="square" anchor="t" lIns="0" rIns="0" tIns="0" bIns="0"/>
           <a:lstStyle/>
           <a:p>
             <a:pPr algn="l"/>
             <a:r>
-              <a:rPr sz="1700" b="0" i="0">
+              <a:rPr sz="2400" b="0" i="0">
                 <a:solidFill>
                   <a:srgbClr val="202122"/>
                 </a:solidFill>
                 <a:latin typeface="Calibri"/>
               </a:rPr>
-              <a:t>Your teacher gives you ten workshop scenarios.</a:t>
-            </a:r>
-          </a:p>
-        </p:txBody>
-      </p:sp>
-      <p:sp>
-        <p:nvSpPr>
-          <p:cNvPr id="11" name="Oval 10"/>
+              <a:t>Who enforces health and safety law?</a:t>
+            </a:r>
+          </a:p>
+        </p:txBody>
+      </p:sp>
+      <p:sp>
+        <p:nvSpPr>
+          <p:cNvPr id="10" name="Oval 9"/>
           <p:cNvSpPr/>
           <p:nvPr/>
         </p:nvSpPr>
         <p:spPr>
           <a:xfrm>
-            <a:off x="548640" y="3461004"/>
-            <a:ext cx="384048" cy="384048"/>
+            <a:off x="548640" y="4526280"/>
+            <a:ext cx="502920" cy="502920"/>
           </a:xfrm>
           <a:prstGeom prst="ellipse">
             <a:avLst/>
           </a:prstGeom>
           <a:solidFill>
-            <a:srgbClr val="0645AD"/>
+            <a:srgbClr val="F2B705"/>
           </a:solidFill>
           <a:ln>
             <a:noFill/>
@@ -8061,13 +9903,46 @@
           <a:p>
             <a:pPr algn="ctr"/>
             <a:r>
-              <a:rPr sz="1300" b="1">
-                <a:solidFill>
-                  <a:srgbClr val="FFFFFF"/>
-                </a:solidFill>
-                <a:latin typeface="Calibri"/>
-              </a:rPr>
-              <a:t>2</a:t>
+              <a:rPr sz="1600" b="1">
+                <a:solidFill>
+                  <a:srgbClr val="202122"/>
+                </a:solidFill>
+                <a:latin typeface="Calibri"/>
+              </a:rPr>
+              <a:t>3</a:t>
+            </a:r>
+          </a:p>
+        </p:txBody>
+      </p:sp>
+      <p:sp>
+        <p:nvSpPr>
+          <p:cNvPr id="11" name="TextBox 10"/>
+          <p:cNvSpPr txBox="1"/>
+          <p:nvPr/>
+        </p:nvSpPr>
+        <p:spPr>
+          <a:xfrm>
+            <a:off x="1371600" y="4480560"/>
+            <a:ext cx="10271455" cy="1188720"/>
+          </a:xfrm>
+          <a:prstGeom prst="rect">
+            <a:avLst/>
+          </a:prstGeom>
+          <a:noFill/>
+        </p:spPr>
+        <p:txBody>
+          <a:bodyPr wrap="square" anchor="t" lIns="0" rIns="0" tIns="0" bIns="0"/>
+          <a:lstStyle/>
+          <a:p>
+            <a:pPr algn="l"/>
+            <a:r>
+              <a:rPr sz="2400" b="0" i="0">
+                <a:solidFill>
+                  <a:srgbClr val="202122"/>
+                </a:solidFill>
+                <a:latin typeface="Calibri"/>
+              </a:rPr>
+              <a:t>Must employers protect visitors?</a:t>
             </a:r>
           </a:p>
         </p:txBody>
@@ -8080,8 +9955,8 @@
         </p:nvSpPr>
         <p:spPr>
           <a:xfrm>
-            <a:off x="1143000" y="3218688"/>
-            <a:ext cx="5943600" cy="868680"/>
+            <a:off x="548640" y="5852160"/>
+            <a:ext cx="11094415" cy="365760"/>
           </a:xfrm>
           <a:prstGeom prst="rect">
             <a:avLst/>
@@ -8089,353 +9964,18 @@
           <a:noFill/>
         </p:spPr>
         <p:txBody>
-          <a:bodyPr wrap="square" anchor="ctr" lIns="0" rIns="0" tIns="0" bIns="0"/>
+          <a:bodyPr wrap="square" anchor="t" lIns="0" rIns="0" tIns="0" bIns="0"/>
           <a:lstStyle/>
           <a:p>
             <a:pPr algn="l"/>
             <a:r>
-              <a:rPr sz="1700" b="0" i="0">
-                <a:solidFill>
-                  <a:srgbClr val="202122"/>
-                </a:solidFill>
-                <a:latin typeface="Calibri"/>
-              </a:rPr>
-              <a:t>Match each to the legislation that applies.</a:t>
-            </a:r>
-          </a:p>
-        </p:txBody>
-      </p:sp>
-      <p:sp>
-        <p:nvSpPr>
-          <p:cNvPr id="13" name="Oval 12"/>
-          <p:cNvSpPr/>
-          <p:nvPr/>
-        </p:nvSpPr>
-        <p:spPr>
-          <a:xfrm>
-            <a:off x="548640" y="4439412"/>
-            <a:ext cx="384048" cy="384048"/>
-          </a:xfrm>
-          <a:prstGeom prst="ellipse">
-            <a:avLst/>
-          </a:prstGeom>
-          <a:solidFill>
-            <a:srgbClr val="0645AD"/>
-          </a:solidFill>
-          <a:ln>
-            <a:noFill/>
-          </a:ln>
-          <a:effectLst/>
-        </p:spPr>
-        <p:style>
-          <a:lnRef idx="1">
-            <a:schemeClr val="accent1"/>
-          </a:lnRef>
-          <a:fillRef idx="3">
-            <a:schemeClr val="accent1"/>
-          </a:fillRef>
-          <a:effectRef idx="2">
-            <a:schemeClr val="accent1"/>
-          </a:effectRef>
-          <a:fontRef idx="minor">
-            <a:schemeClr val="lt1"/>
-          </a:fontRef>
-        </p:style>
-        <p:txBody>
-          <a:bodyPr rtlCol="0" anchor="ctr" lIns="0" rIns="0" tIns="0" bIns="0"/>
-          <a:lstStyle/>
-          <a:p>
-            <a:pPr algn="ctr"/>
-            <a:r>
-              <a:rPr sz="1300" b="1">
-                <a:solidFill>
-                  <a:srgbClr val="FFFFFF"/>
-                </a:solidFill>
-                <a:latin typeface="Calibri"/>
-              </a:rPr>
-              <a:t>3</a:t>
-            </a:r>
-          </a:p>
-        </p:txBody>
-      </p:sp>
-      <p:sp>
-        <p:nvSpPr>
-          <p:cNvPr id="14" name="TextBox 13"/>
-          <p:cNvSpPr txBox="1"/>
-          <p:nvPr/>
-        </p:nvSpPr>
-        <p:spPr>
-          <a:xfrm>
-            <a:off x="1143000" y="4197096"/>
-            <a:ext cx="5943600" cy="868680"/>
-          </a:xfrm>
-          <a:prstGeom prst="rect">
-            <a:avLst/>
-          </a:prstGeom>
-          <a:noFill/>
-        </p:spPr>
-        <p:txBody>
-          <a:bodyPr wrap="square" anchor="ctr" lIns="0" rIns="0" tIns="0" bIns="0"/>
-          <a:lstStyle/>
-          <a:p>
-            <a:pPr algn="l"/>
-            <a:r>
-              <a:rPr sz="1700" b="0" i="0">
-                <a:solidFill>
-                  <a:srgbClr val="202122"/>
-                </a:solidFill>
-                <a:latin typeface="Calibri"/>
-              </a:rPr>
-              <a:t>Decide who is responsible in each case.</a:t>
-            </a:r>
-          </a:p>
-        </p:txBody>
-      </p:sp>
-      <p:sp>
-        <p:nvSpPr>
-          <p:cNvPr id="15" name="Oval 14"/>
-          <p:cNvSpPr/>
-          <p:nvPr/>
-        </p:nvSpPr>
-        <p:spPr>
-          <a:xfrm>
-            <a:off x="548640" y="5417820"/>
-            <a:ext cx="384048" cy="384048"/>
-          </a:xfrm>
-          <a:prstGeom prst="ellipse">
-            <a:avLst/>
-          </a:prstGeom>
-          <a:solidFill>
-            <a:srgbClr val="0645AD"/>
-          </a:solidFill>
-          <a:ln>
-            <a:noFill/>
-          </a:ln>
-          <a:effectLst/>
-        </p:spPr>
-        <p:style>
-          <a:lnRef idx="1">
-            <a:schemeClr val="accent1"/>
-          </a:lnRef>
-          <a:fillRef idx="3">
-            <a:schemeClr val="accent1"/>
-          </a:fillRef>
-          <a:effectRef idx="2">
-            <a:schemeClr val="accent1"/>
-          </a:effectRef>
-          <a:fontRef idx="minor">
-            <a:schemeClr val="lt1"/>
-          </a:fontRef>
-        </p:style>
-        <p:txBody>
-          <a:bodyPr rtlCol="0" anchor="ctr" lIns="0" rIns="0" tIns="0" bIns="0"/>
-          <a:lstStyle/>
-          <a:p>
-            <a:pPr algn="ctr"/>
-            <a:r>
-              <a:rPr sz="1300" b="1">
-                <a:solidFill>
-                  <a:srgbClr val="FFFFFF"/>
-                </a:solidFill>
-                <a:latin typeface="Calibri"/>
-              </a:rPr>
-              <a:t>4</a:t>
-            </a:r>
-          </a:p>
-        </p:txBody>
-      </p:sp>
-      <p:sp>
-        <p:nvSpPr>
-          <p:cNvPr id="16" name="TextBox 15"/>
-          <p:cNvSpPr txBox="1"/>
-          <p:nvPr/>
-        </p:nvSpPr>
-        <p:spPr>
-          <a:xfrm>
-            <a:off x="1143000" y="5175504"/>
-            <a:ext cx="5943600" cy="868680"/>
-          </a:xfrm>
-          <a:prstGeom prst="rect">
-            <a:avLst/>
-          </a:prstGeom>
-          <a:noFill/>
-        </p:spPr>
-        <p:txBody>
-          <a:bodyPr wrap="square" anchor="ctr" lIns="0" rIns="0" tIns="0" bIns="0"/>
-          <a:lstStyle/>
-          <a:p>
-            <a:pPr algn="l"/>
-            <a:r>
-              <a:rPr sz="1700" b="0" i="0">
-                <a:solidFill>
-                  <a:srgbClr val="202122"/>
-                </a:solidFill>
-                <a:latin typeface="Calibri"/>
-              </a:rPr>
-              <a:t>Pick the most serious and explain the consequences of non-compliance.</a:t>
-            </a:r>
-          </a:p>
-        </p:txBody>
-      </p:sp>
-      <p:sp>
-        <p:nvSpPr>
-          <p:cNvPr id="17" name="Rounded Rectangle 16"/>
-          <p:cNvSpPr/>
-          <p:nvPr/>
-        </p:nvSpPr>
-        <p:spPr>
-          <a:xfrm>
-            <a:off x="7772400" y="1508760"/>
-            <a:ext cx="3867912" cy="4572000"/>
-          </a:xfrm>
-          <a:prstGeom prst="roundRect">
-            <a:avLst>
-              <a:gd name="adj" fmla="val 8000"/>
-            </a:avLst>
-          </a:prstGeom>
-          <a:solidFill>
-            <a:srgbClr val="EAF3FF"/>
-          </a:solidFill>
-          <a:ln>
-            <a:noFill/>
-          </a:ln>
-          <a:effectLst/>
-        </p:spPr>
-        <p:style>
-          <a:lnRef idx="1">
-            <a:schemeClr val="accent1"/>
-          </a:lnRef>
-          <a:fillRef idx="3">
-            <a:schemeClr val="accent1"/>
-          </a:fillRef>
-          <a:effectRef idx="2">
-            <a:schemeClr val="accent1"/>
-          </a:effectRef>
-          <a:fontRef idx="minor">
-            <a:schemeClr val="lt1"/>
-          </a:fontRef>
-        </p:style>
-        <p:txBody>
-          <a:bodyPr rtlCol="0" anchor="ctr"/>
-          <a:lstStyle/>
-          <a:p/>
-        </p:txBody>
-      </p:sp>
-      <p:sp>
-        <p:nvSpPr>
-          <p:cNvPr id="18" name="TextBox 17"/>
-          <p:cNvSpPr txBox="1"/>
-          <p:nvPr/>
-        </p:nvSpPr>
-        <p:spPr>
-          <a:xfrm>
-            <a:off x="8046720" y="1737360"/>
-            <a:ext cx="3291840" cy="365760"/>
-          </a:xfrm>
-          <a:prstGeom prst="rect">
-            <a:avLst/>
-          </a:prstGeom>
-          <a:noFill/>
-        </p:spPr>
-        <p:txBody>
-          <a:bodyPr wrap="square" anchor="t" lIns="0" rIns="0" tIns="0" bIns="0"/>
-          <a:lstStyle/>
-          <a:p>
-            <a:pPr algn="l"/>
-            <a:r>
-              <a:rPr sz="1300" b="1" i="0">
-                <a:solidFill>
-                  <a:srgbClr val="0645AD"/>
-                </a:solidFill>
-                <a:latin typeface="Calibri"/>
-              </a:rPr>
-              <a:t>SUCCESS CRITERIA</a:t>
-            </a:r>
-          </a:p>
-        </p:txBody>
-      </p:sp>
-      <p:sp>
-        <p:nvSpPr>
-          <p:cNvPr id="19" name="TextBox 18"/>
-          <p:cNvSpPr txBox="1"/>
-          <p:nvPr/>
-        </p:nvSpPr>
-        <p:spPr>
-          <a:xfrm>
-            <a:off x="8046720" y="2240280"/>
-            <a:ext cx="3337560" cy="3657600"/>
-          </a:xfrm>
-          <a:prstGeom prst="rect">
-            <a:avLst/>
-          </a:prstGeom>
-          <a:noFill/>
-        </p:spPr>
-        <p:txBody>
-          <a:bodyPr wrap="square" lIns="0" rIns="0" tIns="0" bIns="0">
-            <a:spAutoFit/>
-          </a:bodyPr>
-          <a:lstStyle/>
-          <a:p>
-            <a:pPr marL="274320" indent="-274320">
-              <a:spcAft>
-                <a:spcPts val="810"/>
-              </a:spcAft>
-              <a:buClr>
-                <a:srgbClr val="0645AD"/>
-              </a:buClr>
-              <a:buFont typeface="Arial"/>
-              <a:buChar char="•"/>
-            </a:pPr>
-            <a:r>
-              <a:rPr sz="1800" b="0">
-                <a:solidFill>
-                  <a:srgbClr val="202122"/>
-                </a:solidFill>
-                <a:latin typeface="Calibri"/>
-              </a:rPr>
-              <a:t>Correct legislation named</a:t>
-            </a:r>
-          </a:p>
-          <a:p>
-            <a:pPr marL="274320" indent="-274320">
-              <a:spcAft>
-                <a:spcPts val="810"/>
-              </a:spcAft>
-              <a:buClr>
-                <a:srgbClr val="0645AD"/>
-              </a:buClr>
-              <a:buFont typeface="Arial"/>
-              <a:buChar char="•"/>
-            </a:pPr>
-            <a:r>
-              <a:rPr sz="1800" b="0">
-                <a:solidFill>
-                  <a:srgbClr val="202122"/>
-                </a:solidFill>
-                <a:latin typeface="Calibri"/>
-              </a:rPr>
-              <a:t>Responsibilities split correctly</a:t>
-            </a:r>
-          </a:p>
-          <a:p>
-            <a:pPr marL="274320" indent="-274320">
-              <a:spcAft>
-                <a:spcPts val="810"/>
-              </a:spcAft>
-              <a:buClr>
-                <a:srgbClr val="0645AD"/>
-              </a:buClr>
-              <a:buFont typeface="Arial"/>
-              <a:buChar char="•"/>
-            </a:pPr>
-            <a:r>
-              <a:rPr sz="1800" b="0">
-                <a:solidFill>
-                  <a:srgbClr val="202122"/>
-                </a:solidFill>
-                <a:latin typeface="Calibri"/>
-              </a:rPr>
-              <a:t>Consequences are realistic</a:t>
+              <a:rPr sz="1300" b="0" i="1">
+                <a:solidFill>
+                  <a:srgbClr val="54595D"/>
+                </a:solidFill>
+                <a:latin typeface="Calibri"/>
+              </a:rPr>
+              <a:t>Answer on mini whiteboards or in your book. Answers are in the speaker notes.</a:t>
             </a:r>
           </a:p>
         </p:txBody>
@@ -8454,7 +9994,7 @@
     <p:bg>
       <p:bgPr>
         <a:solidFill>
-          <a:srgbClr val="03306E"/>
+          <a:srgbClr val="FFFFFF"/>
         </a:solidFill>
         <a:effectLst/>
       </p:bgPr>
@@ -8490,7 +10030,7 @@
             <a:r>
               <a:rPr sz="1100" b="1" i="0">
                 <a:solidFill>
-                  <a:srgbClr val="A9C8F0"/>
+                  <a:srgbClr val="54595D"/>
                 </a:solidFill>
                 <a:latin typeface="Calibri"/>
               </a:rPr>
@@ -8523,25 +10063,135 @@
             <a:r>
               <a:rPr sz="3200" b="1" i="0">
                 <a:solidFill>
-                  <a:srgbClr val="FFFFFF"/>
+                  <a:srgbClr val="03306E"/>
                 </a:solidFill>
                 <a:latin typeface="Cambria"/>
               </a:rPr>
-              <a:t>Exit ticket</a:t>
-            </a:r>
-          </a:p>
-        </p:txBody>
-      </p:sp>
-      <p:sp>
-        <p:nvSpPr>
-          <p:cNvPr id="4" name="Oval 3"/>
+              <a:t>Why it matters</a:t>
+            </a:r>
+          </a:p>
+        </p:txBody>
+      </p:sp>
+      <p:sp>
+        <p:nvSpPr>
+          <p:cNvPr id="4" name="TextBox 3"/>
+          <p:cNvSpPr txBox="1"/>
+          <p:nvPr/>
+        </p:nvSpPr>
+        <p:spPr>
+          <a:xfrm>
+            <a:off x="548640" y="6446520"/>
+            <a:ext cx="8229600" cy="274320"/>
+          </a:xfrm>
+          <a:prstGeom prst="rect">
+            <a:avLst/>
+          </a:prstGeom>
+          <a:noFill/>
+        </p:spPr>
+        <p:txBody>
+          <a:bodyPr wrap="square" anchor="t" lIns="0" rIns="0" tIns="0" bIns="0"/>
+          <a:lstStyle/>
+          <a:p>
+            <a:pPr algn="l"/>
+            <a:r>
+              <a:rPr sz="1000" b="0" i="0">
+                <a:solidFill>
+                  <a:srgbClr val="54595D"/>
+                </a:solidFill>
+                <a:latin typeface="Calibri"/>
+              </a:rPr>
+              <a:t>Design and Development for Engineering and Manufacturing T Level  ·  Health and Safety Legislation and Responsibilities</a:t>
+            </a:r>
+          </a:p>
+        </p:txBody>
+      </p:sp>
+      <p:sp>
+        <p:nvSpPr>
+          <p:cNvPr id="5" name="TextBox 4"/>
+          <p:cNvSpPr txBox="1"/>
+          <p:nvPr/>
+        </p:nvSpPr>
+        <p:spPr>
+          <a:xfrm>
+            <a:off x="10728655" y="6446520"/>
+            <a:ext cx="914400" cy="274320"/>
+          </a:xfrm>
+          <a:prstGeom prst="rect">
+            <a:avLst/>
+          </a:prstGeom>
+          <a:noFill/>
+        </p:spPr>
+        <p:txBody>
+          <a:bodyPr wrap="square" anchor="t" lIns="0" rIns="0" tIns="0" bIns="0"/>
+          <a:lstStyle/>
+          <a:p>
+            <a:pPr algn="r"/>
+            <a:r>
+              <a:rPr sz="1000" b="0" i="0">
+                <a:solidFill>
+                  <a:srgbClr val="54595D"/>
+                </a:solidFill>
+                <a:latin typeface="Calibri"/>
+              </a:rPr>
+              <a:t>9</a:t>
+            </a:r>
+          </a:p>
+        </p:txBody>
+      </p:sp>
+      <p:sp>
+        <p:nvSpPr>
+          <p:cNvPr id="6" name="Rounded Rectangle 5"/>
           <p:cNvSpPr/>
           <p:nvPr/>
         </p:nvSpPr>
         <p:spPr>
           <a:xfrm>
-            <a:off x="548640" y="1737360"/>
-            <a:ext cx="502920" cy="502920"/>
+            <a:off x="548640" y="1600200"/>
+            <a:ext cx="5410047" cy="2148840"/>
+          </a:xfrm>
+          <a:prstGeom prst="roundRect">
+            <a:avLst>
+              <a:gd name="adj" fmla="val 6000"/>
+            </a:avLst>
+          </a:prstGeom>
+          <a:solidFill>
+            <a:srgbClr val="EAF3FF"/>
+          </a:solidFill>
+          <a:ln>
+            <a:noFill/>
+          </a:ln>
+          <a:effectLst/>
+        </p:spPr>
+        <p:style>
+          <a:lnRef idx="1">
+            <a:schemeClr val="accent1"/>
+          </a:lnRef>
+          <a:fillRef idx="3">
+            <a:schemeClr val="accent1"/>
+          </a:fillRef>
+          <a:effectRef idx="2">
+            <a:schemeClr val="accent1"/>
+          </a:effectRef>
+          <a:fontRef idx="minor">
+            <a:schemeClr val="lt1"/>
+          </a:fontRef>
+        </p:style>
+        <p:txBody>
+          <a:bodyPr rtlCol="0" anchor="ctr"/>
+          <a:lstStyle/>
+          <a:p/>
+        </p:txBody>
+      </p:sp>
+      <p:sp>
+        <p:nvSpPr>
+          <p:cNvPr id="7" name="Oval 6"/>
+          <p:cNvSpPr/>
+          <p:nvPr/>
+        </p:nvSpPr>
+        <p:spPr>
+          <a:xfrm>
+            <a:off x="777240" y="1828800"/>
+            <a:ext cx="457200" cy="457200"/>
           </a:xfrm>
           <a:prstGeom prst="ellipse">
             <a:avLst/>
@@ -8574,7 +10224,7 @@
           <a:p>
             <a:pPr algn="ctr"/>
             <a:r>
-              <a:rPr sz="1700" b="1">
+              <a:rPr sz="1500" b="1">
                 <a:solidFill>
                   <a:srgbClr val="202122"/>
                 </a:solidFill>
@@ -8587,14 +10237,14 @@
       </p:sp>
       <p:sp>
         <p:nvSpPr>
-          <p:cNvPr id="5" name="TextBox 4"/>
+          <p:cNvPr id="8" name="TextBox 7"/>
           <p:cNvSpPr txBox="1"/>
           <p:nvPr/>
         </p:nvSpPr>
         <p:spPr>
           <a:xfrm>
-            <a:off x="1325880" y="1645920"/>
-            <a:ext cx="6583680" cy="822960"/>
+            <a:off x="1371600" y="1801368"/>
+            <a:ext cx="4404207" cy="512064"/>
           </a:xfrm>
           <a:prstGeom prst="rect">
             <a:avLst/>
@@ -8607,27 +10257,104 @@
           <a:p>
             <a:pPr algn="l"/>
             <a:r>
+              <a:rPr sz="1900" b="1" i="0">
+                <a:solidFill>
+                  <a:srgbClr val="03306E"/>
+                </a:solidFill>
+                <a:latin typeface="Calibri"/>
+              </a:rPr>
+              <a:t>Fewer accidents</a:t>
+            </a:r>
+          </a:p>
+        </p:txBody>
+      </p:sp>
+      <p:sp>
+        <p:nvSpPr>
+          <p:cNvPr id="9" name="TextBox 8"/>
+          <p:cNvSpPr txBox="1"/>
+          <p:nvPr/>
+        </p:nvSpPr>
+        <p:spPr>
+          <a:xfrm>
+            <a:off x="777240" y="2468880"/>
+            <a:ext cx="4952847" cy="1143000"/>
+          </a:xfrm>
+          <a:prstGeom prst="rect">
+            <a:avLst/>
+          </a:prstGeom>
+          <a:noFill/>
+        </p:spPr>
+        <p:txBody>
+          <a:bodyPr wrap="square" anchor="t" lIns="0" rIns="0" tIns="0" bIns="0"/>
+          <a:lstStyle/>
+          <a:p>
+            <a:pPr algn="l"/>
+            <a:r>
               <a:rPr sz="2000" b="0" i="0">
                 <a:solidFill>
-                  <a:srgbClr val="FFFFFF"/>
-                </a:solidFill>
-                <a:latin typeface="Calibri"/>
-              </a:rPr>
-              <a:t>Which regulation covers noise from a CNC machine?</a:t>
-            </a:r>
-          </a:p>
-        </p:txBody>
-      </p:sp>
-      <p:sp>
-        <p:nvSpPr>
-          <p:cNvPr id="6" name="Oval 5"/>
+                  <a:srgbClr val="202122"/>
+                </a:solidFill>
+                <a:latin typeface="Calibri"/>
+              </a:rPr>
+              <a:t>Legislation has reduced accident and incident rates.</a:t>
+            </a:r>
+          </a:p>
+        </p:txBody>
+      </p:sp>
+      <p:sp>
+        <p:nvSpPr>
+          <p:cNvPr id="10" name="Rounded Rectangle 9"/>
           <p:cNvSpPr/>
           <p:nvPr/>
         </p:nvSpPr>
         <p:spPr>
           <a:xfrm>
-            <a:off x="548640" y="2697480"/>
-            <a:ext cx="502920" cy="502920"/>
+            <a:off x="6233007" y="1600200"/>
+            <a:ext cx="5410047" cy="2148840"/>
+          </a:xfrm>
+          <a:prstGeom prst="roundRect">
+            <a:avLst>
+              <a:gd name="adj" fmla="val 6000"/>
+            </a:avLst>
+          </a:prstGeom>
+          <a:solidFill>
+            <a:srgbClr val="EAF3FF"/>
+          </a:solidFill>
+          <a:ln>
+            <a:noFill/>
+          </a:ln>
+          <a:effectLst/>
+        </p:spPr>
+        <p:style>
+          <a:lnRef idx="1">
+            <a:schemeClr val="accent1"/>
+          </a:lnRef>
+          <a:fillRef idx="3">
+            <a:schemeClr val="accent1"/>
+          </a:fillRef>
+          <a:effectRef idx="2">
+            <a:schemeClr val="accent1"/>
+          </a:effectRef>
+          <a:fontRef idx="minor">
+            <a:schemeClr val="lt1"/>
+          </a:fontRef>
+        </p:style>
+        <p:txBody>
+          <a:bodyPr rtlCol="0" anchor="ctr"/>
+          <a:lstStyle/>
+          <a:p/>
+        </p:txBody>
+      </p:sp>
+      <p:sp>
+        <p:nvSpPr>
+          <p:cNvPr id="11" name="Oval 10"/>
+          <p:cNvSpPr/>
+          <p:nvPr/>
+        </p:nvSpPr>
+        <p:spPr>
+          <a:xfrm>
+            <a:off x="6461607" y="1828800"/>
+            <a:ext cx="457200" cy="457200"/>
           </a:xfrm>
           <a:prstGeom prst="ellipse">
             <a:avLst/>
@@ -8660,7 +10387,7 @@
           <a:p>
             <a:pPr algn="ctr"/>
             <a:r>
-              <a:rPr sz="1700" b="1">
+              <a:rPr sz="1500" b="1">
                 <a:solidFill>
                   <a:srgbClr val="202122"/>
                 </a:solidFill>
@@ -8673,14 +10400,14 @@
       </p:sp>
       <p:sp>
         <p:nvSpPr>
-          <p:cNvPr id="7" name="TextBox 6"/>
+          <p:cNvPr id="12" name="TextBox 11"/>
           <p:cNvSpPr txBox="1"/>
           <p:nvPr/>
         </p:nvSpPr>
         <p:spPr>
           <a:xfrm>
-            <a:off x="1325880" y="2606040"/>
-            <a:ext cx="6583680" cy="822960"/>
+            <a:off x="7055967" y="1801368"/>
+            <a:ext cx="4404207" cy="512064"/>
           </a:xfrm>
           <a:prstGeom prst="rect">
             <a:avLst/>
@@ -8693,27 +10420,104 @@
           <a:p>
             <a:pPr algn="l"/>
             <a:r>
+              <a:rPr sz="1900" b="1" i="0">
+                <a:solidFill>
+                  <a:srgbClr val="03306E"/>
+                </a:solidFill>
+                <a:latin typeface="Calibri"/>
+              </a:rPr>
+              <a:t>Wellbeing</a:t>
+            </a:r>
+          </a:p>
+        </p:txBody>
+      </p:sp>
+      <p:sp>
+        <p:nvSpPr>
+          <p:cNvPr id="13" name="TextBox 12"/>
+          <p:cNvSpPr txBox="1"/>
+          <p:nvPr/>
+        </p:nvSpPr>
+        <p:spPr>
+          <a:xfrm>
+            <a:off x="6461607" y="2468880"/>
+            <a:ext cx="4952847" cy="1143000"/>
+          </a:xfrm>
+          <a:prstGeom prst="rect">
+            <a:avLst/>
+          </a:prstGeom>
+          <a:noFill/>
+        </p:spPr>
+        <p:txBody>
+          <a:bodyPr wrap="square" anchor="t" lIns="0" rIns="0" tIns="0" bIns="0"/>
+          <a:lstStyle/>
+          <a:p>
+            <a:pPr algn="l"/>
+            <a:r>
               <a:rPr sz="2000" b="0" i="0">
                 <a:solidFill>
-                  <a:srgbClr val="FFFFFF"/>
-                </a:solidFill>
-                <a:latin typeface="Calibri"/>
-              </a:rPr>
-              <a:t>Why is wellbeing part of health and safety?</a:t>
-            </a:r>
-          </a:p>
-        </p:txBody>
-      </p:sp>
-      <p:sp>
-        <p:nvSpPr>
-          <p:cNvPr id="8" name="Oval 7"/>
+                  <a:srgbClr val="202122"/>
+                </a:solidFill>
+                <a:latin typeface="Calibri"/>
+              </a:rPr>
+              <a:t>Mental health and wellbeing matter as much as physical safety.</a:t>
+            </a:r>
+          </a:p>
+        </p:txBody>
+      </p:sp>
+      <p:sp>
+        <p:nvSpPr>
+          <p:cNvPr id="14" name="Rounded Rectangle 13"/>
           <p:cNvSpPr/>
           <p:nvPr/>
         </p:nvSpPr>
         <p:spPr>
           <a:xfrm>
-            <a:off x="548640" y="3657600"/>
-            <a:ext cx="502920" cy="502920"/>
+            <a:off x="548640" y="4023360"/>
+            <a:ext cx="5410047" cy="2148840"/>
+          </a:xfrm>
+          <a:prstGeom prst="roundRect">
+            <a:avLst>
+              <a:gd name="adj" fmla="val 6000"/>
+            </a:avLst>
+          </a:prstGeom>
+          <a:solidFill>
+            <a:srgbClr val="EAF3FF"/>
+          </a:solidFill>
+          <a:ln>
+            <a:noFill/>
+          </a:ln>
+          <a:effectLst/>
+        </p:spPr>
+        <p:style>
+          <a:lnRef idx="1">
+            <a:schemeClr val="accent1"/>
+          </a:lnRef>
+          <a:fillRef idx="3">
+            <a:schemeClr val="accent1"/>
+          </a:fillRef>
+          <a:effectRef idx="2">
+            <a:schemeClr val="accent1"/>
+          </a:effectRef>
+          <a:fontRef idx="minor">
+            <a:schemeClr val="lt1"/>
+          </a:fontRef>
+        </p:style>
+        <p:txBody>
+          <a:bodyPr rtlCol="0" anchor="ctr"/>
+          <a:lstStyle/>
+          <a:p/>
+        </p:txBody>
+      </p:sp>
+      <p:sp>
+        <p:nvSpPr>
+          <p:cNvPr id="15" name="Oval 14"/>
+          <p:cNvSpPr/>
+          <p:nvPr/>
+        </p:nvSpPr>
+        <p:spPr>
+          <a:xfrm>
+            <a:off x="777240" y="4251960"/>
+            <a:ext cx="457200" cy="457200"/>
           </a:xfrm>
           <a:prstGeom prst="ellipse">
             <a:avLst/>
@@ -8746,7 +10550,7 @@
           <a:p>
             <a:pPr algn="ctr"/>
             <a:r>
-              <a:rPr sz="1700" b="1">
+              <a:rPr sz="1500" b="1">
                 <a:solidFill>
                   <a:srgbClr val="202122"/>
                 </a:solidFill>
@@ -8759,14 +10563,14 @@
       </p:sp>
       <p:sp>
         <p:nvSpPr>
-          <p:cNvPr id="9" name="TextBox 8"/>
+          <p:cNvPr id="16" name="TextBox 15"/>
           <p:cNvSpPr txBox="1"/>
           <p:nvPr/>
         </p:nvSpPr>
         <p:spPr>
           <a:xfrm>
-            <a:off x="1325880" y="3566160"/>
-            <a:ext cx="6583680" cy="822960"/>
+            <a:off x="1371600" y="4224528"/>
+            <a:ext cx="4404207" cy="512064"/>
           </a:xfrm>
           <a:prstGeom prst="rect">
             <a:avLst/>
@@ -8779,35 +10583,68 @@
           <a:p>
             <a:pPr algn="l"/>
             <a:r>
+              <a:rPr sz="1900" b="1" i="0">
+                <a:solidFill>
+                  <a:srgbClr val="03306E"/>
+                </a:solidFill>
+                <a:latin typeface="Calibri"/>
+              </a:rPr>
+              <a:t>Enforcement</a:t>
+            </a:r>
+          </a:p>
+        </p:txBody>
+      </p:sp>
+      <p:sp>
+        <p:nvSpPr>
+          <p:cNvPr id="17" name="TextBox 16"/>
+          <p:cNvSpPr txBox="1"/>
+          <p:nvPr/>
+        </p:nvSpPr>
+        <p:spPr>
+          <a:xfrm>
+            <a:off x="777240" y="4892040"/>
+            <a:ext cx="4952847" cy="1143000"/>
+          </a:xfrm>
+          <a:prstGeom prst="rect">
+            <a:avLst/>
+          </a:prstGeom>
+          <a:noFill/>
+        </p:spPr>
+        <p:txBody>
+          <a:bodyPr wrap="square" anchor="t" lIns="0" rIns="0" tIns="0" bIns="0"/>
+          <a:lstStyle/>
+          <a:p>
+            <a:pPr algn="l"/>
+            <a:r>
               <a:rPr sz="2000" b="0" i="0">
                 <a:solidFill>
-                  <a:srgbClr val="FFFFFF"/>
-                </a:solidFill>
-                <a:latin typeface="Calibri"/>
-              </a:rPr>
-              <a:t>What should you do if asked to use a machine you're not trained on?</a:t>
-            </a:r>
-          </a:p>
-        </p:txBody>
-      </p:sp>
-      <p:sp>
-        <p:nvSpPr>
-          <p:cNvPr id="10" name="Rounded Rectangle 9"/>
+                  <a:srgbClr val="202122"/>
+                </a:solidFill>
+                <a:latin typeface="Calibri"/>
+              </a:rPr>
+              <a:t>The HSE enforces the law.</a:t>
+            </a:r>
+          </a:p>
+        </p:txBody>
+      </p:sp>
+      <p:sp>
+        <p:nvSpPr>
+          <p:cNvPr id="18" name="Rounded Rectangle 17"/>
           <p:cNvSpPr/>
           <p:nvPr/>
         </p:nvSpPr>
         <p:spPr>
           <a:xfrm>
-            <a:off x="8229600" y="1645920"/>
-            <a:ext cx="3410712" cy="2926080"/>
+            <a:off x="6233007" y="4023360"/>
+            <a:ext cx="5410047" cy="2148840"/>
           </a:xfrm>
           <a:prstGeom prst="roundRect">
             <a:avLst>
-              <a:gd name="adj" fmla="val 8000"/>
+              <a:gd name="adj" fmla="val 6000"/>
             </a:avLst>
           </a:prstGeom>
           <a:solidFill>
-            <a:srgbClr val="0645AD"/>
+            <a:srgbClr val="EAF3FF"/>
           </a:solidFill>
           <a:ln>
             <a:noFill/>
@@ -8836,14 +10673,67 @@
       </p:sp>
       <p:sp>
         <p:nvSpPr>
-          <p:cNvPr id="11" name="TextBox 10"/>
+          <p:cNvPr id="19" name="Oval 18"/>
+          <p:cNvSpPr/>
+          <p:nvPr/>
+        </p:nvSpPr>
+        <p:spPr>
+          <a:xfrm>
+            <a:off x="6461607" y="4251960"/>
+            <a:ext cx="457200" cy="457200"/>
+          </a:xfrm>
+          <a:prstGeom prst="ellipse">
+            <a:avLst/>
+          </a:prstGeom>
+          <a:solidFill>
+            <a:srgbClr val="F2B705"/>
+          </a:solidFill>
+          <a:ln>
+            <a:noFill/>
+          </a:ln>
+          <a:effectLst/>
+        </p:spPr>
+        <p:style>
+          <a:lnRef idx="1">
+            <a:schemeClr val="accent1"/>
+          </a:lnRef>
+          <a:fillRef idx="3">
+            <a:schemeClr val="accent1"/>
+          </a:fillRef>
+          <a:effectRef idx="2">
+            <a:schemeClr val="accent1"/>
+          </a:effectRef>
+          <a:fontRef idx="minor">
+            <a:schemeClr val="lt1"/>
+          </a:fontRef>
+        </p:style>
+        <p:txBody>
+          <a:bodyPr rtlCol="0" anchor="ctr" lIns="0" rIns="0" tIns="0" bIns="0"/>
+          <a:lstStyle/>
+          <a:p>
+            <a:pPr algn="ctr"/>
+            <a:r>
+              <a:rPr sz="1500" b="1">
+                <a:solidFill>
+                  <a:srgbClr val="202122"/>
+                </a:solidFill>
+                <a:latin typeface="Calibri"/>
+              </a:rPr>
+              <a:t>4</a:t>
+            </a:r>
+          </a:p>
+        </p:txBody>
+      </p:sp>
+      <p:sp>
+        <p:nvSpPr>
+          <p:cNvPr id="20" name="TextBox 19"/>
           <p:cNvSpPr txBox="1"/>
           <p:nvPr/>
         </p:nvSpPr>
         <p:spPr>
           <a:xfrm>
-            <a:off x="8503920" y="1874519"/>
-            <a:ext cx="2926080" cy="365760"/>
+            <a:off x="7055967" y="4224528"/>
+            <a:ext cx="4404207" cy="512064"/>
           </a:xfrm>
           <a:prstGeom prst="rect">
             <a:avLst/>
@@ -8851,117 +10741,51 @@
           <a:noFill/>
         </p:spPr>
         <p:txBody>
+          <a:bodyPr wrap="square" anchor="ctr" lIns="0" rIns="0" tIns="0" bIns="0"/>
+          <a:lstStyle/>
+          <a:p>
+            <a:pPr algn="l"/>
+            <a:r>
+              <a:rPr sz="1900" b="1" i="0">
+                <a:solidFill>
+                  <a:srgbClr val="03306E"/>
+                </a:solidFill>
+                <a:latin typeface="Calibri"/>
+              </a:rPr>
+              <a:t>Non-compliance</a:t>
+            </a:r>
+          </a:p>
+        </p:txBody>
+      </p:sp>
+      <p:sp>
+        <p:nvSpPr>
+          <p:cNvPr id="21" name="TextBox 20"/>
+          <p:cNvSpPr txBox="1"/>
+          <p:nvPr/>
+        </p:nvSpPr>
+        <p:spPr>
+          <a:xfrm>
+            <a:off x="6461607" y="4892040"/>
+            <a:ext cx="4952847" cy="1143000"/>
+          </a:xfrm>
+          <a:prstGeom prst="rect">
+            <a:avLst/>
+          </a:prstGeom>
+          <a:noFill/>
+        </p:spPr>
+        <p:txBody>
           <a:bodyPr wrap="square" anchor="t" lIns="0" rIns="0" tIns="0" bIns="0"/>
           <a:lstStyle/>
           <a:p>
             <a:pPr algn="l"/>
             <a:r>
-              <a:rPr sz="1300" b="1" i="0">
-                <a:solidFill>
-                  <a:srgbClr val="A9C8F0"/>
-                </a:solidFill>
-                <a:latin typeface="Calibri"/>
-              </a:rPr>
-              <a:t>REVISE THIS TOPIC</a:t>
-            </a:r>
-          </a:p>
-        </p:txBody>
-      </p:sp>
-      <p:sp>
-        <p:nvSpPr>
-          <p:cNvPr id="12" name="TextBox 11"/>
-          <p:cNvSpPr txBox="1"/>
-          <p:nvPr/>
-        </p:nvSpPr>
-        <p:spPr>
-          <a:xfrm>
-            <a:off x="8503920" y="2286000"/>
-            <a:ext cx="2926080" cy="548640"/>
-          </a:xfrm>
-          <a:prstGeom prst="rect">
-            <a:avLst/>
-          </a:prstGeom>
-          <a:noFill/>
-        </p:spPr>
-        <p:txBody>
-          <a:bodyPr wrap="square" anchor="t" lIns="0" rIns="0" tIns="0" bIns="0"/>
-          <a:lstStyle/>
-          <a:p>
-            <a:pPr algn="l"/>
-            <a:r>
-              <a:rPr sz="1400" b="0" i="0">
-                <a:solidFill>
-                  <a:srgbClr val="FFFFFF"/>
-                </a:solidFill>
-                <a:latin typeface="Calibri"/>
-              </a:rPr>
-              <a:t>Revision notes for this lesson are on the study wiki:</a:t>
-            </a:r>
-          </a:p>
-        </p:txBody>
-      </p:sp>
-      <p:sp>
-        <p:nvSpPr>
-          <p:cNvPr id="13" name="TextBox 12"/>
-          <p:cNvSpPr txBox="1"/>
-          <p:nvPr/>
-        </p:nvSpPr>
-        <p:spPr>
-          <a:xfrm>
-            <a:off x="8503920" y="2926080"/>
-            <a:ext cx="2926080" cy="1463040"/>
-          </a:xfrm>
-          <a:prstGeom prst="rect">
-            <a:avLst/>
-          </a:prstGeom>
-          <a:noFill/>
-        </p:spPr>
-        <p:txBody>
-          <a:bodyPr wrap="square" anchor="t" lIns="0" rIns="0" tIns="0" bIns="0"/>
-          <a:lstStyle/>
-          <a:p>
-            <a:pPr algn="l"/>
-            <a:r>
-              <a:rPr sz="2000" b="1" i="0">
-                <a:solidFill>
-                  <a:srgbClr val="FFFFFF"/>
-                </a:solidFill>
-                <a:latin typeface="Cambria"/>
-              </a:rPr>
-              <a:t>Engineering Core, Part 2</a:t>
-            </a:r>
-          </a:p>
-        </p:txBody>
-      </p:sp>
-      <p:sp>
-        <p:nvSpPr>
-          <p:cNvPr id="14" name="TextBox 13"/>
-          <p:cNvSpPr txBox="1"/>
-          <p:nvPr/>
-        </p:nvSpPr>
-        <p:spPr>
-          <a:xfrm>
-            <a:off x="548640" y="5669280"/>
-            <a:ext cx="11094415" cy="548640"/>
-          </a:xfrm>
-          <a:prstGeom prst="rect">
-            <a:avLst/>
-          </a:prstGeom>
-          <a:noFill/>
-        </p:spPr>
-        <p:txBody>
-          <a:bodyPr wrap="square" anchor="t" lIns="0" rIns="0" tIns="0" bIns="0"/>
-          <a:lstStyle/>
-          <a:p>
-            <a:pPr algn="l"/>
-            <a:r>
-              <a:rPr sz="1200" b="0" i="0">
-                <a:solidFill>
-                  <a:srgbClr val="A9C8F0"/>
-                </a:solidFill>
-                <a:latin typeface="Calibri"/>
-              </a:rPr>
-              <a:t>https://lana6478.github.io/T-level-Design-Development-Engineering-Manufacturing/#/01-core-component/02-engineering-core-part2.md</a:t>
+              <a:rPr sz="2000" b="0" i="0">
+                <a:solidFill>
+                  <a:srgbClr val="202122"/>
+                </a:solidFill>
+                <a:latin typeface="Calibri"/>
+              </a:rPr>
+              <a:t>Injury, prosecution, fines, closure and reputational damage.</a:t>
             </a:r>
           </a:p>
         </p:txBody>
